--- a/2026.4.23/LineFormer.pptx
+++ b/2026.4.23/LineFormer.pptx
@@ -5,20 +5,19 @@
     <p:sldMasterId id="2147483648" r:id="rId1"/>
   </p:sldMasterIdLst>
   <p:notesMasterIdLst>
-    <p:notesMasterId r:id="rId10"/>
+    <p:notesMasterId r:id="rId4"/>
   </p:notesMasterIdLst>
   <p:sldIdLst>
-    <p:sldId id="256" r:id="rId3"/>
-    <p:sldId id="257" r:id="rId4"/>
+    <p:sldId id="257" r:id="rId3"/>
     <p:sldId id="258" r:id="rId5"/>
     <p:sldId id="259" r:id="rId6"/>
     <p:sldId id="260" r:id="rId7"/>
     <p:sldId id="261" r:id="rId8"/>
     <p:sldId id="262" r:id="rId9"/>
-    <p:sldId id="263" r:id="rId11"/>
-    <p:sldId id="264" r:id="rId12"/>
-    <p:sldId id="265" r:id="rId13"/>
-    <p:sldId id="266" r:id="rId14"/>
+    <p:sldId id="263" r:id="rId10"/>
+    <p:sldId id="264" r:id="rId11"/>
+    <p:sldId id="265" r:id="rId12"/>
+    <p:sldId id="266" r:id="rId13"/>
   </p:sldIdLst>
   <p:sldSz cx="12192000" cy="6858000"/>
   <p:notesSz cx="6858000" cy="9144000"/>
@@ -484,6 +483,54 @@
 </file>
 
 <file path=ppt/notesSlides/notesSlide1.xml><?xml version="1.0" encoding="utf-8"?>
+<p:notes xmlns:a="http://schemas.openxmlformats.org/drawingml/2006/main" xmlns:r="http://schemas.openxmlformats.org/officeDocument/2006/relationships" xmlns:p="http://schemas.openxmlformats.org/presentationml/2006/main">
+  <p:cSld>
+    <p:spTree>
+      <p:nvGrpSpPr>
+        <p:cNvPr id="1" name=""/>
+        <p:cNvGrpSpPr/>
+        <p:nvPr/>
+      </p:nvGrpSpPr>
+      <p:grpSpPr/>
+      <p:sp>
+        <p:nvSpPr>
+          <p:cNvPr id="2" name="幻灯片图像占位符 1"/>
+          <p:cNvSpPr>
+            <a:spLocks noGrp="1"/>
+          </p:cNvSpPr>
+          <p:nvPr>
+            <p:ph type="sldImg" idx="2"/>
+          </p:nvPr>
+        </p:nvSpPr>
+        <p:spPr/>
+      </p:sp>
+      <p:sp>
+        <p:nvSpPr>
+          <p:cNvPr id="3" name="文本占位符 2"/>
+          <p:cNvSpPr>
+            <a:spLocks noGrp="1"/>
+          </p:cNvSpPr>
+          <p:nvPr>
+            <p:ph type="body" idx="3"/>
+          </p:nvPr>
+        </p:nvSpPr>
+        <p:spPr/>
+        <p:txBody>
+          <a:bodyPr/>
+          <a:p>
+            <a:endParaRPr lang="zh-CN" altLang="en-US"/>
+          </a:p>
+        </p:txBody>
+      </p:sp>
+    </p:spTree>
+  </p:cSld>
+  <p:clrMapOvr>
+    <a:masterClrMapping/>
+  </p:clrMapOvr>
+</p:notes>
+</file>
+
+<file path=ppt/notesSlides/notesSlide2.xml><?xml version="1.0" encoding="utf-8"?>
 <p:notes xmlns:a="http://schemas.openxmlformats.org/drawingml/2006/main" xmlns:r="http://schemas.openxmlformats.org/officeDocument/2006/relationships" xmlns:p="http://schemas.openxmlformats.org/presentationml/2006/main">
   <p:cSld>
     <p:spTree>
@@ -3479,14 +3526,7 @@
         <p:cNvGrpSpPr/>
         <p:nvPr/>
       </p:nvGrpSpPr>
-      <p:grpSpPr>
-        <a:xfrm>
-          <a:off x="0" y="0"/>
-          <a:ext cx="0" cy="0"/>
-          <a:chOff x="0" y="0"/>
-          <a:chExt cx="0" cy="0"/>
-        </a:xfrm>
-      </p:grpSpPr>
+      <p:grpSpPr/>
       <p:sp>
         <p:nvSpPr>
           <p:cNvPr id="2" name="标题 1"/>
@@ -3494,7 +3534,7 @@
             <a:spLocks noGrp="1"/>
           </p:cNvSpPr>
           <p:nvPr>
-            <p:ph type="ctrTitle"/>
+            <p:ph type="title"/>
             <p:custDataLst>
               <p:tags r:id="rId1"/>
             </p:custDataLst>
@@ -3504,35 +3544,74 @@
         <p:txBody>
           <a:bodyPr/>
           <a:p>
-            <a:endParaRPr lang="zh-CN" altLang="zh-CN"/>
+            <a:endParaRPr lang="zh-CN" altLang="en-US"/>
           </a:p>
         </p:txBody>
       </p:sp>
       <p:sp>
         <p:nvSpPr>
-          <p:cNvPr id="3" name="副标题 2"/>
+          <p:cNvPr id="3" name="内容占位符 2"/>
           <p:cNvSpPr>
             <a:spLocks noGrp="1"/>
           </p:cNvSpPr>
           <p:nvPr>
-            <p:ph type="subTitle" idx="1"/>
+            <p:ph idx="1"/>
             <p:custDataLst>
               <p:tags r:id="rId2"/>
             </p:custDataLst>
           </p:nvPr>
         </p:nvSpPr>
-        <p:spPr/>
+        <p:spPr>
+          <a:xfrm>
+            <a:off x="608330" y="5200015"/>
+            <a:ext cx="10968990" cy="1049655"/>
+          </a:xfrm>
+        </p:spPr>
         <p:txBody>
           <a:bodyPr/>
           <a:p>
+            <a:pPr marL="0" indent="0" algn="ctr">
+              <a:buNone/>
+            </a:pPr>
+            <a:r>
+              <a:rPr lang="en-US" altLang="zh-CN"/>
+              <a:t>ICDAR </a:t>
+            </a:r>
+            <a:endParaRPr lang="en-US" altLang="zh-CN"/>
+          </a:p>
+          <a:p>
+            <a:pPr marL="0" indent="0" algn="ctr">
+              <a:buNone/>
+            </a:pPr>
             <a:endParaRPr lang="zh-CN" altLang="en-US"/>
           </a:p>
         </p:txBody>
       </p:sp>
+      <p:pic>
+        <p:nvPicPr>
+          <p:cNvPr id="5" name="图片 4"/>
+          <p:cNvPicPr>
+            <a:picLocks noChangeAspect="1"/>
+          </p:cNvPicPr>
+          <p:nvPr/>
+        </p:nvPicPr>
+        <p:blipFill>
+          <a:blip r:embed="rId3"/>
+          <a:stretch>
+            <a:fillRect/>
+          </a:stretch>
+        </p:blipFill>
+        <p:spPr>
+          <a:xfrm>
+            <a:off x="1170940" y="1054735"/>
+            <a:ext cx="9458325" cy="3974465"/>
+          </a:xfrm>
+          <a:prstGeom prst="rect">
+            <a:avLst/>
+          </a:prstGeom>
+        </p:spPr>
+      </p:pic>
     </p:spTree>
-    <p:custDataLst>
-      <p:tags r:id="rId3"/>
-    </p:custDataLst>
   </p:cSld>
   <p:clrMapOvr>
     <a:masterClrMapping/>
@@ -3541,6 +3620,2754 @@
 </file>
 
 <file path=ppt/slides/slide10.xml><?xml version="1.0" encoding="utf-8"?>
+<p:sld xmlns:a="http://schemas.openxmlformats.org/drawingml/2006/main" xmlns:r="http://schemas.openxmlformats.org/officeDocument/2006/relationships" xmlns:p="http://schemas.openxmlformats.org/presentationml/2006/main">
+  <p:cSld>
+    <p:spTree>
+      <p:nvGrpSpPr>
+        <p:cNvPr id="1" name=""/>
+        <p:cNvGrpSpPr/>
+        <p:nvPr/>
+      </p:nvGrpSpPr>
+      <p:grpSpPr/>
+      <p:sp>
+        <p:nvSpPr>
+          <p:cNvPr id="2" name="标题 1"/>
+          <p:cNvSpPr>
+            <a:spLocks noGrp="1"/>
+          </p:cNvSpPr>
+          <p:nvPr>
+            <p:ph type="title"/>
+            <p:custDataLst>
+              <p:tags r:id="rId1"/>
+            </p:custDataLst>
+          </p:nvPr>
+        </p:nvSpPr>
+        <p:spPr/>
+        <p:txBody>
+          <a:bodyPr/>
+          <a:p>
+            <a:r>
+              <a:rPr lang="en-US" altLang="zh-CN"/>
+              <a:t>Future</a:t>
+            </a:r>
+            <a:endParaRPr lang="en-US" altLang="zh-CN"/>
+          </a:p>
+        </p:txBody>
+      </p:sp>
+      <p:sp>
+        <p:nvSpPr>
+          <p:cNvPr id="3" name="内容占位符 2"/>
+          <p:cNvSpPr>
+            <a:spLocks noGrp="1"/>
+          </p:cNvSpPr>
+          <p:nvPr>
+            <p:ph idx="1"/>
+            <p:custDataLst>
+              <p:tags r:id="rId2"/>
+            </p:custDataLst>
+          </p:nvPr>
+        </p:nvSpPr>
+        <p:spPr/>
+        <p:txBody>
+          <a:bodyPr/>
+          <a:p>
+            <a:r>
+              <a:rPr lang="en-US" altLang="zh-CN"/>
+              <a:t>1. </a:t>
+            </a:r>
+            <a:r>
+              <a:rPr lang="zh-CN" altLang="en-US"/>
+              <a:t>在黑白带网格的图像上识别的问题；</a:t>
+            </a:r>
+            <a:endParaRPr lang="zh-CN" altLang="en-US"/>
+          </a:p>
+          <a:p>
+            <a:r>
+              <a:rPr lang="en-US" altLang="zh-CN"/>
+              <a:t>2. </a:t>
+            </a:r>
+            <a:r>
+              <a:rPr lang="zh-CN" altLang="en-US"/>
+              <a:t>曲线交会会导致识别提前终止；</a:t>
+            </a:r>
+            <a:endParaRPr lang="zh-CN" altLang="en-US"/>
+          </a:p>
+          <a:p>
+            <a:r>
+              <a:rPr lang="en-US" altLang="zh-CN"/>
+              <a:t>3. </a:t>
+            </a:r>
+            <a:r>
+              <a:rPr lang="zh-CN" altLang="en-US">
+                <a:solidFill>
+                  <a:srgbClr val="FF0000"/>
+                </a:solidFill>
+              </a:rPr>
+              <a:t>虚线与实线交汇上，虚线丢失问题（</a:t>
+            </a:r>
+            <a:r>
+              <a:rPr lang="zh-CN" altLang="en-US">
+                <a:solidFill>
+                  <a:srgbClr val="FF0000"/>
+                </a:solidFill>
+              </a:rPr>
+              <a:t>特征注入）</a:t>
+            </a:r>
+            <a:endParaRPr lang="zh-CN" altLang="en-US">
+              <a:solidFill>
+                <a:srgbClr val="FF0000"/>
+              </a:solidFill>
+            </a:endParaRPr>
+          </a:p>
+        </p:txBody>
+      </p:sp>
+    </p:spTree>
+  </p:cSld>
+  <p:clrMapOvr>
+    <a:masterClrMapping/>
+  </p:clrMapOvr>
+</p:sld>
+</file>
+
+<file path=ppt/slides/slide2.xml><?xml version="1.0" encoding="utf-8"?>
+<p:sld xmlns:a="http://schemas.openxmlformats.org/drawingml/2006/main" xmlns:r="http://schemas.openxmlformats.org/officeDocument/2006/relationships" xmlns:p="http://schemas.openxmlformats.org/presentationml/2006/main">
+  <p:cSld>
+    <p:spTree>
+      <p:nvGrpSpPr>
+        <p:cNvPr id="1" name=""/>
+        <p:cNvGrpSpPr/>
+        <p:nvPr/>
+      </p:nvGrpSpPr>
+      <p:grpSpPr/>
+      <p:sp>
+        <p:nvSpPr>
+          <p:cNvPr id="2" name="标题 1"/>
+          <p:cNvSpPr>
+            <a:spLocks noGrp="1"/>
+          </p:cNvSpPr>
+          <p:nvPr>
+            <p:ph type="title"/>
+            <p:custDataLst>
+              <p:tags r:id="rId1"/>
+            </p:custDataLst>
+          </p:nvPr>
+        </p:nvSpPr>
+        <p:spPr/>
+        <p:txBody>
+          <a:bodyPr/>
+          <a:p>
+            <a:r>
+              <a:rPr lang="zh-CN" altLang="en-US"/>
+              <a:t>背景</a:t>
+            </a:r>
+            <a:endParaRPr lang="zh-CN" altLang="en-US"/>
+          </a:p>
+        </p:txBody>
+      </p:sp>
+      <p:sp>
+        <p:nvSpPr>
+          <p:cNvPr id="3" name="内容占位符 2"/>
+          <p:cNvSpPr>
+            <a:spLocks noGrp="1"/>
+          </p:cNvSpPr>
+          <p:nvPr>
+            <p:ph idx="1"/>
+            <p:custDataLst>
+              <p:tags r:id="rId2"/>
+            </p:custDataLst>
+          </p:nvPr>
+        </p:nvSpPr>
+        <p:spPr/>
+        <p:txBody>
+          <a:bodyPr>
+            <a:noAutofit/>
+          </a:bodyPr>
+          <a:p>
+            <a:r>
+              <a:rPr lang="zh-CN" altLang="en-US" sz="1400"/>
+              <a:t>为什么要做折线图数据提取？</a:t>
+            </a:r>
+            <a:endParaRPr lang="zh-CN" altLang="en-US" sz="1400"/>
+          </a:p>
+          <a:p>
+            <a:pPr lvl="1"/>
+            <a:r>
+              <a:rPr lang="zh-CN" altLang="en-US" sz="1200"/>
+              <a:t>大量科研论文</a:t>
+            </a:r>
+            <a:r>
+              <a:rPr lang="en-US" altLang="zh-CN" sz="1200"/>
+              <a:t>/</a:t>
+            </a:r>
+            <a:r>
+              <a:rPr lang="zh-CN" altLang="en-US" sz="1200"/>
+              <a:t>报告以图表形式展示数据</a:t>
+            </a:r>
+            <a:endParaRPr lang="zh-CN" altLang="en-US" sz="1200"/>
+          </a:p>
+          <a:p>
+            <a:pPr lvl="1"/>
+            <a:r>
+              <a:rPr lang="zh-CN" altLang="en-US" sz="1200"/>
+              <a:t>原始数据不可获取</a:t>
+            </a:r>
+            <a:endParaRPr lang="zh-CN" altLang="en-US" sz="1200"/>
+          </a:p>
+          <a:p>
+            <a:pPr lvl="1"/>
+            <a:r>
+              <a:rPr lang="zh-CN" altLang="en-US" sz="1200"/>
+              <a:t>需要自动恢复结构化数据（</a:t>
+            </a:r>
+            <a:r>
+              <a:rPr lang="en-US" altLang="zh-CN" sz="1200"/>
+              <a:t>table / array</a:t>
+            </a:r>
+            <a:r>
+              <a:rPr lang="zh-CN" altLang="en-US" sz="1200"/>
+              <a:t>）</a:t>
+            </a:r>
+            <a:endParaRPr lang="en-US" altLang="zh-CN" sz="1200"/>
+          </a:p>
+          <a:p>
+            <a:endParaRPr lang="zh-CN" altLang="en-US" sz="1400"/>
+          </a:p>
+          <a:p>
+            <a:r>
+              <a:rPr lang="zh-CN" altLang="en-US" sz="1400"/>
+              <a:t>本质任务：图像</a:t>
+            </a:r>
+            <a:r>
+              <a:rPr lang="en-US" altLang="zh-CN" sz="1400"/>
+              <a:t> </a:t>
+            </a:r>
+            <a:r>
+              <a:rPr lang="en-US" altLang="en-US" sz="1400"/>
+              <a:t>→</a:t>
+            </a:r>
+            <a:r>
+              <a:rPr lang="en-US" altLang="zh-CN" sz="1400"/>
+              <a:t> </a:t>
+            </a:r>
+            <a:r>
+              <a:rPr lang="zh-CN" altLang="en-US" sz="1400"/>
+              <a:t>曲线</a:t>
+            </a:r>
+            <a:r>
+              <a:rPr lang="en-US" altLang="zh-CN" sz="1400"/>
+              <a:t> </a:t>
+            </a:r>
+            <a:r>
+              <a:rPr lang="en-US" altLang="en-US" sz="1400"/>
+              <a:t>→</a:t>
+            </a:r>
+            <a:r>
+              <a:rPr lang="en-US" altLang="zh-CN" sz="1400"/>
+              <a:t> </a:t>
+            </a:r>
+            <a:r>
+              <a:rPr lang="zh-CN" altLang="en-US" sz="1400"/>
+              <a:t>数值序列</a:t>
+            </a:r>
+            <a:endParaRPr lang="zh-CN" altLang="en-US" sz="1400"/>
+          </a:p>
+          <a:p>
+            <a:endParaRPr lang="zh-CN" altLang="en-US" sz="1400"/>
+          </a:p>
+          <a:p>
+            <a:r>
+              <a:rPr lang="zh-CN" altLang="en-US" sz="1400"/>
+              <a:t>传统方法</a:t>
+            </a:r>
+            <a:r>
+              <a:rPr lang="zh-CN" altLang="en-US" sz="1400"/>
+              <a:t>存在的问题：</a:t>
+            </a:r>
+            <a:endParaRPr lang="en-US" altLang="zh-CN" sz="1400"/>
+          </a:p>
+          <a:p>
+            <a:pPr lvl="1"/>
+            <a:r>
+              <a:rPr lang="zh-CN" altLang="en-US" sz="1200"/>
+              <a:t>依赖图例（</a:t>
+            </a:r>
+            <a:r>
+              <a:rPr lang="en-US" altLang="zh-CN" sz="1200"/>
+              <a:t>Legend</a:t>
+            </a:r>
+            <a:r>
+              <a:rPr lang="zh-CN" altLang="en-US" sz="1200"/>
+              <a:t>）等辅助信息。</a:t>
+            </a:r>
+            <a:endParaRPr lang="en-US" altLang="zh-CN" sz="1200"/>
+          </a:p>
+          <a:p>
+            <a:pPr lvl="1"/>
+            <a:r>
+              <a:rPr lang="zh-CN" altLang="en-US" sz="1200"/>
+              <a:t>对曲线交叉、颜色相似或图表样式变化不够鲁棒。</a:t>
+            </a:r>
+            <a:endParaRPr lang="en-US" altLang="zh-CN" sz="1200"/>
+          </a:p>
+          <a:p>
+            <a:pPr lvl="1"/>
+            <a:r>
+              <a:rPr lang="zh-CN" altLang="en-US" sz="1200"/>
+              <a:t>流程过于复杂，通常包含多个独立的预处理步骤。</a:t>
+            </a:r>
+            <a:endParaRPr lang="zh-CN" altLang="en-US" sz="1200"/>
+          </a:p>
+          <a:p>
+            <a:pPr lvl="0"/>
+            <a:endParaRPr lang="zh-CN" altLang="en-US" sz="1350"/>
+          </a:p>
+          <a:p>
+            <a:pPr lvl="0"/>
+            <a:r>
+              <a:rPr lang="en-US" altLang="zh-CN" sz="1350"/>
+              <a:t>LineFormer </a:t>
+            </a:r>
+            <a:r>
+              <a:rPr lang="zh-CN" altLang="en-US" sz="1350"/>
+              <a:t>核心思想：</a:t>
+            </a:r>
+            <a:r>
+              <a:rPr lang="en-US" altLang="zh-CN" sz="1350"/>
+              <a:t> </a:t>
+            </a:r>
+            <a:r>
+              <a:rPr lang="zh-CN" altLang="en-US" sz="1350"/>
+              <a:t>抛弃复杂的流水线，直接使用</a:t>
+            </a:r>
+            <a:r>
+              <a:rPr lang="zh-CN" altLang="en-US" sz="1350">
+                <a:solidFill>
+                  <a:srgbClr val="FF0000"/>
+                </a:solidFill>
+              </a:rPr>
+              <a:t>端到端的实例分割</a:t>
+            </a:r>
+            <a:r>
+              <a:rPr lang="zh-CN" altLang="en-US" sz="1350"/>
+              <a:t>来处理。</a:t>
+            </a:r>
+            <a:endParaRPr lang="zh-CN" altLang="en-US" sz="1350"/>
+          </a:p>
+        </p:txBody>
+      </p:sp>
+      <p:pic>
+        <p:nvPicPr>
+          <p:cNvPr id="4" name="图片 3"/>
+          <p:cNvPicPr>
+            <a:picLocks noChangeAspect="1"/>
+          </p:cNvPicPr>
+          <p:nvPr/>
+        </p:nvPicPr>
+        <p:blipFill>
+          <a:blip r:embed="rId3"/>
+          <a:stretch>
+            <a:fillRect/>
+          </a:stretch>
+        </p:blipFill>
+        <p:spPr>
+          <a:xfrm>
+            <a:off x="4924425" y="346075"/>
+            <a:ext cx="6652895" cy="3245485"/>
+          </a:xfrm>
+          <a:prstGeom prst="rect">
+            <a:avLst/>
+          </a:prstGeom>
+        </p:spPr>
+      </p:pic>
+    </p:spTree>
+  </p:cSld>
+  <p:clrMapOvr>
+    <a:masterClrMapping/>
+  </p:clrMapOvr>
+</p:sld>
+</file>
+
+<file path=ppt/slides/slide3.xml><?xml version="1.0" encoding="utf-8"?>
+<p:sld xmlns:a="http://schemas.openxmlformats.org/drawingml/2006/main" xmlns:r="http://schemas.openxmlformats.org/officeDocument/2006/relationships" xmlns:p="http://schemas.openxmlformats.org/presentationml/2006/main">
+  <p:cSld>
+    <p:spTree>
+      <p:nvGrpSpPr>
+        <p:cNvPr id="1" name=""/>
+        <p:cNvGrpSpPr/>
+        <p:nvPr/>
+      </p:nvGrpSpPr>
+      <p:grpSpPr/>
+      <p:sp>
+        <p:nvSpPr>
+          <p:cNvPr id="2" name="标题 1"/>
+          <p:cNvSpPr>
+            <a:spLocks noGrp="1"/>
+          </p:cNvSpPr>
+          <p:nvPr>
+            <p:ph type="title"/>
+            <p:custDataLst>
+              <p:tags r:id="rId1"/>
+            </p:custDataLst>
+          </p:nvPr>
+        </p:nvSpPr>
+        <p:spPr/>
+        <p:txBody>
+          <a:bodyPr/>
+          <a:p>
+            <a:r>
+              <a:rPr lang="en-US" altLang="zh-CN"/>
+              <a:t>framework</a:t>
+            </a:r>
+            <a:endParaRPr lang="en-US" altLang="zh-CN"/>
+          </a:p>
+        </p:txBody>
+      </p:sp>
+      <p:sp>
+        <p:nvSpPr>
+          <p:cNvPr id="3" name="内容占位符 2"/>
+          <p:cNvSpPr>
+            <a:spLocks noGrp="1"/>
+          </p:cNvSpPr>
+          <p:nvPr>
+            <p:ph idx="1"/>
+            <p:custDataLst>
+              <p:tags r:id="rId2"/>
+            </p:custDataLst>
+          </p:nvPr>
+        </p:nvSpPr>
+        <p:spPr/>
+        <p:txBody>
+          <a:bodyPr/>
+          <a:p>
+            <a:r>
+              <a:rPr lang="zh-CN" altLang="en-US" sz="1200"/>
+              <a:t>模型选型：</a:t>
+            </a:r>
+            <a:r>
+              <a:rPr lang="en-US" altLang="zh-CN" sz="1200"/>
+              <a:t> </a:t>
+            </a:r>
+            <a:r>
+              <a:rPr lang="zh-CN" altLang="en-US" sz="1200"/>
+              <a:t>基于改进的</a:t>
+            </a:r>
+            <a:r>
+              <a:rPr lang="en-US" altLang="zh-CN" sz="1200"/>
+              <a:t> Mask2Former</a:t>
+            </a:r>
+            <a:endParaRPr lang="en-US" altLang="zh-CN" sz="1200"/>
+          </a:p>
+          <a:p>
+            <a:endParaRPr lang="en-US" altLang="zh-CN" sz="1200"/>
+          </a:p>
+          <a:p>
+            <a:r>
+              <a:rPr lang="zh-CN" altLang="en-US" sz="1200"/>
+              <a:t>三大核心组件：</a:t>
+            </a:r>
+            <a:endParaRPr lang="zh-CN" altLang="en-US" sz="1200"/>
+          </a:p>
+          <a:p>
+            <a:pPr lvl="1"/>
+            <a:r>
+              <a:rPr lang="en-US" altLang="zh-CN" sz="1000">
+                <a:solidFill>
+                  <a:srgbClr val="FF0000"/>
+                </a:solidFill>
+              </a:rPr>
+              <a:t>Pixel-level Module: </a:t>
+            </a:r>
+            <a:r>
+              <a:rPr lang="zh-CN" altLang="en-US" sz="1000">
+                <a:solidFill>
+                  <a:srgbClr val="FF0000"/>
+                </a:solidFill>
+              </a:rPr>
+              <a:t>提取高清特征图</a:t>
+            </a:r>
+            <a:endParaRPr lang="zh-CN" altLang="en-US" sz="1000">
+              <a:solidFill>
+                <a:srgbClr val="FF0000"/>
+              </a:solidFill>
+            </a:endParaRPr>
+          </a:p>
+          <a:p>
+            <a:pPr lvl="1"/>
+            <a:r>
+              <a:rPr lang="en-US" altLang="zh-CN" sz="1000"/>
+              <a:t>Transformer Decoder: </a:t>
+            </a:r>
+            <a:r>
+              <a:rPr lang="zh-CN" altLang="en-US" sz="1000"/>
+              <a:t>使用</a:t>
+            </a:r>
+            <a:r>
+              <a:rPr lang="en-US" altLang="zh-CN" sz="1000"/>
+              <a:t>N</a:t>
+            </a:r>
+            <a:r>
+              <a:rPr lang="zh-CN" altLang="en-US" sz="1000"/>
+              <a:t>个可学习的</a:t>
+            </a:r>
+            <a:r>
+              <a:rPr lang="en-US" altLang="zh-CN" sz="1000"/>
+              <a:t>Query</a:t>
+            </a:r>
+            <a:endParaRPr lang="en-US" altLang="zh-CN" sz="1000"/>
+          </a:p>
+          <a:p>
+            <a:pPr marL="2286000" lvl="5" indent="0">
+              <a:buNone/>
+            </a:pPr>
+            <a:r>
+              <a:rPr lang="en-US" altLang="zh-CN" sz="1000" spc="150">
+                <a:solidFill>
+                  <a:schemeClr val="tx1">
+                    <a:lumMod val="65000"/>
+                    <a:lumOff val="35000"/>
+                  </a:schemeClr>
+                </a:solidFill>
+                <a:uFillTx/>
+              </a:rPr>
+              <a:t>  </a:t>
+            </a:r>
+            <a:r>
+              <a:rPr lang="zh-CN" altLang="en-US" sz="1000" spc="150">
+                <a:solidFill>
+                  <a:schemeClr val="tx1">
+                    <a:lumMod val="65000"/>
+                    <a:lumOff val="35000"/>
+                  </a:schemeClr>
+                </a:solidFill>
+                <a:uFillTx/>
+              </a:rPr>
+              <a:t>来代表不同的曲线实例</a:t>
+            </a:r>
+            <a:endParaRPr lang="zh-CN" altLang="en-US" sz="1000" spc="150">
+              <a:solidFill>
+                <a:schemeClr val="tx1">
+                  <a:lumMod val="65000"/>
+                  <a:lumOff val="35000"/>
+                </a:schemeClr>
+              </a:solidFill>
+              <a:uFillTx/>
+            </a:endParaRPr>
+          </a:p>
+          <a:p>
+            <a:pPr marL="2286000" lvl="5" indent="0">
+              <a:buNone/>
+            </a:pPr>
+            <a:endParaRPr lang="zh-CN" altLang="en-US" sz="1000" spc="150">
+              <a:solidFill>
+                <a:schemeClr val="tx1">
+                  <a:lumMod val="65000"/>
+                  <a:lumOff val="35000"/>
+                </a:schemeClr>
+              </a:solidFill>
+              <a:uFillTx/>
+            </a:endParaRPr>
+          </a:p>
+          <a:p>
+            <a:pPr lvl="1"/>
+            <a:r>
+              <a:rPr lang="en-US" altLang="zh-CN" sz="1000"/>
+              <a:t>Segmentation Module: </a:t>
+            </a:r>
+            <a:r>
+              <a:rPr lang="zh-CN" altLang="en-US" sz="1000"/>
+              <a:t>预测每条线的</a:t>
+            </a:r>
+            <a:r>
+              <a:rPr lang="en-US" altLang="zh-CN" sz="1000"/>
+              <a:t>Mask</a:t>
+            </a:r>
+            <a:endParaRPr lang="en-US" altLang="zh-CN" sz="1000"/>
+          </a:p>
+          <a:p>
+            <a:pPr lvl="1"/>
+            <a:endParaRPr lang="zh-CN" altLang="en-US" sz="1000"/>
+          </a:p>
+          <a:p>
+            <a:r>
+              <a:rPr lang="zh-CN" altLang="en-US" sz="1200"/>
+              <a:t>输出目标：每个</a:t>
+            </a:r>
+            <a:r>
+              <a:rPr lang="en-US" altLang="zh-CN" sz="1200"/>
+              <a:t>Query</a:t>
+            </a:r>
+            <a:r>
+              <a:rPr lang="zh-CN" altLang="en-US" sz="1200"/>
+              <a:t>输出两个结果：</a:t>
+            </a:r>
+            <a:endParaRPr lang="zh-CN" altLang="en-US" sz="1200"/>
+          </a:p>
+          <a:p>
+            <a:pPr lvl="1"/>
+            <a:r>
+              <a:rPr lang="zh-CN" altLang="en-US" sz="1000"/>
+              <a:t>分类：</a:t>
+            </a:r>
+            <a:r>
+              <a:rPr lang="en-US" altLang="zh-CN" sz="1000"/>
+              <a:t> </a:t>
+            </a:r>
+            <a:r>
+              <a:rPr lang="zh-CN" altLang="en-US" sz="1000"/>
+              <a:t>确定该</a:t>
+            </a:r>
+            <a:r>
+              <a:rPr lang="en-US" altLang="zh-CN" sz="1000"/>
+              <a:t> Query </a:t>
+            </a:r>
+            <a:r>
+              <a:rPr lang="zh-CN" altLang="en-US" sz="1000"/>
+              <a:t>捕捉的是</a:t>
+            </a:r>
+            <a:r>
+              <a:rPr lang="en-US" altLang="zh-CN" sz="1000"/>
+              <a:t>“</a:t>
+            </a:r>
+            <a:r>
+              <a:rPr lang="zh-CN" altLang="en-US" sz="1000"/>
+              <a:t>线</a:t>
+            </a:r>
+            <a:r>
+              <a:rPr lang="en-US" altLang="zh-CN" sz="1000"/>
+              <a:t>”</a:t>
+            </a:r>
+            <a:r>
+              <a:rPr lang="zh-CN" altLang="en-US" sz="1000"/>
+              <a:t>还是</a:t>
+            </a:r>
+            <a:r>
+              <a:rPr lang="en-US" altLang="zh-CN" sz="1000"/>
+              <a:t>“</a:t>
+            </a:r>
+            <a:r>
+              <a:rPr lang="zh-CN" altLang="en-US" sz="1000"/>
+              <a:t>背景</a:t>
+            </a:r>
+            <a:r>
+              <a:rPr lang="en-US" altLang="zh-CN" sz="1000"/>
+              <a:t>”</a:t>
+            </a:r>
+            <a:endParaRPr lang="zh-CN" altLang="en-US" sz="1000"/>
+          </a:p>
+          <a:p>
+            <a:pPr lvl="1"/>
+            <a:r>
+              <a:rPr lang="en-US" altLang="zh-CN" sz="1000"/>
+              <a:t>Mask</a:t>
+            </a:r>
+            <a:r>
+              <a:rPr lang="zh-CN" altLang="en-US" sz="1000"/>
+              <a:t>：</a:t>
+            </a:r>
+            <a:r>
+              <a:rPr lang="en-US" altLang="zh-CN" sz="1000"/>
+              <a:t> </a:t>
+            </a:r>
+            <a:r>
+              <a:rPr lang="zh-CN" altLang="en-US" sz="1000"/>
+              <a:t>对应曲线的像素级掩码</a:t>
+            </a:r>
+            <a:endParaRPr lang="zh-CN" altLang="en-US" sz="1000"/>
+          </a:p>
+        </p:txBody>
+      </p:sp>
+      <p:pic>
+        <p:nvPicPr>
+          <p:cNvPr id="4" name="图片 3"/>
+          <p:cNvPicPr>
+            <a:picLocks noChangeAspect="1"/>
+          </p:cNvPicPr>
+          <p:nvPr/>
+        </p:nvPicPr>
+        <p:blipFill>
+          <a:blip r:embed="rId3"/>
+          <a:srcRect l="2756" r="8352"/>
+          <a:stretch>
+            <a:fillRect/>
+          </a:stretch>
+        </p:blipFill>
+        <p:spPr>
+          <a:xfrm>
+            <a:off x="4733925" y="979170"/>
+            <a:ext cx="7412355" cy="4853940"/>
+          </a:xfrm>
+          <a:prstGeom prst="rect">
+            <a:avLst/>
+          </a:prstGeom>
+        </p:spPr>
+      </p:pic>
+    </p:spTree>
+  </p:cSld>
+  <p:clrMapOvr>
+    <a:masterClrMapping/>
+  </p:clrMapOvr>
+</p:sld>
+</file>
+
+<file path=ppt/slides/slide4.xml><?xml version="1.0" encoding="utf-8"?>
+<p:sld xmlns:a="http://schemas.openxmlformats.org/drawingml/2006/main" xmlns:r="http://schemas.openxmlformats.org/officeDocument/2006/relationships" xmlns:p="http://schemas.openxmlformats.org/presentationml/2006/main">
+  <p:cSld>
+    <p:spTree>
+      <p:nvGrpSpPr>
+        <p:cNvPr id="1" name=""/>
+        <p:cNvGrpSpPr/>
+        <p:nvPr/>
+      </p:nvGrpSpPr>
+      <p:grpSpPr/>
+      <p:sp>
+        <p:nvSpPr>
+          <p:cNvPr id="2" name="标题 1"/>
+          <p:cNvSpPr>
+            <a:spLocks noGrp="1"/>
+          </p:cNvSpPr>
+          <p:nvPr>
+            <p:ph type="title"/>
+            <p:custDataLst>
+              <p:tags r:id="rId1"/>
+            </p:custDataLst>
+          </p:nvPr>
+        </p:nvSpPr>
+        <p:spPr>
+          <a:xfrm>
+            <a:off x="608400" y="68650"/>
+            <a:ext cx="10969200" cy="705600"/>
+          </a:xfrm>
+        </p:spPr>
+        <p:txBody>
+          <a:bodyPr/>
+          <a:p>
+            <a:r>
+              <a:rPr lang="en-US" altLang="zh-CN"/>
+              <a:t>backbone</a:t>
+            </a:r>
+            <a:r>
+              <a:rPr lang="zh-CN" altLang="en-US"/>
+              <a:t>：</a:t>
+            </a:r>
+            <a:r>
+              <a:rPr lang="en-US" altLang="zh-CN"/>
+              <a:t>swin</a:t>
+            </a:r>
+            <a:endParaRPr lang="en-US" altLang="zh-CN"/>
+          </a:p>
+        </p:txBody>
+      </p:sp>
+      <p:sp>
+        <p:nvSpPr>
+          <p:cNvPr id="3" name="内容占位符 2"/>
+          <p:cNvSpPr>
+            <a:spLocks noGrp="1"/>
+          </p:cNvSpPr>
+          <p:nvPr>
+            <p:ph idx="1"/>
+            <p:custDataLst>
+              <p:tags r:id="rId2"/>
+            </p:custDataLst>
+          </p:nvPr>
+        </p:nvSpPr>
+        <p:spPr>
+          <a:xfrm>
+            <a:off x="608330" y="4596130"/>
+            <a:ext cx="10968990" cy="1920875"/>
+          </a:xfrm>
+        </p:spPr>
+        <p:txBody>
+          <a:bodyPr>
+            <a:noAutofit/>
+          </a:bodyPr>
+          <a:p>
+            <a:r>
+              <a:rPr lang="zh-CN" altLang="en-US" sz="1000"/>
+              <a:t>将图片输入到</a:t>
+            </a:r>
+            <a:r>
+              <a:rPr lang="en-US" altLang="zh-CN" sz="1000"/>
+              <a:t>Patch Partition</a:t>
+            </a:r>
+            <a:r>
+              <a:rPr lang="zh-CN" altLang="en-US" sz="1000"/>
+              <a:t>模块中进行分块，即每</a:t>
+            </a:r>
+            <a:r>
+              <a:rPr lang="en-US" altLang="zh-CN" sz="1000"/>
+              <a:t>4x4</a:t>
+            </a:r>
+            <a:r>
+              <a:rPr lang="zh-CN" altLang="en-US" sz="1000"/>
+              <a:t>相邻的像素为一个</a:t>
+            </a:r>
+            <a:r>
+              <a:rPr lang="en-US" altLang="zh-CN" sz="1000"/>
+              <a:t>Patch</a:t>
+            </a:r>
+            <a:r>
+              <a:rPr lang="zh-CN" altLang="en-US" sz="1000"/>
+              <a:t>，然后在</a:t>
+            </a:r>
+            <a:r>
+              <a:rPr lang="en-US" altLang="zh-CN" sz="1000"/>
+              <a:t>channel</a:t>
+            </a:r>
+            <a:r>
+              <a:rPr lang="zh-CN" altLang="en-US" sz="1000"/>
+              <a:t>方向展平（</a:t>
+            </a:r>
+            <a:r>
+              <a:rPr lang="en-US" altLang="zh-CN" sz="1000"/>
+              <a:t>flatten</a:t>
+            </a:r>
+            <a:r>
+              <a:rPr lang="zh-CN" altLang="en-US" sz="1000"/>
+              <a:t>）。</a:t>
+            </a:r>
+            <a:endParaRPr lang="zh-CN" altLang="en-US" sz="1000"/>
+          </a:p>
+          <a:p>
+            <a:pPr lvl="1"/>
+            <a:r>
+              <a:rPr lang="zh-CN" altLang="en-US" sz="910">
+                <a:solidFill>
+                  <a:srgbClr val="FF0000"/>
+                </a:solidFill>
+              </a:rPr>
+              <a:t>假设输入的是</a:t>
+            </a:r>
+            <a:r>
+              <a:rPr lang="en-US" altLang="zh-CN" sz="910">
+                <a:solidFill>
+                  <a:srgbClr val="FF0000"/>
+                </a:solidFill>
+              </a:rPr>
+              <a:t>RGB</a:t>
+            </a:r>
+            <a:r>
+              <a:rPr lang="zh-CN" altLang="en-US" sz="910">
+                <a:solidFill>
+                  <a:srgbClr val="FF0000"/>
+                </a:solidFill>
+              </a:rPr>
+              <a:t>三通道图片</a:t>
+            </a:r>
+            <a:r>
+              <a:rPr lang="en-US" altLang="zh-CN" sz="910">
+                <a:solidFill>
+                  <a:srgbClr val="FF0000"/>
+                </a:solidFill>
+              </a:rPr>
+              <a:t>[512, 512, 3]</a:t>
+            </a:r>
+            <a:r>
+              <a:rPr lang="zh-CN" altLang="en-US" sz="910">
+                <a:solidFill>
+                  <a:srgbClr val="FF0000"/>
+                </a:solidFill>
+              </a:rPr>
+              <a:t>，那么每个</a:t>
+            </a:r>
+            <a:r>
+              <a:rPr lang="en-US" altLang="zh-CN" sz="910">
+                <a:solidFill>
+                  <a:srgbClr val="FF0000"/>
+                </a:solidFill>
+              </a:rPr>
+              <a:t>patch</a:t>
+            </a:r>
+            <a:r>
+              <a:rPr lang="zh-CN" altLang="en-US" sz="910">
+                <a:solidFill>
+                  <a:srgbClr val="FF0000"/>
+                </a:solidFill>
+              </a:rPr>
+              <a:t>就有</a:t>
+            </a:r>
+            <a:r>
+              <a:rPr lang="en-US" altLang="zh-CN" sz="910">
+                <a:solidFill>
+                  <a:srgbClr val="FF0000"/>
+                </a:solidFill>
+              </a:rPr>
+              <a:t>4x4=16</a:t>
+            </a:r>
+            <a:r>
+              <a:rPr lang="zh-CN" altLang="en-US" sz="910">
+                <a:solidFill>
+                  <a:srgbClr val="FF0000"/>
+                </a:solidFill>
+              </a:rPr>
+              <a:t>个像素，然后每个像素有</a:t>
+            </a:r>
+            <a:r>
+              <a:rPr lang="en-US" altLang="zh-CN" sz="910">
+                <a:solidFill>
+                  <a:srgbClr val="FF0000"/>
+                </a:solidFill>
+              </a:rPr>
+              <a:t>R</a:t>
+            </a:r>
+            <a:r>
+              <a:rPr lang="zh-CN" altLang="en-US" sz="910">
+                <a:solidFill>
+                  <a:srgbClr val="FF0000"/>
+                </a:solidFill>
+              </a:rPr>
+              <a:t>、</a:t>
+            </a:r>
+            <a:r>
+              <a:rPr lang="en-US" altLang="zh-CN" sz="910">
+                <a:solidFill>
+                  <a:srgbClr val="FF0000"/>
+                </a:solidFill>
+              </a:rPr>
+              <a:t>G</a:t>
+            </a:r>
+            <a:r>
+              <a:rPr lang="zh-CN" altLang="en-US" sz="910">
+                <a:solidFill>
+                  <a:srgbClr val="FF0000"/>
+                </a:solidFill>
+              </a:rPr>
+              <a:t>、</a:t>
+            </a:r>
+            <a:r>
+              <a:rPr lang="en-US" altLang="zh-CN" sz="910">
+                <a:solidFill>
+                  <a:srgbClr val="FF0000"/>
+                </a:solidFill>
+              </a:rPr>
+              <a:t>B</a:t>
+            </a:r>
+            <a:r>
+              <a:rPr lang="zh-CN" altLang="en-US" sz="910">
+                <a:solidFill>
+                  <a:srgbClr val="FF0000"/>
+                </a:solidFill>
+              </a:rPr>
+              <a:t>三个值所以展平后是</a:t>
+            </a:r>
+            <a:r>
+              <a:rPr lang="en-US" altLang="zh-CN" sz="910">
+                <a:solidFill>
+                  <a:srgbClr val="FF0000"/>
+                </a:solidFill>
+              </a:rPr>
+              <a:t>16x3=48</a:t>
+            </a:r>
+            <a:r>
+              <a:rPr lang="zh-CN" altLang="en-US" sz="910">
+                <a:solidFill>
+                  <a:srgbClr val="FF0000"/>
+                </a:solidFill>
+              </a:rPr>
+              <a:t>，所以通过</a:t>
+            </a:r>
+            <a:r>
+              <a:rPr lang="en-US" altLang="zh-CN" sz="910">
+                <a:solidFill>
+                  <a:srgbClr val="FF0000"/>
+                </a:solidFill>
+              </a:rPr>
+              <a:t>Patch Partition</a:t>
+            </a:r>
+            <a:r>
+              <a:rPr lang="zh-CN" altLang="en-US" sz="910">
+                <a:solidFill>
+                  <a:srgbClr val="FF0000"/>
+                </a:solidFill>
+              </a:rPr>
+              <a:t>后图像</a:t>
+            </a:r>
+            <a:r>
+              <a:rPr lang="en-US" altLang="zh-CN" sz="910">
+                <a:solidFill>
+                  <a:srgbClr val="FF0000"/>
+                </a:solidFill>
+              </a:rPr>
+              <a:t>shape</a:t>
+            </a:r>
+            <a:r>
+              <a:rPr lang="zh-CN" altLang="en-US" sz="910">
+                <a:solidFill>
+                  <a:srgbClr val="FF0000"/>
+                </a:solidFill>
+              </a:rPr>
+              <a:t>由</a:t>
+            </a:r>
+            <a:r>
+              <a:rPr lang="en-US" altLang="zh-CN" sz="910">
+                <a:solidFill>
+                  <a:srgbClr val="FF0000"/>
+                </a:solidFill>
+              </a:rPr>
+              <a:t> [H, W, 3]</a:t>
+            </a:r>
+            <a:r>
+              <a:rPr lang="zh-CN" altLang="en-US" sz="910">
+                <a:solidFill>
+                  <a:srgbClr val="FF0000"/>
+                </a:solidFill>
+              </a:rPr>
+              <a:t>变成了</a:t>
+            </a:r>
+            <a:r>
+              <a:rPr lang="en-US" altLang="zh-CN" sz="910">
+                <a:solidFill>
+                  <a:srgbClr val="FF0000"/>
+                </a:solidFill>
+              </a:rPr>
+              <a:t> [H/4, W/4, 48]</a:t>
+            </a:r>
+            <a:r>
+              <a:rPr lang="zh-CN" altLang="en-US" sz="910">
+                <a:solidFill>
+                  <a:srgbClr val="FF0000"/>
+                </a:solidFill>
+              </a:rPr>
+              <a:t>。</a:t>
+            </a:r>
+            <a:endParaRPr lang="zh-CN" altLang="en-US" sz="910">
+              <a:solidFill>
+                <a:srgbClr val="FF0000"/>
+              </a:solidFill>
+            </a:endParaRPr>
+          </a:p>
+          <a:p>
+            <a:r>
+              <a:rPr lang="zh-CN" altLang="en-US" sz="1000"/>
+              <a:t>通过</a:t>
+            </a:r>
+            <a:r>
+              <a:rPr lang="en-US" altLang="zh-CN" sz="1000"/>
+              <a:t>Linear Embeding</a:t>
+            </a:r>
+            <a:r>
+              <a:rPr lang="zh-CN" altLang="en-US" sz="1000"/>
+              <a:t>层对每个像素的</a:t>
+            </a:r>
+            <a:r>
+              <a:rPr lang="en-US" altLang="zh-CN" sz="1000"/>
+              <a:t>channel</a:t>
+            </a:r>
+            <a:r>
+              <a:rPr lang="zh-CN" altLang="en-US" sz="1000"/>
+              <a:t>数据做线性变换，由</a:t>
+            </a:r>
+            <a:r>
+              <a:rPr lang="en-US" altLang="zh-CN" sz="1000"/>
+              <a:t>48</a:t>
+            </a:r>
+            <a:r>
+              <a:rPr lang="zh-CN" altLang="en-US" sz="1000"/>
+              <a:t>变成</a:t>
+            </a:r>
+            <a:r>
+              <a:rPr lang="en-US" altLang="zh-CN" sz="1000"/>
+              <a:t>C</a:t>
+            </a:r>
+            <a:r>
+              <a:rPr lang="zh-CN" altLang="en-US" sz="1000"/>
+              <a:t>（</a:t>
+            </a:r>
+            <a:r>
+              <a:rPr lang="en-US" altLang="zh-CN" sz="1000">
+                <a:solidFill>
+                  <a:srgbClr val="FF0000"/>
+                </a:solidFill>
+              </a:rPr>
+              <a:t>96</a:t>
+            </a:r>
+            <a:r>
+              <a:rPr lang="zh-CN" altLang="en-US" sz="1000"/>
+              <a:t>），即图像</a:t>
+            </a:r>
+            <a:r>
+              <a:rPr lang="en-US" altLang="zh-CN" sz="1000"/>
+              <a:t>shape</a:t>
+            </a:r>
+            <a:r>
+              <a:rPr lang="zh-CN" altLang="en-US" sz="1000"/>
+              <a:t>再由</a:t>
+            </a:r>
+            <a:r>
+              <a:rPr lang="en-US" altLang="zh-CN" sz="1000"/>
+              <a:t> [H/4, W/4, 48]</a:t>
+            </a:r>
+            <a:r>
+              <a:rPr lang="zh-CN" altLang="en-US" sz="1000"/>
+              <a:t>变成了</a:t>
+            </a:r>
+            <a:r>
+              <a:rPr lang="en-US" altLang="zh-CN" sz="1000"/>
+              <a:t> [H/4, W/4, C]</a:t>
+            </a:r>
+            <a:r>
+              <a:rPr lang="zh-CN" altLang="en-US" sz="1000"/>
+              <a:t>（</a:t>
+            </a:r>
+            <a:r>
+              <a:rPr lang="en-US" altLang="zh-CN" sz="1000">
+                <a:solidFill>
+                  <a:srgbClr val="FF0000"/>
+                </a:solidFill>
+              </a:rPr>
+              <a:t>[128, 128, 96]</a:t>
+            </a:r>
+            <a:r>
+              <a:rPr lang="zh-CN" altLang="en-US" sz="1000"/>
+              <a:t>）。</a:t>
+            </a:r>
+            <a:r>
+              <a:rPr lang="zh-CN" altLang="en-US" sz="1000">
+                <a:solidFill>
+                  <a:srgbClr val="FF0000"/>
+                </a:solidFill>
+              </a:rPr>
+              <a:t>在</a:t>
+            </a:r>
+            <a:r>
+              <a:rPr lang="en-US" altLang="zh-CN" sz="1000">
+                <a:solidFill>
+                  <a:srgbClr val="FF0000"/>
+                </a:solidFill>
+              </a:rPr>
+              <a:t>lineformer</a:t>
+            </a:r>
+            <a:r>
+              <a:rPr lang="zh-CN" altLang="en-US" sz="1000">
+                <a:solidFill>
+                  <a:srgbClr val="FF0000"/>
+                </a:solidFill>
+              </a:rPr>
+              <a:t>中</a:t>
+            </a:r>
+            <a:r>
+              <a:rPr lang="en-US" altLang="zh-CN" sz="1000">
+                <a:solidFill>
+                  <a:srgbClr val="FF0000"/>
+                </a:solidFill>
+              </a:rPr>
+              <a:t>Patch Partition</a:t>
+            </a:r>
+            <a:r>
+              <a:rPr lang="zh-CN" altLang="en-US" sz="1000">
+                <a:solidFill>
+                  <a:srgbClr val="FF0000"/>
+                </a:solidFill>
+              </a:rPr>
+              <a:t>和</a:t>
+            </a:r>
+            <a:r>
+              <a:rPr lang="en-US" altLang="zh-CN" sz="1000">
+                <a:solidFill>
+                  <a:srgbClr val="FF0000"/>
+                </a:solidFill>
+              </a:rPr>
+              <a:t>Linear Embeding</a:t>
+            </a:r>
+            <a:r>
+              <a:rPr lang="zh-CN" altLang="en-US" sz="1000">
+                <a:solidFill>
+                  <a:srgbClr val="FF0000"/>
+                </a:solidFill>
+              </a:rPr>
+              <a:t>直接通过一个卷积层实现的。</a:t>
+            </a:r>
+            <a:endParaRPr lang="en-US" altLang="zh-CN" sz="1000"/>
+          </a:p>
+          <a:p>
+            <a:r>
+              <a:rPr lang="zh-CN" altLang="en-US" sz="1000"/>
+              <a:t>通过四个</a:t>
+            </a:r>
+            <a:r>
+              <a:rPr lang="en-US" altLang="zh-CN" sz="1000"/>
+              <a:t>Stage</a:t>
+            </a:r>
+            <a:r>
+              <a:rPr lang="zh-CN" altLang="en-US" sz="1000"/>
+              <a:t>构建不同大小的特征图，除了</a:t>
+            </a:r>
+            <a:r>
+              <a:rPr lang="en-US" altLang="zh-CN" sz="1000"/>
+              <a:t>Stage1</a:t>
+            </a:r>
+            <a:r>
+              <a:rPr lang="zh-CN" altLang="en-US" sz="1000"/>
+              <a:t>中先通过一个</a:t>
+            </a:r>
+            <a:r>
+              <a:rPr lang="en-US" altLang="zh-CN" sz="1000"/>
+              <a:t>Linear Embeding</a:t>
+            </a:r>
+            <a:r>
+              <a:rPr lang="zh-CN" altLang="en-US" sz="1000"/>
+              <a:t>层外，剩下三个</a:t>
+            </a:r>
+            <a:r>
+              <a:rPr lang="en-US" altLang="zh-CN" sz="1000"/>
+              <a:t>stage</a:t>
+            </a:r>
+            <a:r>
+              <a:rPr lang="zh-CN" altLang="en-US" sz="1000"/>
+              <a:t>都是先通过一个</a:t>
+            </a:r>
+            <a:r>
+              <a:rPr lang="en-US" altLang="zh-CN" sz="1000"/>
+              <a:t>Patch Merging</a:t>
+            </a:r>
+            <a:r>
+              <a:rPr lang="zh-CN" altLang="en-US" sz="1000"/>
+              <a:t>层进行下采样，像</a:t>
+            </a:r>
+            <a:r>
+              <a:rPr lang="en-US" altLang="zh-CN" sz="1000"/>
+              <a:t>CNN</a:t>
+            </a:r>
+            <a:r>
+              <a:rPr lang="zh-CN" altLang="en-US" sz="1000"/>
+              <a:t>一样逐层扩大感受野，以便获取到全局的信息。为产生一个层次化表示</a:t>
+            </a:r>
+            <a:r>
+              <a:rPr lang="en-US" altLang="zh-CN" sz="1000"/>
+              <a:t> (Hierarchical Representation)</a:t>
+            </a:r>
+            <a:r>
+              <a:rPr lang="zh-CN" altLang="en-US" sz="1000"/>
+              <a:t>，随着网络的加深，</a:t>
+            </a:r>
+            <a:r>
+              <a:rPr lang="en-US" altLang="zh-CN" sz="1000"/>
+              <a:t>tokens</a:t>
+            </a:r>
+            <a:r>
+              <a:rPr lang="zh-CN" altLang="en-US" sz="1000"/>
+              <a:t>数逐渐通过</a:t>
+            </a:r>
+            <a:r>
+              <a:rPr lang="en-US" altLang="zh-CN" sz="1000"/>
+              <a:t>Patch Meraging</a:t>
+            </a:r>
+            <a:r>
+              <a:rPr lang="zh-CN" altLang="en-US" sz="1000"/>
+              <a:t>被减少，其维度扩大。每个</a:t>
+            </a:r>
+            <a:r>
+              <a:rPr lang="en-US" altLang="zh-CN" sz="1000"/>
+              <a:t>Stage</a:t>
+            </a:r>
+            <a:r>
+              <a:rPr lang="zh-CN" altLang="en-US" sz="1000"/>
+              <a:t>都会改变张量的维度，从而形成一种层次化的表征。</a:t>
+            </a:r>
+            <a:endParaRPr lang="zh-CN" altLang="en-US" sz="1000"/>
+          </a:p>
+        </p:txBody>
+      </p:sp>
+      <p:pic>
+        <p:nvPicPr>
+          <p:cNvPr id="4" name="图片 3"/>
+          <p:cNvPicPr/>
+          <p:nvPr/>
+        </p:nvPicPr>
+        <p:blipFill>
+          <a:blip r:embed="rId3"/>
+          <a:stretch>
+            <a:fillRect/>
+          </a:stretch>
+        </p:blipFill>
+        <p:spPr>
+          <a:xfrm>
+            <a:off x="-317" y="585470"/>
+            <a:ext cx="11820525" cy="3943350"/>
+          </a:xfrm>
+          <a:prstGeom prst="rect">
+            <a:avLst/>
+          </a:prstGeom>
+        </p:spPr>
+      </p:pic>
+    </p:spTree>
+  </p:cSld>
+  <p:clrMapOvr>
+    <a:masterClrMapping/>
+  </p:clrMapOvr>
+</p:sld>
+</file>
+
+<file path=ppt/slides/slide5.xml><?xml version="1.0" encoding="utf-8"?>
+<p:sld xmlns:a="http://schemas.openxmlformats.org/drawingml/2006/main" xmlns:r="http://schemas.openxmlformats.org/officeDocument/2006/relationships" xmlns:p="http://schemas.openxmlformats.org/presentationml/2006/main">
+  <p:cSld>
+    <p:spTree>
+      <p:nvGrpSpPr>
+        <p:cNvPr id="1" name=""/>
+        <p:cNvGrpSpPr/>
+        <p:nvPr/>
+      </p:nvGrpSpPr>
+      <p:grpSpPr/>
+      <p:sp>
+        <p:nvSpPr>
+          <p:cNvPr id="2" name="标题 1"/>
+          <p:cNvSpPr>
+            <a:spLocks noGrp="1"/>
+          </p:cNvSpPr>
+          <p:nvPr>
+            <p:ph type="title"/>
+            <p:custDataLst>
+              <p:tags r:id="rId1"/>
+            </p:custDataLst>
+          </p:nvPr>
+        </p:nvSpPr>
+        <p:spPr>
+          <a:xfrm>
+            <a:off x="608330" y="68580"/>
+            <a:ext cx="10968990" cy="864235"/>
+          </a:xfrm>
+        </p:spPr>
+        <p:txBody>
+          <a:bodyPr/>
+          <a:p>
+            <a:r>
+              <a:rPr lang="en-US" altLang="zh-CN"/>
+              <a:t>pixel decoder</a:t>
+            </a:r>
+            <a:endParaRPr lang="en-US" altLang="zh-CN"/>
+          </a:p>
+        </p:txBody>
+      </p:sp>
+      <p:sp>
+        <p:nvSpPr>
+          <p:cNvPr id="3" name="内容占位符 2"/>
+          <p:cNvSpPr>
+            <a:spLocks noGrp="1"/>
+          </p:cNvSpPr>
+          <p:nvPr>
+            <p:ph idx="1"/>
+            <p:custDataLst>
+              <p:tags r:id="rId2"/>
+            </p:custDataLst>
+          </p:nvPr>
+        </p:nvSpPr>
+        <p:spPr>
+          <a:xfrm>
+            <a:off x="437515" y="825500"/>
+            <a:ext cx="11389995" cy="5691505"/>
+          </a:xfrm>
+        </p:spPr>
+        <p:txBody>
+          <a:bodyPr>
+            <a:noAutofit/>
+          </a:bodyPr>
+          <a:p>
+            <a:r>
+              <a:rPr lang="en-US" altLang="zh-CN" sz="1200"/>
+              <a:t>Pixel Decoder </a:t>
+            </a:r>
+            <a:r>
+              <a:rPr lang="zh-CN" altLang="en-US" sz="1200"/>
+              <a:t>接收来自</a:t>
+            </a:r>
+            <a:r>
+              <a:rPr lang="en-US" altLang="zh-CN" sz="1200"/>
+              <a:t> Swin Transformer </a:t>
+            </a:r>
+            <a:r>
+              <a:rPr lang="zh-CN" altLang="en-US" sz="1200"/>
+              <a:t>不同阶段的输出（即</a:t>
+            </a:r>
+            <a:r>
+              <a:rPr lang="en-US" altLang="zh-CN" sz="1200"/>
+              <a:t>swin</a:t>
+            </a:r>
+            <a:r>
+              <a:rPr lang="zh-CN" altLang="en-US" sz="1200"/>
+              <a:t>输出的的</a:t>
+            </a:r>
+            <a:r>
+              <a:rPr lang="en-US" altLang="zh-CN" sz="1200"/>
+              <a:t> Stage1</a:t>
+            </a:r>
+            <a:r>
+              <a:rPr lang="zh-CN" altLang="en-US" sz="1200"/>
+              <a:t>到</a:t>
+            </a:r>
+            <a:r>
+              <a:rPr lang="en-US" altLang="zh-CN" sz="1200"/>
+              <a:t>Stage4</a:t>
+            </a:r>
+            <a:r>
+              <a:rPr lang="zh-CN" altLang="en-US" sz="1200"/>
+              <a:t>）。</a:t>
+            </a:r>
+            <a:endParaRPr lang="zh-CN" altLang="en-US" sz="1200"/>
+          </a:p>
+          <a:p>
+            <a:r>
+              <a:rPr lang="zh-CN" altLang="en-US" sz="1200"/>
+              <a:t>低层（</a:t>
+            </a:r>
+            <a:r>
+              <a:rPr lang="en-US" altLang="zh-CN" sz="1200"/>
+              <a:t>Stage 1/2</a:t>
+            </a:r>
+            <a:r>
+              <a:rPr lang="zh-CN" altLang="en-US" sz="1200"/>
+              <a:t>）：分辨率高（</a:t>
+            </a:r>
+            <a:r>
+              <a:rPr lang="en-US" altLang="zh-CN" sz="1200"/>
+              <a:t>H/4, W/4</a:t>
+            </a:r>
+            <a:r>
+              <a:rPr lang="zh-CN" altLang="en-US" sz="1200"/>
+              <a:t>），充满了边缘、纹理等物理细节，但它不知道哪条线属于哪个实例。</a:t>
+            </a:r>
+            <a:r>
+              <a:rPr lang="en-US" altLang="zh-CN" sz="1200">
+                <a:solidFill>
+                  <a:srgbClr val="FF0000"/>
+                </a:solidFill>
+                <a:sym typeface="+mn-ea"/>
+              </a:rPr>
+              <a:t>[128, 128, 96], [64,64,182]</a:t>
+            </a:r>
+            <a:endParaRPr lang="zh-CN" altLang="en-US" sz="1200"/>
+          </a:p>
+          <a:p>
+            <a:r>
+              <a:rPr lang="zh-CN" altLang="en-US" sz="1200"/>
+              <a:t>高层（</a:t>
+            </a:r>
+            <a:r>
+              <a:rPr lang="en-US" altLang="zh-CN" sz="1200"/>
+              <a:t>Stage 3/4</a:t>
+            </a:r>
+            <a:r>
+              <a:rPr lang="zh-CN" altLang="en-US" sz="1200"/>
+              <a:t>）：分辨率低（</a:t>
+            </a:r>
+            <a:r>
+              <a:rPr lang="en-US" altLang="zh-CN" sz="1200"/>
+              <a:t>H/32, W/32</a:t>
+            </a:r>
+            <a:r>
+              <a:rPr lang="zh-CN" altLang="en-US" sz="1200"/>
+              <a:t>），语义极强，知道图表的整体结构。</a:t>
+            </a:r>
+            <a:r>
+              <a:rPr lang="en-US" altLang="zh-CN" sz="1200">
+                <a:solidFill>
+                  <a:srgbClr val="FF0000"/>
+                </a:solidFill>
+                <a:sym typeface="+mn-ea"/>
+              </a:rPr>
+              <a:t>[32, 32, 384], [16,16,768]</a:t>
+            </a:r>
+            <a:endParaRPr lang="zh-CN" altLang="en-US" sz="1200"/>
+          </a:p>
+          <a:p>
+            <a:endParaRPr lang="zh-CN" altLang="en-US" sz="1200"/>
+          </a:p>
+          <a:p>
+            <a:r>
+              <a:rPr lang="en-US" altLang="zh-CN" sz="1200"/>
+              <a:t>A. </a:t>
+            </a:r>
+            <a:r>
+              <a:rPr lang="zh-CN" altLang="en-US" sz="1200"/>
+              <a:t>维度对齐</a:t>
+            </a:r>
+            <a:r>
+              <a:rPr lang="en-US" altLang="zh-CN" sz="1200"/>
+              <a:t> (Lateral Connections)</a:t>
+            </a:r>
+            <a:endParaRPr lang="en-US" altLang="zh-CN" sz="1200"/>
+          </a:p>
+          <a:p>
+            <a:pPr marL="0" indent="457200">
+              <a:buNone/>
+            </a:pPr>
+            <a:r>
+              <a:rPr lang="en-US" altLang="zh-CN" sz="1200"/>
+              <a:t>Swin</a:t>
+            </a:r>
+            <a:r>
+              <a:rPr lang="zh-CN" altLang="en-US" sz="1200"/>
+              <a:t>输出的各层通道数是不统一的。</a:t>
+            </a:r>
+            <a:r>
+              <a:rPr lang="en-US" altLang="zh-CN" sz="1200"/>
+              <a:t>Pixel Decoder</a:t>
+            </a:r>
+            <a:r>
+              <a:rPr lang="zh-CN" altLang="en-US" sz="1200"/>
+              <a:t>首先用</a:t>
+            </a:r>
+            <a:r>
+              <a:rPr lang="en-US" altLang="zh-CN" sz="1200"/>
+              <a:t> 1*1</a:t>
+            </a:r>
+            <a:r>
+              <a:rPr lang="zh-CN" altLang="en-US" sz="1200"/>
+              <a:t>卷积将所有层级的通道数统一（例如统一到</a:t>
+            </a:r>
+            <a:r>
+              <a:rPr lang="en-US" altLang="zh-CN" sz="1200"/>
+              <a:t> 256</a:t>
+            </a:r>
+            <a:r>
+              <a:rPr lang="zh-CN" altLang="en-US" sz="1200"/>
+              <a:t>）。这就像是把不同粗细的电线，通过转接头（卷积）变成统一规格。</a:t>
+            </a:r>
+            <a:endParaRPr lang="zh-CN" altLang="en-US" sz="1200"/>
+          </a:p>
+          <a:p>
+            <a:endParaRPr lang="zh-CN" altLang="en-US" sz="1200"/>
+          </a:p>
+          <a:p>
+            <a:r>
+              <a:rPr lang="en-US" altLang="zh-CN" sz="1200"/>
+              <a:t>B. </a:t>
+            </a:r>
+            <a:r>
+              <a:rPr lang="zh-CN" altLang="en-US" sz="1200"/>
+              <a:t>自上而下的上采样</a:t>
+            </a:r>
+            <a:r>
+              <a:rPr lang="en-US" altLang="zh-CN" sz="1200"/>
+              <a:t> (Top-down Refinement)</a:t>
+            </a:r>
+            <a:endParaRPr lang="en-US" altLang="zh-CN" sz="1200"/>
+          </a:p>
+          <a:p>
+            <a:pPr lvl="1"/>
+            <a:r>
+              <a:rPr lang="zh-CN" altLang="en-US" sz="990"/>
+              <a:t>这是得到</a:t>
+            </a:r>
+            <a:r>
+              <a:rPr lang="en-US" altLang="zh-CN" sz="990"/>
+              <a:t>“</a:t>
+            </a:r>
+            <a:r>
+              <a:rPr lang="zh-CN" altLang="en-US" sz="990"/>
+              <a:t>高清</a:t>
+            </a:r>
+            <a:r>
+              <a:rPr lang="en-US" altLang="zh-CN" sz="990"/>
+              <a:t>”</a:t>
+            </a:r>
+            <a:r>
+              <a:rPr lang="zh-CN" altLang="en-US" sz="990"/>
+              <a:t>特征的核心逻辑：</a:t>
+            </a:r>
+            <a:endParaRPr lang="zh-CN" altLang="en-US" sz="990"/>
+          </a:p>
+          <a:p>
+            <a:pPr lvl="1"/>
+            <a:r>
+              <a:rPr lang="zh-CN" altLang="en-US" sz="990"/>
+              <a:t>起始点：从最深、最模糊的特征图（</a:t>
+            </a:r>
+            <a:r>
+              <a:rPr lang="en-US" altLang="zh-CN" sz="990"/>
+              <a:t>1/32</a:t>
+            </a:r>
+            <a:r>
+              <a:rPr lang="zh-CN" altLang="en-US" sz="990"/>
+              <a:t>）开始</a:t>
+            </a:r>
+            <a:endParaRPr lang="zh-CN" altLang="en-US" sz="990"/>
+          </a:p>
+          <a:p>
+            <a:pPr lvl="1"/>
+            <a:r>
+              <a:rPr lang="zh-CN" altLang="en-US" sz="990"/>
+              <a:t>操作：对该层进行</a:t>
+            </a:r>
+            <a:r>
+              <a:rPr lang="en-US" altLang="zh-CN" sz="990"/>
+              <a:t>2</a:t>
+            </a:r>
+            <a:r>
+              <a:rPr lang="zh-CN" altLang="en-US" sz="990"/>
+              <a:t>倍上采样（通常使用双线性插值或转置卷积），使其分辨率对齐上一层（</a:t>
+            </a:r>
+            <a:r>
+              <a:rPr lang="en-US" altLang="zh-CN" sz="990"/>
+              <a:t>1/16</a:t>
+            </a:r>
+            <a:r>
+              <a:rPr lang="zh-CN" altLang="en-US" sz="990"/>
+              <a:t>）。</a:t>
+            </a:r>
+            <a:endParaRPr lang="zh-CN" altLang="en-US" sz="990"/>
+          </a:p>
+          <a:p>
+            <a:pPr lvl="1"/>
+            <a:r>
+              <a:rPr lang="zh-CN" altLang="en-US" sz="990"/>
+              <a:t>融合：</a:t>
+            </a:r>
+            <a:r>
+              <a:rPr lang="en-US" altLang="zh-CN" sz="990"/>
+              <a:t> </a:t>
+            </a:r>
+            <a:r>
+              <a:rPr lang="zh-CN" altLang="en-US" sz="990"/>
+              <a:t>将上采样后的特征与上一层经过侧边连接的特征进行</a:t>
+            </a:r>
+            <a:r>
+              <a:rPr lang="en-US" altLang="zh-CN" sz="990"/>
+              <a:t>Element-wise Sum</a:t>
+            </a:r>
+            <a:r>
+              <a:rPr lang="zh-CN" altLang="en-US" sz="990"/>
+              <a:t>（按元素相加）。</a:t>
+            </a:r>
+            <a:endParaRPr lang="zh-CN" altLang="en-US" sz="990"/>
+          </a:p>
+          <a:p>
+            <a:pPr lvl="1"/>
+            <a:r>
+              <a:rPr lang="zh-CN" altLang="en-US" sz="990"/>
+              <a:t>循环：</a:t>
+            </a:r>
+            <a:r>
+              <a:rPr lang="en-US" altLang="zh-CN" sz="990"/>
+              <a:t> </a:t>
+            </a:r>
+            <a:r>
+              <a:rPr lang="zh-CN" altLang="en-US" sz="990"/>
+              <a:t>这个过程一直持续到最底层的</a:t>
+            </a:r>
+            <a:r>
+              <a:rPr lang="en-US" altLang="zh-CN" sz="990"/>
+              <a:t> 1/4 </a:t>
+            </a:r>
+            <a:r>
+              <a:rPr lang="zh-CN" altLang="en-US" sz="990"/>
+              <a:t>分辨率。</a:t>
+            </a:r>
+            <a:endParaRPr lang="zh-CN" altLang="en-US" sz="990"/>
+          </a:p>
+          <a:p>
+            <a:pPr lvl="0"/>
+            <a:r>
+              <a:rPr lang="zh-CN" altLang="en-US" sz="1200"/>
+              <a:t>输出：</a:t>
+            </a:r>
+            <a:r>
+              <a:rPr lang="en-US" altLang="zh-CN" sz="1200">
+                <a:solidFill>
+                  <a:srgbClr val="FF0000"/>
+                </a:solidFill>
+              </a:rPr>
+              <a:t> [256, 128, 128]</a:t>
+            </a:r>
+            <a:endParaRPr lang="en-US" altLang="zh-CN" sz="1200"/>
+          </a:p>
+          <a:p>
+            <a:endParaRPr lang="zh-CN" altLang="en-US" sz="1200"/>
+          </a:p>
+          <a:p>
+            <a:r>
+              <a:rPr lang="en-US" altLang="zh-CN" sz="1200"/>
+              <a:t>C. </a:t>
+            </a:r>
+            <a:r>
+              <a:rPr lang="zh-CN" altLang="en-US" sz="1200"/>
+              <a:t>特征平滑</a:t>
+            </a:r>
+            <a:r>
+              <a:rPr lang="en-US" altLang="zh-CN" sz="1200"/>
+              <a:t> (Post-convolution)</a:t>
+            </a:r>
+            <a:r>
+              <a:rPr lang="zh-CN" altLang="en-US" sz="1200"/>
+              <a:t>在每一层融合后，通常会跟一个</a:t>
+            </a:r>
+            <a:r>
+              <a:rPr lang="en-US" altLang="zh-CN" sz="1200"/>
+              <a:t> 3*3 </a:t>
+            </a:r>
+            <a:r>
+              <a:rPr lang="zh-CN" altLang="en-US" sz="1200"/>
+              <a:t>的卷积。</a:t>
+            </a:r>
+            <a:endParaRPr lang="zh-CN" altLang="en-US" sz="1200"/>
+          </a:p>
+          <a:p>
+            <a:r>
+              <a:rPr lang="zh-CN" altLang="en-US" sz="1200"/>
+              <a:t>作用：</a:t>
+            </a:r>
+            <a:r>
+              <a:rPr lang="en-US" altLang="zh-CN" sz="1200"/>
+              <a:t> </a:t>
+            </a:r>
+            <a:r>
+              <a:rPr lang="zh-CN" altLang="en-US" sz="1200"/>
+              <a:t>消除上采样产生的</a:t>
+            </a:r>
+            <a:r>
+              <a:rPr lang="en-US" altLang="zh-CN" sz="1200"/>
+              <a:t>“</a:t>
+            </a:r>
+            <a:r>
+              <a:rPr lang="zh-CN" altLang="en-US" sz="1200"/>
+              <a:t>棋盘效应</a:t>
+            </a:r>
+            <a:r>
+              <a:rPr lang="en-US" altLang="zh-CN" sz="1200"/>
+              <a:t>”</a:t>
+            </a:r>
+            <a:r>
+              <a:rPr lang="zh-CN" altLang="en-US" sz="1200"/>
+              <a:t>或对齐误差，让线条的特征在空间上更加平滑、连续。</a:t>
+            </a:r>
+            <a:endParaRPr lang="zh-CN" altLang="en-US" sz="1200"/>
+          </a:p>
+        </p:txBody>
+      </p:sp>
+      <p:pic>
+        <p:nvPicPr>
+          <p:cNvPr id="5" name="图片 4"/>
+          <p:cNvPicPr>
+            <a:picLocks noChangeAspect="1"/>
+          </p:cNvPicPr>
+          <p:nvPr/>
+        </p:nvPicPr>
+        <p:blipFill>
+          <a:blip r:embed="rId3"/>
+          <a:srcRect l="30262" t="1029" r="30761" b="53294"/>
+          <a:stretch>
+            <a:fillRect/>
+          </a:stretch>
+        </p:blipFill>
+        <p:spPr>
+          <a:xfrm>
+            <a:off x="7718425" y="3662045"/>
+            <a:ext cx="4109085" cy="2802890"/>
+          </a:xfrm>
+          <a:prstGeom prst="rect">
+            <a:avLst/>
+          </a:prstGeom>
+        </p:spPr>
+      </p:pic>
+    </p:spTree>
+  </p:cSld>
+  <p:clrMapOvr>
+    <a:masterClrMapping/>
+  </p:clrMapOvr>
+</p:sld>
+</file>
+
+<file path=ppt/slides/slide6.xml><?xml version="1.0" encoding="utf-8"?>
+<p:sld xmlns:a="http://schemas.openxmlformats.org/drawingml/2006/main" xmlns:r="http://schemas.openxmlformats.org/officeDocument/2006/relationships" xmlns:p="http://schemas.openxmlformats.org/presentationml/2006/main">
+  <p:cSld>
+    <p:spTree>
+      <p:nvGrpSpPr>
+        <p:cNvPr id="1" name=""/>
+        <p:cNvGrpSpPr/>
+        <p:nvPr/>
+      </p:nvGrpSpPr>
+      <p:grpSpPr/>
+      <p:sp>
+        <p:nvSpPr>
+          <p:cNvPr id="2" name="标题 1"/>
+          <p:cNvSpPr>
+            <a:spLocks noGrp="1"/>
+          </p:cNvSpPr>
+          <p:nvPr>
+            <p:ph type="title"/>
+            <p:custDataLst>
+              <p:tags r:id="rId1"/>
+            </p:custDataLst>
+          </p:nvPr>
+        </p:nvSpPr>
+        <p:spPr>
+          <a:xfrm>
+            <a:off x="608330" y="68580"/>
+            <a:ext cx="10968990" cy="864235"/>
+          </a:xfrm>
+        </p:spPr>
+        <p:txBody>
+          <a:bodyPr/>
+          <a:p>
+            <a:r>
+              <a:rPr lang="en-US" altLang="zh-CN"/>
+              <a:t>transformer decoder</a:t>
+            </a:r>
+            <a:endParaRPr lang="en-US" altLang="zh-CN"/>
+          </a:p>
+        </p:txBody>
+      </p:sp>
+      <p:sp>
+        <p:nvSpPr>
+          <p:cNvPr id="3" name="内容占位符 2"/>
+          <p:cNvSpPr>
+            <a:spLocks noGrp="1"/>
+          </p:cNvSpPr>
+          <p:nvPr>
+            <p:ph idx="1"/>
+            <p:custDataLst>
+              <p:tags r:id="rId2"/>
+            </p:custDataLst>
+          </p:nvPr>
+        </p:nvSpPr>
+        <p:spPr>
+          <a:xfrm>
+            <a:off x="608330" y="932815"/>
+            <a:ext cx="10968990" cy="5584190"/>
+          </a:xfrm>
+        </p:spPr>
+        <p:txBody>
+          <a:bodyPr>
+            <a:noAutofit/>
+          </a:bodyPr>
+          <a:p>
+            <a:r>
+              <a:rPr lang="en-US" altLang="zh-CN" sz="1200"/>
+              <a:t>1. </a:t>
+            </a:r>
+            <a:r>
+              <a:rPr lang="zh-CN" altLang="en-US" sz="1200"/>
+              <a:t>输入：</a:t>
+            </a:r>
+            <a:endParaRPr lang="zh-CN" altLang="en-US" sz="1200"/>
+          </a:p>
+          <a:p>
+            <a:pPr lvl="1"/>
+            <a:r>
+              <a:rPr lang="zh-CN" altLang="en-US" sz="1000"/>
+              <a:t>特征（</a:t>
+            </a:r>
+            <a:r>
+              <a:rPr lang="en-US" altLang="zh-CN" sz="1000"/>
+              <a:t>Memory</a:t>
+            </a:r>
+            <a:r>
+              <a:rPr lang="zh-CN" altLang="en-US" sz="1000"/>
+              <a:t>）：来自</a:t>
+            </a:r>
+            <a:r>
+              <a:rPr lang="en-US" altLang="zh-CN" sz="1000"/>
+              <a:t>Pixel Decoder</a:t>
+            </a:r>
+            <a:r>
+              <a:rPr lang="zh-CN" altLang="en-US" sz="1000"/>
+              <a:t>的多尺度输出。</a:t>
+            </a:r>
+            <a:endParaRPr lang="zh-CN" altLang="en-US" sz="1000"/>
+          </a:p>
+          <a:p>
+            <a:pPr lvl="1"/>
+            <a:r>
+              <a:rPr lang="zh-CN" altLang="en-US" sz="1000">
+                <a:solidFill>
+                  <a:srgbClr val="FF0000"/>
+                </a:solidFill>
+              </a:rPr>
+              <a:t>注意：</a:t>
+            </a:r>
+            <a:r>
+              <a:rPr lang="en-US" altLang="zh-CN" sz="1000">
+                <a:solidFill>
+                  <a:srgbClr val="FF0000"/>
+                </a:solidFill>
+              </a:rPr>
+              <a:t>Decoder</a:t>
+            </a:r>
+            <a:r>
+              <a:rPr lang="zh-CN" altLang="en-US" sz="1000">
+                <a:solidFill>
+                  <a:srgbClr val="FF0000"/>
+                </a:solidFill>
+              </a:rPr>
+              <a:t>为了思考得快，通常不直接用</a:t>
+            </a:r>
+            <a:r>
+              <a:rPr lang="en-US" altLang="zh-CN" sz="1000">
+                <a:solidFill>
+                  <a:srgbClr val="FF0000"/>
+                </a:solidFill>
+              </a:rPr>
+              <a:t>128</a:t>
+            </a:r>
+            <a:r>
+              <a:rPr lang="zh-CN" altLang="en-US" sz="1000">
+                <a:solidFill>
+                  <a:srgbClr val="FF0000"/>
+                </a:solidFill>
+              </a:rPr>
+              <a:t>的图，而是用更小的图来定位。</a:t>
+            </a:r>
+            <a:endParaRPr lang="zh-CN" altLang="en-US" sz="1000">
+              <a:solidFill>
+                <a:srgbClr val="FF0000"/>
+              </a:solidFill>
+            </a:endParaRPr>
+          </a:p>
+          <a:p>
+            <a:pPr lvl="1"/>
+            <a:r>
+              <a:rPr lang="zh-CN" altLang="en-US" sz="1000"/>
+              <a:t>查询向量（</a:t>
+            </a:r>
+            <a:r>
+              <a:rPr lang="en-US" altLang="zh-CN" sz="1000"/>
+              <a:t>Object Queries</a:t>
+            </a:r>
+            <a:r>
+              <a:rPr lang="zh-CN" altLang="en-US" sz="1000"/>
+              <a:t>）：</a:t>
+            </a:r>
+            <a:r>
+              <a:rPr lang="en-US" altLang="zh-CN" sz="1000"/>
+              <a:t>N</a:t>
+            </a:r>
+            <a:r>
+              <a:rPr lang="zh-CN" altLang="en-US" sz="1000"/>
+              <a:t>个（</a:t>
+            </a:r>
+            <a:r>
+              <a:rPr lang="en-US" altLang="zh-CN" sz="1000"/>
+              <a:t>100</a:t>
+            </a:r>
+            <a:r>
+              <a:rPr lang="zh-CN" altLang="en-US" sz="1000"/>
+              <a:t>个）</a:t>
+            </a:r>
+            <a:r>
+              <a:rPr lang="en-US" altLang="zh-CN" sz="1000"/>
+              <a:t>[256]</a:t>
+            </a:r>
+            <a:r>
+              <a:rPr lang="zh-CN" altLang="en-US" sz="1000"/>
+              <a:t>维的随机向量。</a:t>
+            </a:r>
+            <a:endParaRPr lang="zh-CN" altLang="en-US" sz="1000"/>
+          </a:p>
+          <a:p>
+            <a:pPr lvl="1"/>
+            <a:r>
+              <a:rPr lang="zh-CN" altLang="en-US" sz="1000"/>
+              <a:t>位置编码：特征图上的像素点分别在什么位置</a:t>
+            </a:r>
+            <a:endParaRPr lang="zh-CN" altLang="en-US" sz="1000"/>
+          </a:p>
+          <a:p>
+            <a:r>
+              <a:rPr lang="en-US" altLang="zh-CN" sz="1200"/>
+              <a:t>2. </a:t>
+            </a:r>
+            <a:r>
+              <a:rPr lang="zh-CN" altLang="en-US" sz="1200"/>
+              <a:t>交互阶段：</a:t>
+            </a:r>
+            <a:endParaRPr lang="zh-CN" altLang="en-US" sz="1200"/>
+          </a:p>
+          <a:p>
+            <a:r>
+              <a:rPr lang="en-US" altLang="zh-CN" sz="1200"/>
+              <a:t>LineFormer </a:t>
+            </a:r>
+            <a:r>
+              <a:rPr lang="zh-CN" altLang="en-US" sz="1200"/>
+              <a:t>的</a:t>
+            </a:r>
+            <a:r>
+              <a:rPr lang="en-US" altLang="zh-CN" sz="1200"/>
+              <a:t> Decoder </a:t>
+            </a:r>
+            <a:r>
+              <a:rPr lang="zh-CN" altLang="en-US" sz="1200"/>
+              <a:t>通常包含</a:t>
+            </a:r>
+            <a:r>
+              <a:rPr lang="en-US" altLang="zh-CN" sz="1200"/>
+              <a:t> 6 </a:t>
+            </a:r>
+            <a:r>
+              <a:rPr lang="zh-CN" altLang="en-US" sz="1200"/>
+              <a:t>到</a:t>
+            </a:r>
+            <a:r>
+              <a:rPr lang="en-US" altLang="zh-CN" sz="1200"/>
+              <a:t> 9 </a:t>
+            </a:r>
+            <a:r>
+              <a:rPr lang="zh-CN" altLang="en-US" sz="1200"/>
+              <a:t>层（</a:t>
+            </a:r>
+            <a:r>
+              <a:rPr lang="en-US" altLang="zh-CN" sz="1200"/>
+              <a:t>Layer</a:t>
+            </a:r>
+            <a:r>
+              <a:rPr lang="zh-CN" altLang="en-US" sz="1200"/>
+              <a:t>）。每一层都在做同一件事：让</a:t>
+            </a:r>
+            <a:r>
+              <a:rPr lang="en-US" altLang="zh-CN" sz="1200"/>
+              <a:t> Query</a:t>
+            </a:r>
+            <a:r>
+              <a:rPr lang="zh-CN" altLang="en-US" sz="1200"/>
+              <a:t>变得更懂它要找的那条线</a:t>
+            </a:r>
+            <a:endParaRPr lang="zh-CN" altLang="en-US" sz="1200"/>
+          </a:p>
+          <a:p>
+            <a:pPr lvl="1"/>
+            <a:r>
+              <a:rPr lang="zh-CN" altLang="en-US" sz="990"/>
+              <a:t>第一步：</a:t>
+            </a:r>
+            <a:r>
+              <a:rPr lang="en-US" altLang="zh-CN" sz="990"/>
+              <a:t>Cross-Attention</a:t>
+            </a:r>
+            <a:endParaRPr lang="en-US" altLang="zh-CN" sz="990"/>
+          </a:p>
+          <a:p>
+            <a:pPr lvl="2"/>
+            <a:r>
+              <a:rPr lang="zh-CN" altLang="en-US" sz="990"/>
+              <a:t>通过</a:t>
+            </a:r>
+            <a:r>
+              <a:rPr lang="en-US" altLang="zh-CN" sz="990"/>
+              <a:t> Masked Attention</a:t>
+            </a:r>
+            <a:r>
+              <a:rPr lang="zh-CN" altLang="en-US" sz="990"/>
+              <a:t>（掩码注意力），</a:t>
+            </a:r>
+            <a:r>
+              <a:rPr lang="en-US" altLang="zh-CN" sz="990"/>
+              <a:t>Query</a:t>
+            </a:r>
+            <a:r>
+              <a:rPr lang="zh-CN" altLang="en-US" sz="990"/>
+              <a:t>只看上一轮自己认为有线的地方。</a:t>
+            </a:r>
+            <a:endParaRPr lang="zh-CN" altLang="en-US" sz="990"/>
+          </a:p>
+          <a:p>
+            <a:pPr lvl="2"/>
+            <a:r>
+              <a:rPr lang="zh-CN" altLang="en-US" sz="990"/>
+              <a:t>例子：</a:t>
+            </a:r>
+            <a:r>
+              <a:rPr lang="en-US" altLang="zh-CN" sz="990"/>
+              <a:t>Query 0 </a:t>
+            </a:r>
+            <a:r>
+              <a:rPr lang="zh-CN" altLang="en-US" sz="990"/>
+              <a:t>觉得</a:t>
+            </a:r>
+            <a:r>
+              <a:rPr lang="en-US" altLang="zh-CN" sz="990"/>
+              <a:t> (30, 40) </a:t>
+            </a:r>
+            <a:r>
+              <a:rPr lang="zh-CN" altLang="en-US" sz="990"/>
+              <a:t>这个坐标附近有一条上升的线，那它在这一层就会盯着</a:t>
+            </a:r>
+            <a:r>
+              <a:rPr lang="en-US" altLang="zh-CN" sz="990"/>
+              <a:t>(30, 40)</a:t>
+            </a:r>
+            <a:r>
+              <a:rPr lang="zh-CN" altLang="en-US" sz="990"/>
+              <a:t>周围的像素看，提取出这部分线条的颜色、粗细、连贯性特征。</a:t>
+            </a:r>
+            <a:endParaRPr lang="zh-CN" altLang="en-US" sz="990"/>
+          </a:p>
+          <a:p>
+            <a:pPr lvl="1"/>
+            <a:r>
+              <a:rPr lang="zh-CN" altLang="en-US" sz="990"/>
+              <a:t>第二步：</a:t>
+            </a:r>
+            <a:r>
+              <a:rPr lang="en-US" altLang="zh-CN" sz="990"/>
+              <a:t>Self-Attention</a:t>
+            </a:r>
+            <a:endParaRPr lang="en-US" altLang="zh-CN" sz="990"/>
+          </a:p>
+          <a:p>
+            <a:pPr lvl="2"/>
+            <a:r>
+              <a:rPr lang="zh-CN" altLang="en-US" sz="990"/>
+              <a:t>动作：</a:t>
+            </a:r>
+            <a:r>
+              <a:rPr lang="en-US" altLang="zh-CN" sz="990"/>
+              <a:t>100 </a:t>
+            </a:r>
+            <a:r>
+              <a:rPr lang="zh-CN" altLang="en-US" sz="990"/>
+              <a:t>个</a:t>
+            </a:r>
+            <a:r>
+              <a:rPr lang="en-US" altLang="zh-CN" sz="990"/>
+              <a:t> Query </a:t>
+            </a:r>
+            <a:r>
+              <a:rPr lang="zh-CN" altLang="en-US" sz="990"/>
+              <a:t>互相通信，确保</a:t>
+            </a:r>
+            <a:r>
+              <a:rPr lang="en-US" altLang="zh-CN" sz="990"/>
+              <a:t> 100 </a:t>
+            </a:r>
+            <a:r>
+              <a:rPr lang="zh-CN" altLang="en-US" sz="990"/>
+              <a:t>个</a:t>
+            </a:r>
+            <a:r>
+              <a:rPr lang="en-US" altLang="zh-CN" sz="990"/>
+              <a:t> Query </a:t>
+            </a:r>
+            <a:r>
+              <a:rPr lang="zh-CN" altLang="en-US" sz="990"/>
+              <a:t>最终各司其职，不会大家都去预测同一条线。</a:t>
+            </a:r>
+            <a:endParaRPr lang="zh-CN" altLang="en-US" sz="990"/>
+          </a:p>
+          <a:p>
+            <a:pPr lvl="1"/>
+            <a:r>
+              <a:rPr lang="zh-CN" altLang="en-US" sz="990"/>
+              <a:t>第三步：</a:t>
+            </a:r>
+            <a:r>
+              <a:rPr lang="en-US" altLang="zh-CN" sz="990"/>
+              <a:t>FFN</a:t>
+            </a:r>
+            <a:r>
+              <a:rPr lang="zh-CN" altLang="en-US" sz="990"/>
+              <a:t>：经过</a:t>
+            </a:r>
+            <a:r>
+              <a:rPr lang="en-US" altLang="zh-CN" sz="990"/>
+              <a:t> MLP </a:t>
+            </a:r>
+            <a:r>
+              <a:rPr lang="zh-CN" altLang="en-US" sz="990"/>
+              <a:t>网络，</a:t>
+            </a:r>
+            <a:r>
+              <a:rPr lang="en-US" altLang="zh-CN" sz="990"/>
+              <a:t>Query</a:t>
+            </a:r>
+            <a:r>
+              <a:rPr lang="zh-CN" altLang="en-US" sz="990"/>
+              <a:t>最终成了具有高度语义的</a:t>
+            </a:r>
+            <a:r>
+              <a:rPr lang="en-US" altLang="zh-CN" sz="990"/>
+              <a:t>“</a:t>
+            </a:r>
+            <a:r>
+              <a:rPr lang="zh-CN" altLang="en-US" sz="990"/>
+              <a:t>实例特征</a:t>
+            </a:r>
+            <a:r>
+              <a:rPr lang="en-US" altLang="zh-CN" sz="990"/>
+              <a:t>”</a:t>
+            </a:r>
+            <a:r>
+              <a:rPr lang="zh-CN" altLang="en-US" sz="990"/>
+              <a:t>。</a:t>
+            </a:r>
+            <a:endParaRPr lang="zh-CN" altLang="en-US" sz="1200"/>
+          </a:p>
+          <a:p>
+            <a:r>
+              <a:rPr lang="en-US" altLang="zh-CN" sz="1200"/>
+              <a:t>3. </a:t>
+            </a:r>
+            <a:r>
+              <a:rPr lang="zh-CN" altLang="en-US" sz="1200"/>
+              <a:t>输出阶段：</a:t>
+            </a:r>
+            <a:r>
+              <a:rPr lang="en-US" altLang="zh-CN" sz="1200"/>
+              <a:t>Decoder </a:t>
+            </a:r>
+            <a:r>
+              <a:rPr lang="zh-CN" altLang="en-US" sz="1200"/>
+              <a:t>输出</a:t>
+            </a:r>
+            <a:r>
+              <a:rPr lang="en-US" altLang="zh-CN" sz="1200"/>
+              <a:t>100</a:t>
+            </a:r>
+            <a:r>
+              <a:rPr lang="zh-CN" altLang="en-US" sz="1200"/>
+              <a:t>个</a:t>
+            </a:r>
+            <a:r>
+              <a:rPr lang="en-US" altLang="zh-CN" sz="1200"/>
+              <a:t>[256]</a:t>
+            </a:r>
+            <a:r>
+              <a:rPr lang="zh-CN" altLang="en-US" sz="1200"/>
+              <a:t>维的最终向量。</a:t>
+            </a:r>
+            <a:endParaRPr lang="zh-CN" altLang="en-US" sz="1200"/>
+          </a:p>
+          <a:p>
+            <a:pPr lvl="1"/>
+            <a:r>
+              <a:rPr lang="zh-CN" altLang="en-US" sz="990"/>
+              <a:t>分支一：</a:t>
+            </a:r>
+            <a:r>
+              <a:rPr lang="en-US" altLang="zh-CN" sz="990"/>
+              <a:t>Classification</a:t>
+            </a:r>
+            <a:r>
+              <a:rPr lang="zh-CN" altLang="en-US" sz="990"/>
+              <a:t>：每个</a:t>
+            </a:r>
+            <a:r>
+              <a:rPr lang="en-US" altLang="zh-CN" sz="990"/>
+              <a:t> Query </a:t>
+            </a:r>
+            <a:r>
+              <a:rPr lang="zh-CN" altLang="en-US" sz="990"/>
+              <a:t>向量进入一个线性层。结果：</a:t>
+            </a:r>
+            <a:r>
+              <a:rPr lang="en-US" altLang="zh-CN" sz="990"/>
+              <a:t>Query 0</a:t>
+            </a:r>
+            <a:r>
+              <a:rPr lang="zh-CN" altLang="en-US" sz="990"/>
+              <a:t>可能得到</a:t>
+            </a:r>
+            <a:r>
+              <a:rPr lang="en-US" altLang="zh-CN" sz="990"/>
+              <a:t> [0.98, 0.02]</a:t>
+            </a:r>
+            <a:r>
+              <a:rPr lang="zh-CN" altLang="en-US" sz="990"/>
+              <a:t>，意思是它有</a:t>
+            </a:r>
+            <a:r>
+              <a:rPr lang="en-US" altLang="zh-CN" sz="990"/>
+              <a:t>98%</a:t>
+            </a:r>
+            <a:r>
+              <a:rPr lang="zh-CN" altLang="en-US" sz="990"/>
+              <a:t>的把握抓到了一条线。</a:t>
+            </a:r>
+            <a:endParaRPr lang="zh-CN" altLang="en-US" sz="990"/>
+          </a:p>
+          <a:p>
+            <a:pPr lvl="1"/>
+            <a:r>
+              <a:rPr lang="zh-CN" altLang="en-US" sz="990"/>
+              <a:t>分支二：</a:t>
+            </a:r>
+            <a:r>
+              <a:rPr lang="en-US" altLang="zh-CN" sz="990"/>
+              <a:t>Mask Embedding</a:t>
+            </a:r>
+            <a:r>
+              <a:rPr lang="zh-CN" altLang="en-US" sz="990"/>
+              <a:t>：每个</a:t>
+            </a:r>
+            <a:r>
+              <a:rPr lang="en-US" altLang="zh-CN" sz="990"/>
+              <a:t> Query </a:t>
+            </a:r>
+            <a:r>
+              <a:rPr lang="zh-CN" altLang="en-US" sz="990"/>
+              <a:t>向量还会变成一个</a:t>
+            </a:r>
+            <a:r>
+              <a:rPr lang="en-US" altLang="zh-CN" sz="990"/>
+              <a:t>Mask</a:t>
+            </a:r>
+            <a:r>
+              <a:rPr lang="zh-CN" altLang="en-US" sz="990"/>
+              <a:t>特征向量（也是</a:t>
+            </a:r>
+            <a:r>
+              <a:rPr lang="en-US" altLang="zh-CN" sz="990"/>
+              <a:t> 256 </a:t>
+            </a:r>
+            <a:r>
+              <a:rPr lang="zh-CN" altLang="en-US" sz="990"/>
+              <a:t>维）。</a:t>
+            </a:r>
+            <a:endParaRPr lang="zh-CN" altLang="en-US" sz="1200"/>
+          </a:p>
+          <a:p>
+            <a:r>
+              <a:rPr lang="en-US" altLang="zh-CN" sz="1200"/>
+              <a:t>4. </a:t>
+            </a:r>
+            <a:r>
+              <a:rPr lang="zh-CN" altLang="en-US" sz="1200"/>
+              <a:t>点积：逐像素对比：</a:t>
+            </a:r>
+            <a:r>
+              <a:rPr lang="en-US" altLang="zh-CN" sz="1200"/>
+              <a:t>Query 0</a:t>
+            </a:r>
+            <a:r>
+              <a:rPr lang="zh-CN" altLang="en-US" sz="1200"/>
+              <a:t>的</a:t>
+            </a:r>
+            <a:r>
+              <a:rPr lang="en-US" altLang="zh-CN" sz="1200"/>
+              <a:t> [256] </a:t>
+            </a:r>
+            <a:r>
+              <a:rPr lang="zh-CN" altLang="en-US" sz="1200"/>
+              <a:t>向量，去跟特征图上</a:t>
+            </a:r>
+            <a:r>
+              <a:rPr lang="en-US" altLang="zh-CN" sz="1200">
+                <a:solidFill>
+                  <a:srgbClr val="FF0000"/>
+                </a:solidFill>
+                <a:sym typeface="+mn-ea"/>
+              </a:rPr>
+              <a:t> [256, 128, 128]</a:t>
+            </a:r>
+            <a:r>
+              <a:rPr lang="en-US" altLang="zh-CN" sz="1200"/>
+              <a:t>128*128 = 16384</a:t>
+            </a:r>
+            <a:r>
+              <a:rPr lang="zh-CN" altLang="en-US" sz="1200"/>
+              <a:t>个点逐一做乘法。</a:t>
+            </a:r>
+            <a:endParaRPr lang="zh-CN" altLang="en-US" sz="1200"/>
+          </a:p>
+          <a:p>
+            <a:pPr lvl="1"/>
+            <a:r>
+              <a:rPr lang="zh-CN" altLang="en-US" sz="990"/>
+              <a:t>逻辑：如果某个像素点的</a:t>
+            </a:r>
+            <a:r>
+              <a:rPr lang="en-US" altLang="zh-CN" sz="990"/>
+              <a:t> [256] </a:t>
+            </a:r>
+            <a:r>
+              <a:rPr lang="zh-CN" altLang="en-US" sz="990"/>
+              <a:t>维特征跟</a:t>
+            </a:r>
+            <a:r>
+              <a:rPr lang="en-US" altLang="zh-CN" sz="990"/>
+              <a:t> Query 0 </a:t>
+            </a:r>
+            <a:r>
+              <a:rPr lang="zh-CN" altLang="en-US" sz="990"/>
+              <a:t>匹配（比如都表现出</a:t>
+            </a:r>
+            <a:r>
+              <a:rPr lang="en-US" altLang="zh-CN" sz="990"/>
+              <a:t>“</a:t>
+            </a:r>
+            <a:r>
+              <a:rPr lang="zh-CN" altLang="en-US" sz="990"/>
+              <a:t>红色</a:t>
+            </a:r>
+            <a:r>
+              <a:rPr lang="en-US" altLang="zh-CN" sz="990"/>
+              <a:t>”</a:t>
+            </a:r>
+            <a:r>
+              <a:rPr lang="zh-CN" altLang="en-US" sz="990"/>
+              <a:t>、</a:t>
+            </a:r>
+            <a:r>
+              <a:rPr lang="en-US" altLang="zh-CN" sz="990"/>
+              <a:t>“</a:t>
+            </a:r>
+            <a:r>
+              <a:rPr lang="zh-CN" altLang="en-US" sz="990"/>
+              <a:t>虚线</a:t>
+            </a:r>
+            <a:r>
+              <a:rPr lang="en-US" altLang="zh-CN" sz="990"/>
+              <a:t>”</a:t>
+            </a:r>
+            <a:r>
+              <a:rPr lang="zh-CN" altLang="en-US" sz="990"/>
+              <a:t>、</a:t>
+            </a:r>
+            <a:r>
+              <a:rPr lang="en-US" altLang="zh-CN" sz="990"/>
+              <a:t>“45</a:t>
+            </a:r>
+            <a:r>
+              <a:rPr lang="zh-CN" altLang="en-US" sz="990"/>
+              <a:t>度角</a:t>
+            </a:r>
+            <a:r>
+              <a:rPr lang="en-US" altLang="zh-CN" sz="990"/>
+              <a:t>”</a:t>
+            </a:r>
+            <a:r>
+              <a:rPr lang="zh-CN" altLang="en-US" sz="990"/>
+              <a:t>），乘积就很大。</a:t>
+            </a:r>
+            <a:endParaRPr lang="zh-CN" altLang="en-US" sz="990"/>
+          </a:p>
+          <a:p>
+            <a:pPr lvl="1"/>
+            <a:r>
+              <a:rPr lang="zh-CN" altLang="en-US" sz="990"/>
+              <a:t>生成结果：最后得到一张</a:t>
+            </a:r>
+            <a:r>
+              <a:rPr lang="en-US" altLang="zh-CN" sz="990"/>
+              <a:t> [128, 128] </a:t>
+            </a:r>
+            <a:r>
+              <a:rPr lang="zh-CN" altLang="en-US" sz="990"/>
+              <a:t>的黑白图（</a:t>
+            </a:r>
+            <a:r>
+              <a:rPr lang="en-US" altLang="zh-CN" sz="990"/>
+              <a:t>Logit</a:t>
+            </a:r>
+            <a:r>
+              <a:rPr lang="zh-CN" altLang="en-US" sz="990"/>
+              <a:t>值经过</a:t>
+            </a:r>
+            <a:r>
+              <a:rPr lang="en-US" altLang="zh-CN" sz="990"/>
+              <a:t>Sigmoid</a:t>
+            </a:r>
+            <a:r>
+              <a:rPr lang="zh-CN" altLang="en-US" sz="990"/>
+              <a:t>函数后变成</a:t>
+            </a:r>
+            <a:r>
+              <a:rPr lang="en-US" altLang="zh-CN" sz="990"/>
+              <a:t>0</a:t>
+            </a:r>
+            <a:r>
+              <a:rPr lang="zh-CN" altLang="en-US" sz="990"/>
+              <a:t>到</a:t>
+            </a:r>
+            <a:r>
+              <a:rPr lang="en-US" altLang="zh-CN" sz="990"/>
+              <a:t>1</a:t>
+            </a:r>
+            <a:r>
+              <a:rPr lang="zh-CN" altLang="en-US" sz="990"/>
+              <a:t>之间的概率）。在</a:t>
+            </a:r>
+            <a:r>
+              <a:rPr lang="en-US" altLang="zh-CN" sz="990"/>
+              <a:t>512</a:t>
+            </a:r>
+            <a:r>
+              <a:rPr lang="zh-CN" altLang="en-US" sz="990"/>
+              <a:t>原图上：这相当于每</a:t>
+            </a:r>
+            <a:r>
+              <a:rPr lang="en-US" altLang="zh-CN" sz="990"/>
+              <a:t>4</a:t>
+            </a:r>
+            <a:r>
+              <a:rPr lang="zh-CN" altLang="en-US" sz="990"/>
+              <a:t>个原始像素对应这个掩码里的</a:t>
+            </a:r>
+            <a:r>
+              <a:rPr lang="en-US" altLang="zh-CN" sz="990"/>
+              <a:t> 1 </a:t>
+            </a:r>
+            <a:r>
+              <a:rPr lang="zh-CN" altLang="en-US" sz="990"/>
+              <a:t>个点。最后可以进行上采样还原至</a:t>
+            </a:r>
+            <a:r>
+              <a:rPr lang="en-US" altLang="zh-CN" sz="990"/>
+              <a:t>512</a:t>
+            </a:r>
+            <a:r>
+              <a:rPr lang="zh-CN" altLang="en-US" sz="990"/>
+              <a:t>。</a:t>
+            </a:r>
+            <a:endParaRPr lang="zh-CN" altLang="en-US" sz="990"/>
+          </a:p>
+        </p:txBody>
+      </p:sp>
+      <p:pic>
+        <p:nvPicPr>
+          <p:cNvPr id="4" name="图片 3"/>
+          <p:cNvPicPr>
+            <a:picLocks noChangeAspect="1"/>
+          </p:cNvPicPr>
+          <p:nvPr/>
+        </p:nvPicPr>
+        <p:blipFill>
+          <a:blip r:embed="rId3"/>
+          <a:srcRect l="27026" r="9806" b="53414"/>
+          <a:stretch>
+            <a:fillRect/>
+          </a:stretch>
+        </p:blipFill>
+        <p:spPr>
+          <a:xfrm>
+            <a:off x="6665595" y="116840"/>
+            <a:ext cx="5445760" cy="2338070"/>
+          </a:xfrm>
+          <a:prstGeom prst="rect">
+            <a:avLst/>
+          </a:prstGeom>
+        </p:spPr>
+      </p:pic>
+    </p:spTree>
+  </p:cSld>
+  <p:clrMapOvr>
+    <a:masterClrMapping/>
+  </p:clrMapOvr>
+</p:sld>
+</file>
+
+<file path=ppt/slides/slide7.xml><?xml version="1.0" encoding="utf-8"?>
+<p:sld xmlns:a="http://schemas.openxmlformats.org/drawingml/2006/main" xmlns:r="http://schemas.openxmlformats.org/officeDocument/2006/relationships" xmlns:p="http://schemas.openxmlformats.org/presentationml/2006/main">
+  <p:cSld>
+    <p:spTree>
+      <p:nvGrpSpPr>
+        <p:cNvPr id="1" name=""/>
+        <p:cNvGrpSpPr/>
+        <p:nvPr/>
+      </p:nvGrpSpPr>
+      <p:grpSpPr/>
+      <p:sp>
+        <p:nvSpPr>
+          <p:cNvPr id="2" name="标题 1"/>
+          <p:cNvSpPr>
+            <a:spLocks noGrp="1"/>
+          </p:cNvSpPr>
+          <p:nvPr>
+            <p:ph type="title"/>
+            <p:custDataLst>
+              <p:tags r:id="rId1"/>
+            </p:custDataLst>
+          </p:nvPr>
+        </p:nvSpPr>
+        <p:spPr/>
+        <p:txBody>
+          <a:bodyPr/>
+          <a:p>
+            <a:r>
+              <a:rPr lang="zh-CN" altLang="en-US"/>
+              <a:t>可视化</a:t>
+            </a:r>
+            <a:endParaRPr lang="zh-CN" altLang="en-US"/>
+          </a:p>
+        </p:txBody>
+      </p:sp>
+      <p:sp>
+        <p:nvSpPr>
+          <p:cNvPr id="3" name="内容占位符 2"/>
+          <p:cNvSpPr>
+            <a:spLocks noGrp="1"/>
+          </p:cNvSpPr>
+          <p:nvPr>
+            <p:ph idx="1"/>
+            <p:custDataLst>
+              <p:tags r:id="rId2"/>
+            </p:custDataLst>
+          </p:nvPr>
+        </p:nvSpPr>
+        <p:spPr/>
+        <p:txBody>
+          <a:bodyPr/>
+          <a:p>
+            <a:endParaRPr lang="zh-CN" altLang="en-US"/>
+          </a:p>
+        </p:txBody>
+      </p:sp>
+      <p:pic>
+        <p:nvPicPr>
+          <p:cNvPr id="9" name="图片 8" descr="bound2_infe"/>
+          <p:cNvPicPr>
+            <a:picLocks noChangeAspect="1"/>
+          </p:cNvPicPr>
+          <p:nvPr/>
+        </p:nvPicPr>
+        <p:blipFill>
+          <a:blip r:embed="rId3"/>
+          <a:stretch>
+            <a:fillRect/>
+          </a:stretch>
+        </p:blipFill>
+        <p:spPr>
+          <a:xfrm>
+            <a:off x="5473700" y="1313815"/>
+            <a:ext cx="6757670" cy="4838700"/>
+          </a:xfrm>
+          <a:prstGeom prst="rect">
+            <a:avLst/>
+          </a:prstGeom>
+        </p:spPr>
+      </p:pic>
+      <p:pic>
+        <p:nvPicPr>
+          <p:cNvPr id="11" name="图片 10" descr="bound2"/>
+          <p:cNvPicPr>
+            <a:picLocks noChangeAspect="1"/>
+          </p:cNvPicPr>
+          <p:nvPr/>
+        </p:nvPicPr>
+        <p:blipFill>
+          <a:blip r:embed="rId4"/>
+          <a:stretch>
+            <a:fillRect/>
+          </a:stretch>
+        </p:blipFill>
+        <p:spPr>
+          <a:xfrm>
+            <a:off x="161925" y="2008505"/>
+            <a:ext cx="5405120" cy="3869690"/>
+          </a:xfrm>
+          <a:prstGeom prst="rect">
+            <a:avLst/>
+          </a:prstGeom>
+        </p:spPr>
+      </p:pic>
+    </p:spTree>
+  </p:cSld>
+  <p:clrMapOvr>
+    <a:masterClrMapping/>
+  </p:clrMapOvr>
+</p:sld>
+</file>
+
+<file path=ppt/slides/slide8.xml><?xml version="1.0" encoding="utf-8"?>
+<p:sld xmlns:a="http://schemas.openxmlformats.org/drawingml/2006/main" xmlns:r="http://schemas.openxmlformats.org/officeDocument/2006/relationships" xmlns:p="http://schemas.openxmlformats.org/presentationml/2006/main">
+  <p:cSld>
+    <p:spTree>
+      <p:nvGrpSpPr>
+        <p:cNvPr id="1" name=""/>
+        <p:cNvGrpSpPr/>
+        <p:nvPr/>
+      </p:nvGrpSpPr>
+      <p:grpSpPr/>
+      <p:sp>
+        <p:nvSpPr>
+          <p:cNvPr id="2" name="标题 1"/>
+          <p:cNvSpPr>
+            <a:spLocks noGrp="1"/>
+          </p:cNvSpPr>
+          <p:nvPr>
+            <p:ph type="title"/>
+            <p:custDataLst>
+              <p:tags r:id="rId1"/>
+            </p:custDataLst>
+          </p:nvPr>
+        </p:nvSpPr>
+        <p:spPr/>
+        <p:txBody>
+          <a:bodyPr/>
+          <a:p>
+            <a:r>
+              <a:rPr lang="zh-CN" altLang="en-US"/>
+              <a:t>可视化</a:t>
+            </a:r>
+            <a:endParaRPr lang="zh-CN" altLang="en-US"/>
+          </a:p>
+        </p:txBody>
+      </p:sp>
+      <p:sp>
+        <p:nvSpPr>
+          <p:cNvPr id="3" name="内容占位符 2"/>
+          <p:cNvSpPr>
+            <a:spLocks noGrp="1"/>
+          </p:cNvSpPr>
+          <p:nvPr>
+            <p:ph idx="1"/>
+            <p:custDataLst>
+              <p:tags r:id="rId2"/>
+            </p:custDataLst>
+          </p:nvPr>
+        </p:nvSpPr>
+        <p:spPr/>
+        <p:txBody>
+          <a:bodyPr/>
+          <a:p>
+            <a:endParaRPr lang="zh-CN" altLang="en-US"/>
+          </a:p>
+        </p:txBody>
+      </p:sp>
+      <p:pic>
+        <p:nvPicPr>
+          <p:cNvPr id="5" name="图片 4" descr="chart2_0001"/>
+          <p:cNvPicPr>
+            <a:picLocks noChangeAspect="1"/>
+          </p:cNvPicPr>
+          <p:nvPr/>
+        </p:nvPicPr>
+        <p:blipFill>
+          <a:blip r:embed="rId3"/>
+          <a:stretch>
+            <a:fillRect/>
+          </a:stretch>
+        </p:blipFill>
+        <p:spPr>
+          <a:xfrm>
+            <a:off x="551815" y="1590040"/>
+            <a:ext cx="5198745" cy="4579620"/>
+          </a:xfrm>
+          <a:prstGeom prst="rect">
+            <a:avLst/>
+          </a:prstGeom>
+        </p:spPr>
+      </p:pic>
+      <p:pic>
+        <p:nvPicPr>
+          <p:cNvPr id="6" name="图片 5" descr="chart2_0001_result"/>
+          <p:cNvPicPr>
+            <a:picLocks noChangeAspect="1"/>
+          </p:cNvPicPr>
+          <p:nvPr/>
+        </p:nvPicPr>
+        <p:blipFill>
+          <a:blip r:embed="rId4"/>
+          <a:stretch>
+            <a:fillRect/>
+          </a:stretch>
+        </p:blipFill>
+        <p:spPr>
+          <a:xfrm>
+            <a:off x="5760720" y="870585"/>
+            <a:ext cx="6101080" cy="5374640"/>
+          </a:xfrm>
+          <a:prstGeom prst="rect">
+            <a:avLst/>
+          </a:prstGeom>
+        </p:spPr>
+      </p:pic>
+    </p:spTree>
+  </p:cSld>
+  <p:clrMapOvr>
+    <a:masterClrMapping/>
+  </p:clrMapOvr>
+</p:sld>
+</file>
+
+<file path=ppt/slides/slide9.xml><?xml version="1.0" encoding="utf-8"?>
 <p:sld xmlns:a="http://schemas.openxmlformats.org/drawingml/2006/main" xmlns:r="http://schemas.openxmlformats.org/officeDocument/2006/relationships" xmlns:p="http://schemas.openxmlformats.org/presentationml/2006/main">
   <p:cSld>
     <p:spTree>
@@ -4630,2856 +7457,6 @@
 </p:sld>
 </file>
 
-<file path=ppt/slides/slide11.xml><?xml version="1.0" encoding="utf-8"?>
-<p:sld xmlns:a="http://schemas.openxmlformats.org/drawingml/2006/main" xmlns:r="http://schemas.openxmlformats.org/officeDocument/2006/relationships" xmlns:p="http://schemas.openxmlformats.org/presentationml/2006/main">
-  <p:cSld>
-    <p:spTree>
-      <p:nvGrpSpPr>
-        <p:cNvPr id="1" name=""/>
-        <p:cNvGrpSpPr/>
-        <p:nvPr/>
-      </p:nvGrpSpPr>
-      <p:grpSpPr/>
-      <p:sp>
-        <p:nvSpPr>
-          <p:cNvPr id="2" name="标题 1"/>
-          <p:cNvSpPr>
-            <a:spLocks noGrp="1"/>
-          </p:cNvSpPr>
-          <p:nvPr>
-            <p:ph type="title"/>
-            <p:custDataLst>
-              <p:tags r:id="rId1"/>
-            </p:custDataLst>
-          </p:nvPr>
-        </p:nvSpPr>
-        <p:spPr/>
-        <p:txBody>
-          <a:bodyPr/>
-          <a:p>
-            <a:r>
-              <a:rPr lang="en-US" altLang="zh-CN"/>
-              <a:t>Future</a:t>
-            </a:r>
-            <a:endParaRPr lang="en-US" altLang="zh-CN"/>
-          </a:p>
-        </p:txBody>
-      </p:sp>
-      <p:sp>
-        <p:nvSpPr>
-          <p:cNvPr id="3" name="内容占位符 2"/>
-          <p:cNvSpPr>
-            <a:spLocks noGrp="1"/>
-          </p:cNvSpPr>
-          <p:nvPr>
-            <p:ph idx="1"/>
-            <p:custDataLst>
-              <p:tags r:id="rId2"/>
-            </p:custDataLst>
-          </p:nvPr>
-        </p:nvSpPr>
-        <p:spPr/>
-        <p:txBody>
-          <a:bodyPr/>
-          <a:p>
-            <a:r>
-              <a:rPr lang="en-US" altLang="zh-CN"/>
-              <a:t>1. </a:t>
-            </a:r>
-            <a:r>
-              <a:rPr lang="zh-CN" altLang="en-US"/>
-              <a:t>在黑白带网格的图像上识别的问题；</a:t>
-            </a:r>
-            <a:endParaRPr lang="zh-CN" altLang="en-US"/>
-          </a:p>
-          <a:p>
-            <a:r>
-              <a:rPr lang="en-US" altLang="zh-CN"/>
-              <a:t>2. </a:t>
-            </a:r>
-            <a:r>
-              <a:rPr lang="zh-CN" altLang="en-US"/>
-              <a:t>曲线交会会导致识别提前终止；</a:t>
-            </a:r>
-            <a:endParaRPr lang="zh-CN" altLang="en-US"/>
-          </a:p>
-          <a:p>
-            <a:r>
-              <a:rPr lang="en-US" altLang="zh-CN"/>
-              <a:t>3. </a:t>
-            </a:r>
-            <a:r>
-              <a:rPr lang="zh-CN" altLang="en-US">
-                <a:solidFill>
-                  <a:srgbClr val="FF0000"/>
-                </a:solidFill>
-              </a:rPr>
-              <a:t>虚线与实线交汇上，虚线丢失问题（</a:t>
-            </a:r>
-            <a:r>
-              <a:rPr lang="zh-CN" altLang="en-US">
-                <a:solidFill>
-                  <a:srgbClr val="FF0000"/>
-                </a:solidFill>
-              </a:rPr>
-              <a:t>特征注入）</a:t>
-            </a:r>
-            <a:endParaRPr lang="zh-CN" altLang="en-US">
-              <a:solidFill>
-                <a:srgbClr val="FF0000"/>
-              </a:solidFill>
-            </a:endParaRPr>
-          </a:p>
-        </p:txBody>
-      </p:sp>
-    </p:spTree>
-  </p:cSld>
-  <p:clrMapOvr>
-    <a:masterClrMapping/>
-  </p:clrMapOvr>
-</p:sld>
-</file>
-
-<file path=ppt/slides/slide2.xml><?xml version="1.0" encoding="utf-8"?>
-<p:sld xmlns:a="http://schemas.openxmlformats.org/drawingml/2006/main" xmlns:r="http://schemas.openxmlformats.org/officeDocument/2006/relationships" xmlns:p="http://schemas.openxmlformats.org/presentationml/2006/main">
-  <p:cSld>
-    <p:spTree>
-      <p:nvGrpSpPr>
-        <p:cNvPr id="1" name=""/>
-        <p:cNvGrpSpPr/>
-        <p:nvPr/>
-      </p:nvGrpSpPr>
-      <p:grpSpPr/>
-      <p:sp>
-        <p:nvSpPr>
-          <p:cNvPr id="2" name="标题 1"/>
-          <p:cNvSpPr>
-            <a:spLocks noGrp="1"/>
-          </p:cNvSpPr>
-          <p:nvPr>
-            <p:ph type="title"/>
-            <p:custDataLst>
-              <p:tags r:id="rId1"/>
-            </p:custDataLst>
-          </p:nvPr>
-        </p:nvSpPr>
-        <p:spPr/>
-        <p:txBody>
-          <a:bodyPr/>
-          <a:p>
-            <a:endParaRPr lang="zh-CN" altLang="en-US"/>
-          </a:p>
-        </p:txBody>
-      </p:sp>
-      <p:sp>
-        <p:nvSpPr>
-          <p:cNvPr id="3" name="内容占位符 2"/>
-          <p:cNvSpPr>
-            <a:spLocks noGrp="1"/>
-          </p:cNvSpPr>
-          <p:nvPr>
-            <p:ph idx="1"/>
-            <p:custDataLst>
-              <p:tags r:id="rId2"/>
-            </p:custDataLst>
-          </p:nvPr>
-        </p:nvSpPr>
-        <p:spPr>
-          <a:xfrm>
-            <a:off x="608330" y="5200015"/>
-            <a:ext cx="10968990" cy="1049655"/>
-          </a:xfrm>
-        </p:spPr>
-        <p:txBody>
-          <a:bodyPr/>
-          <a:p>
-            <a:pPr marL="0" indent="0" algn="ctr">
-              <a:buNone/>
-            </a:pPr>
-            <a:r>
-              <a:rPr lang="en-US" altLang="zh-CN"/>
-              <a:t>ICDAR </a:t>
-            </a:r>
-            <a:endParaRPr lang="en-US" altLang="zh-CN"/>
-          </a:p>
-          <a:p>
-            <a:pPr marL="0" indent="0" algn="ctr">
-              <a:buNone/>
-            </a:pPr>
-            <a:endParaRPr lang="zh-CN" altLang="en-US"/>
-          </a:p>
-        </p:txBody>
-      </p:sp>
-      <p:pic>
-        <p:nvPicPr>
-          <p:cNvPr id="5" name="图片 4"/>
-          <p:cNvPicPr>
-            <a:picLocks noChangeAspect="1"/>
-          </p:cNvPicPr>
-          <p:nvPr/>
-        </p:nvPicPr>
-        <p:blipFill>
-          <a:blip r:embed="rId3"/>
-          <a:stretch>
-            <a:fillRect/>
-          </a:stretch>
-        </p:blipFill>
-        <p:spPr>
-          <a:xfrm>
-            <a:off x="1170940" y="1054735"/>
-            <a:ext cx="9458325" cy="3974465"/>
-          </a:xfrm>
-          <a:prstGeom prst="rect">
-            <a:avLst/>
-          </a:prstGeom>
-        </p:spPr>
-      </p:pic>
-    </p:spTree>
-  </p:cSld>
-  <p:clrMapOvr>
-    <a:masterClrMapping/>
-  </p:clrMapOvr>
-</p:sld>
-</file>
-
-<file path=ppt/slides/slide3.xml><?xml version="1.0" encoding="utf-8"?>
-<p:sld xmlns:a="http://schemas.openxmlformats.org/drawingml/2006/main" xmlns:r="http://schemas.openxmlformats.org/officeDocument/2006/relationships" xmlns:p="http://schemas.openxmlformats.org/presentationml/2006/main">
-  <p:cSld>
-    <p:spTree>
-      <p:nvGrpSpPr>
-        <p:cNvPr id="1" name=""/>
-        <p:cNvGrpSpPr/>
-        <p:nvPr/>
-      </p:nvGrpSpPr>
-      <p:grpSpPr/>
-      <p:sp>
-        <p:nvSpPr>
-          <p:cNvPr id="2" name="标题 1"/>
-          <p:cNvSpPr>
-            <a:spLocks noGrp="1"/>
-          </p:cNvSpPr>
-          <p:nvPr>
-            <p:ph type="title"/>
-            <p:custDataLst>
-              <p:tags r:id="rId1"/>
-            </p:custDataLst>
-          </p:nvPr>
-        </p:nvSpPr>
-        <p:spPr/>
-        <p:txBody>
-          <a:bodyPr/>
-          <a:p>
-            <a:r>
-              <a:rPr lang="zh-CN" altLang="en-US"/>
-              <a:t>背景</a:t>
-            </a:r>
-            <a:endParaRPr lang="zh-CN" altLang="en-US"/>
-          </a:p>
-        </p:txBody>
-      </p:sp>
-      <p:sp>
-        <p:nvSpPr>
-          <p:cNvPr id="3" name="内容占位符 2"/>
-          <p:cNvSpPr>
-            <a:spLocks noGrp="1"/>
-          </p:cNvSpPr>
-          <p:nvPr>
-            <p:ph idx="1"/>
-            <p:custDataLst>
-              <p:tags r:id="rId2"/>
-            </p:custDataLst>
-          </p:nvPr>
-        </p:nvSpPr>
-        <p:spPr/>
-        <p:txBody>
-          <a:bodyPr>
-            <a:noAutofit/>
-          </a:bodyPr>
-          <a:p>
-            <a:r>
-              <a:rPr lang="zh-CN" altLang="en-US" sz="1400"/>
-              <a:t>为什么要做折线图数据提取？</a:t>
-            </a:r>
-            <a:endParaRPr lang="zh-CN" altLang="en-US" sz="1400"/>
-          </a:p>
-          <a:p>
-            <a:pPr lvl="1"/>
-            <a:r>
-              <a:rPr lang="zh-CN" altLang="en-US" sz="1200"/>
-              <a:t>大量科研论文</a:t>
-            </a:r>
-            <a:r>
-              <a:rPr lang="en-US" altLang="zh-CN" sz="1200"/>
-              <a:t>/</a:t>
-            </a:r>
-            <a:r>
-              <a:rPr lang="zh-CN" altLang="en-US" sz="1200"/>
-              <a:t>报告以图表形式展示数据</a:t>
-            </a:r>
-            <a:endParaRPr lang="zh-CN" altLang="en-US" sz="1200"/>
-          </a:p>
-          <a:p>
-            <a:pPr lvl="1"/>
-            <a:r>
-              <a:rPr lang="zh-CN" altLang="en-US" sz="1200"/>
-              <a:t>原始数据不可获取</a:t>
-            </a:r>
-            <a:endParaRPr lang="zh-CN" altLang="en-US" sz="1200"/>
-          </a:p>
-          <a:p>
-            <a:pPr lvl="1"/>
-            <a:r>
-              <a:rPr lang="zh-CN" altLang="en-US" sz="1200"/>
-              <a:t>需要自动恢复结构化数据（</a:t>
-            </a:r>
-            <a:r>
-              <a:rPr lang="en-US" altLang="zh-CN" sz="1200"/>
-              <a:t>table / array</a:t>
-            </a:r>
-            <a:r>
-              <a:rPr lang="zh-CN" altLang="en-US" sz="1200"/>
-              <a:t>）</a:t>
-            </a:r>
-            <a:endParaRPr lang="en-US" altLang="zh-CN" sz="1200"/>
-          </a:p>
-          <a:p>
-            <a:endParaRPr lang="zh-CN" altLang="en-US" sz="1400"/>
-          </a:p>
-          <a:p>
-            <a:r>
-              <a:rPr lang="zh-CN" altLang="en-US" sz="1400"/>
-              <a:t>本质任务：图像</a:t>
-            </a:r>
-            <a:r>
-              <a:rPr lang="en-US" altLang="zh-CN" sz="1400"/>
-              <a:t> </a:t>
-            </a:r>
-            <a:r>
-              <a:rPr lang="en-US" altLang="en-US" sz="1400"/>
-              <a:t>→</a:t>
-            </a:r>
-            <a:r>
-              <a:rPr lang="en-US" altLang="zh-CN" sz="1400"/>
-              <a:t> </a:t>
-            </a:r>
-            <a:r>
-              <a:rPr lang="zh-CN" altLang="en-US" sz="1400"/>
-              <a:t>曲线</a:t>
-            </a:r>
-            <a:r>
-              <a:rPr lang="en-US" altLang="zh-CN" sz="1400"/>
-              <a:t> </a:t>
-            </a:r>
-            <a:r>
-              <a:rPr lang="en-US" altLang="en-US" sz="1400"/>
-              <a:t>→</a:t>
-            </a:r>
-            <a:r>
-              <a:rPr lang="en-US" altLang="zh-CN" sz="1400"/>
-              <a:t> </a:t>
-            </a:r>
-            <a:r>
-              <a:rPr lang="zh-CN" altLang="en-US" sz="1400"/>
-              <a:t>数值序列</a:t>
-            </a:r>
-            <a:endParaRPr lang="zh-CN" altLang="en-US" sz="1400"/>
-          </a:p>
-          <a:p>
-            <a:endParaRPr lang="zh-CN" altLang="en-US" sz="1400"/>
-          </a:p>
-          <a:p>
-            <a:r>
-              <a:rPr lang="zh-CN" altLang="en-US" sz="1400"/>
-              <a:t>传统方法</a:t>
-            </a:r>
-            <a:r>
-              <a:rPr lang="zh-CN" altLang="en-US" sz="1400"/>
-              <a:t>存在的问题：</a:t>
-            </a:r>
-            <a:endParaRPr lang="en-US" altLang="zh-CN" sz="1400"/>
-          </a:p>
-          <a:p>
-            <a:pPr lvl="1"/>
-            <a:r>
-              <a:rPr lang="zh-CN" altLang="en-US" sz="1200"/>
-              <a:t>依赖图例（</a:t>
-            </a:r>
-            <a:r>
-              <a:rPr lang="en-US" altLang="zh-CN" sz="1200"/>
-              <a:t>Legend</a:t>
-            </a:r>
-            <a:r>
-              <a:rPr lang="zh-CN" altLang="en-US" sz="1200"/>
-              <a:t>）等辅助信息。</a:t>
-            </a:r>
-            <a:endParaRPr lang="en-US" altLang="zh-CN" sz="1200"/>
-          </a:p>
-          <a:p>
-            <a:pPr lvl="1"/>
-            <a:r>
-              <a:rPr lang="zh-CN" altLang="en-US" sz="1200"/>
-              <a:t>对曲线交叉、颜色相似或图表样式变化不够鲁棒。</a:t>
-            </a:r>
-            <a:endParaRPr lang="en-US" altLang="zh-CN" sz="1200"/>
-          </a:p>
-          <a:p>
-            <a:pPr lvl="1"/>
-            <a:r>
-              <a:rPr lang="zh-CN" altLang="en-US" sz="1200"/>
-              <a:t>流程过于复杂，通常包含多个独立的预处理步骤。</a:t>
-            </a:r>
-            <a:endParaRPr lang="zh-CN" altLang="en-US" sz="1200"/>
-          </a:p>
-          <a:p>
-            <a:pPr lvl="0"/>
-            <a:endParaRPr lang="zh-CN" altLang="en-US" sz="1350"/>
-          </a:p>
-          <a:p>
-            <a:pPr lvl="0"/>
-            <a:r>
-              <a:rPr lang="en-US" altLang="zh-CN" sz="1350"/>
-              <a:t>LineFormer </a:t>
-            </a:r>
-            <a:r>
-              <a:rPr lang="zh-CN" altLang="en-US" sz="1350"/>
-              <a:t>核心思想：</a:t>
-            </a:r>
-            <a:r>
-              <a:rPr lang="en-US" altLang="zh-CN" sz="1350"/>
-              <a:t> </a:t>
-            </a:r>
-            <a:r>
-              <a:rPr lang="zh-CN" altLang="en-US" sz="1350"/>
-              <a:t>抛弃复杂的流水线，直接使用</a:t>
-            </a:r>
-            <a:r>
-              <a:rPr lang="zh-CN" altLang="en-US" sz="1350">
-                <a:solidFill>
-                  <a:srgbClr val="FF0000"/>
-                </a:solidFill>
-              </a:rPr>
-              <a:t>端到端的实例分割</a:t>
-            </a:r>
-            <a:r>
-              <a:rPr lang="zh-CN" altLang="en-US" sz="1350"/>
-              <a:t>来处理。</a:t>
-            </a:r>
-            <a:endParaRPr lang="zh-CN" altLang="en-US" sz="1350"/>
-          </a:p>
-        </p:txBody>
-      </p:sp>
-      <p:pic>
-        <p:nvPicPr>
-          <p:cNvPr id="4" name="图片 3"/>
-          <p:cNvPicPr>
-            <a:picLocks noChangeAspect="1"/>
-          </p:cNvPicPr>
-          <p:nvPr/>
-        </p:nvPicPr>
-        <p:blipFill>
-          <a:blip r:embed="rId3"/>
-          <a:stretch>
-            <a:fillRect/>
-          </a:stretch>
-        </p:blipFill>
-        <p:spPr>
-          <a:xfrm>
-            <a:off x="4924425" y="346075"/>
-            <a:ext cx="6652895" cy="3245485"/>
-          </a:xfrm>
-          <a:prstGeom prst="rect">
-            <a:avLst/>
-          </a:prstGeom>
-        </p:spPr>
-      </p:pic>
-    </p:spTree>
-  </p:cSld>
-  <p:clrMapOvr>
-    <a:masterClrMapping/>
-  </p:clrMapOvr>
-</p:sld>
-</file>
-
-<file path=ppt/slides/slide4.xml><?xml version="1.0" encoding="utf-8"?>
-<p:sld xmlns:a="http://schemas.openxmlformats.org/drawingml/2006/main" xmlns:r="http://schemas.openxmlformats.org/officeDocument/2006/relationships" xmlns:p="http://schemas.openxmlformats.org/presentationml/2006/main">
-  <p:cSld>
-    <p:spTree>
-      <p:nvGrpSpPr>
-        <p:cNvPr id="1" name=""/>
-        <p:cNvGrpSpPr/>
-        <p:nvPr/>
-      </p:nvGrpSpPr>
-      <p:grpSpPr/>
-      <p:sp>
-        <p:nvSpPr>
-          <p:cNvPr id="2" name="标题 1"/>
-          <p:cNvSpPr>
-            <a:spLocks noGrp="1"/>
-          </p:cNvSpPr>
-          <p:nvPr>
-            <p:ph type="title"/>
-            <p:custDataLst>
-              <p:tags r:id="rId1"/>
-            </p:custDataLst>
-          </p:nvPr>
-        </p:nvSpPr>
-        <p:spPr/>
-        <p:txBody>
-          <a:bodyPr/>
-          <a:p>
-            <a:r>
-              <a:rPr lang="en-US" altLang="zh-CN"/>
-              <a:t>framework</a:t>
-            </a:r>
-            <a:endParaRPr lang="en-US" altLang="zh-CN"/>
-          </a:p>
-        </p:txBody>
-      </p:sp>
-      <p:sp>
-        <p:nvSpPr>
-          <p:cNvPr id="3" name="内容占位符 2"/>
-          <p:cNvSpPr>
-            <a:spLocks noGrp="1"/>
-          </p:cNvSpPr>
-          <p:nvPr>
-            <p:ph idx="1"/>
-            <p:custDataLst>
-              <p:tags r:id="rId2"/>
-            </p:custDataLst>
-          </p:nvPr>
-        </p:nvSpPr>
-        <p:spPr/>
-        <p:txBody>
-          <a:bodyPr/>
-          <a:p>
-            <a:r>
-              <a:rPr lang="zh-CN" altLang="en-US" sz="1200"/>
-              <a:t>模型选型：</a:t>
-            </a:r>
-            <a:r>
-              <a:rPr lang="en-US" altLang="zh-CN" sz="1200"/>
-              <a:t> </a:t>
-            </a:r>
-            <a:r>
-              <a:rPr lang="zh-CN" altLang="en-US" sz="1200"/>
-              <a:t>基于改进的</a:t>
-            </a:r>
-            <a:r>
-              <a:rPr lang="en-US" altLang="zh-CN" sz="1200"/>
-              <a:t> Mask2Former</a:t>
-            </a:r>
-            <a:endParaRPr lang="en-US" altLang="zh-CN" sz="1200"/>
-          </a:p>
-          <a:p>
-            <a:endParaRPr lang="en-US" altLang="zh-CN" sz="1200"/>
-          </a:p>
-          <a:p>
-            <a:r>
-              <a:rPr lang="zh-CN" altLang="en-US" sz="1200"/>
-              <a:t>三大核心组件：</a:t>
-            </a:r>
-            <a:endParaRPr lang="zh-CN" altLang="en-US" sz="1200"/>
-          </a:p>
-          <a:p>
-            <a:pPr lvl="1"/>
-            <a:r>
-              <a:rPr lang="en-US" altLang="zh-CN" sz="1000">
-                <a:solidFill>
-                  <a:srgbClr val="FF0000"/>
-                </a:solidFill>
-              </a:rPr>
-              <a:t>Pixel-level Module: </a:t>
-            </a:r>
-            <a:r>
-              <a:rPr lang="zh-CN" altLang="en-US" sz="1000">
-                <a:solidFill>
-                  <a:srgbClr val="FF0000"/>
-                </a:solidFill>
-              </a:rPr>
-              <a:t>提取高清特征图</a:t>
-            </a:r>
-            <a:endParaRPr lang="zh-CN" altLang="en-US" sz="1000">
-              <a:solidFill>
-                <a:srgbClr val="FF0000"/>
-              </a:solidFill>
-            </a:endParaRPr>
-          </a:p>
-          <a:p>
-            <a:pPr lvl="1"/>
-            <a:r>
-              <a:rPr lang="en-US" altLang="zh-CN" sz="1000"/>
-              <a:t>Transformer Decoder: </a:t>
-            </a:r>
-            <a:r>
-              <a:rPr lang="zh-CN" altLang="en-US" sz="1000"/>
-              <a:t>使用</a:t>
-            </a:r>
-            <a:r>
-              <a:rPr lang="en-US" altLang="zh-CN" sz="1000"/>
-              <a:t>N</a:t>
-            </a:r>
-            <a:r>
-              <a:rPr lang="zh-CN" altLang="en-US" sz="1000"/>
-              <a:t>个可学习的</a:t>
-            </a:r>
-            <a:r>
-              <a:rPr lang="en-US" altLang="zh-CN" sz="1000"/>
-              <a:t>Query</a:t>
-            </a:r>
-            <a:endParaRPr lang="en-US" altLang="zh-CN" sz="1000"/>
-          </a:p>
-          <a:p>
-            <a:pPr marL="2286000" lvl="5" indent="0">
-              <a:buNone/>
-            </a:pPr>
-            <a:r>
-              <a:rPr lang="en-US" altLang="zh-CN" sz="1000" spc="150">
-                <a:solidFill>
-                  <a:schemeClr val="tx1">
-                    <a:lumMod val="65000"/>
-                    <a:lumOff val="35000"/>
-                  </a:schemeClr>
-                </a:solidFill>
-                <a:uFillTx/>
-              </a:rPr>
-              <a:t>  </a:t>
-            </a:r>
-            <a:r>
-              <a:rPr lang="zh-CN" altLang="en-US" sz="1000" spc="150">
-                <a:solidFill>
-                  <a:schemeClr val="tx1">
-                    <a:lumMod val="65000"/>
-                    <a:lumOff val="35000"/>
-                  </a:schemeClr>
-                </a:solidFill>
-                <a:uFillTx/>
-              </a:rPr>
-              <a:t>来代表不同的曲线实例</a:t>
-            </a:r>
-            <a:endParaRPr lang="zh-CN" altLang="en-US" sz="1000" spc="150">
-              <a:solidFill>
-                <a:schemeClr val="tx1">
-                  <a:lumMod val="65000"/>
-                  <a:lumOff val="35000"/>
-                </a:schemeClr>
-              </a:solidFill>
-              <a:uFillTx/>
-            </a:endParaRPr>
-          </a:p>
-          <a:p>
-            <a:pPr marL="2286000" lvl="5" indent="0">
-              <a:buNone/>
-            </a:pPr>
-            <a:endParaRPr lang="zh-CN" altLang="en-US" sz="1000" spc="150">
-              <a:solidFill>
-                <a:schemeClr val="tx1">
-                  <a:lumMod val="65000"/>
-                  <a:lumOff val="35000"/>
-                </a:schemeClr>
-              </a:solidFill>
-              <a:uFillTx/>
-            </a:endParaRPr>
-          </a:p>
-          <a:p>
-            <a:pPr lvl="1"/>
-            <a:r>
-              <a:rPr lang="en-US" altLang="zh-CN" sz="1000"/>
-              <a:t>Segmentation Module: </a:t>
-            </a:r>
-            <a:r>
-              <a:rPr lang="zh-CN" altLang="en-US" sz="1000"/>
-              <a:t>预测每条线的</a:t>
-            </a:r>
-            <a:r>
-              <a:rPr lang="en-US" altLang="zh-CN" sz="1000"/>
-              <a:t>Mask</a:t>
-            </a:r>
-            <a:endParaRPr lang="en-US" altLang="zh-CN" sz="1000"/>
-          </a:p>
-          <a:p>
-            <a:pPr lvl="1"/>
-            <a:endParaRPr lang="zh-CN" altLang="en-US" sz="1000"/>
-          </a:p>
-          <a:p>
-            <a:r>
-              <a:rPr lang="zh-CN" altLang="en-US" sz="1200"/>
-              <a:t>输出目标：每个</a:t>
-            </a:r>
-            <a:r>
-              <a:rPr lang="en-US" altLang="zh-CN" sz="1200"/>
-              <a:t>Query</a:t>
-            </a:r>
-            <a:r>
-              <a:rPr lang="zh-CN" altLang="en-US" sz="1200"/>
-              <a:t>输出两个结果：</a:t>
-            </a:r>
-            <a:endParaRPr lang="zh-CN" altLang="en-US" sz="1200"/>
-          </a:p>
-          <a:p>
-            <a:pPr lvl="1"/>
-            <a:r>
-              <a:rPr lang="zh-CN" altLang="en-US" sz="1000"/>
-              <a:t>分类：</a:t>
-            </a:r>
-            <a:r>
-              <a:rPr lang="en-US" altLang="zh-CN" sz="1000"/>
-              <a:t> </a:t>
-            </a:r>
-            <a:r>
-              <a:rPr lang="zh-CN" altLang="en-US" sz="1000"/>
-              <a:t>确定该</a:t>
-            </a:r>
-            <a:r>
-              <a:rPr lang="en-US" altLang="zh-CN" sz="1000"/>
-              <a:t> Query </a:t>
-            </a:r>
-            <a:r>
-              <a:rPr lang="zh-CN" altLang="en-US" sz="1000"/>
-              <a:t>捕捉的是</a:t>
-            </a:r>
-            <a:r>
-              <a:rPr lang="en-US" altLang="zh-CN" sz="1000"/>
-              <a:t>“</a:t>
-            </a:r>
-            <a:r>
-              <a:rPr lang="zh-CN" altLang="en-US" sz="1000"/>
-              <a:t>线</a:t>
-            </a:r>
-            <a:r>
-              <a:rPr lang="en-US" altLang="zh-CN" sz="1000"/>
-              <a:t>”</a:t>
-            </a:r>
-            <a:r>
-              <a:rPr lang="zh-CN" altLang="en-US" sz="1000"/>
-              <a:t>还是</a:t>
-            </a:r>
-            <a:r>
-              <a:rPr lang="en-US" altLang="zh-CN" sz="1000"/>
-              <a:t>“</a:t>
-            </a:r>
-            <a:r>
-              <a:rPr lang="zh-CN" altLang="en-US" sz="1000"/>
-              <a:t>背景</a:t>
-            </a:r>
-            <a:r>
-              <a:rPr lang="en-US" altLang="zh-CN" sz="1000"/>
-              <a:t>”</a:t>
-            </a:r>
-            <a:endParaRPr lang="zh-CN" altLang="en-US" sz="1000"/>
-          </a:p>
-          <a:p>
-            <a:pPr lvl="1"/>
-            <a:r>
-              <a:rPr lang="en-US" altLang="zh-CN" sz="1000"/>
-              <a:t>Mask</a:t>
-            </a:r>
-            <a:r>
-              <a:rPr lang="zh-CN" altLang="en-US" sz="1000"/>
-              <a:t>：</a:t>
-            </a:r>
-            <a:r>
-              <a:rPr lang="en-US" altLang="zh-CN" sz="1000"/>
-              <a:t> </a:t>
-            </a:r>
-            <a:r>
-              <a:rPr lang="zh-CN" altLang="en-US" sz="1000"/>
-              <a:t>对应曲线的像素级掩码</a:t>
-            </a:r>
-            <a:endParaRPr lang="zh-CN" altLang="en-US" sz="1000"/>
-          </a:p>
-        </p:txBody>
-      </p:sp>
-      <p:pic>
-        <p:nvPicPr>
-          <p:cNvPr id="4" name="图片 3"/>
-          <p:cNvPicPr>
-            <a:picLocks noChangeAspect="1"/>
-          </p:cNvPicPr>
-          <p:nvPr/>
-        </p:nvPicPr>
-        <p:blipFill>
-          <a:blip r:embed="rId3"/>
-          <a:srcRect l="2756" r="8352"/>
-          <a:stretch>
-            <a:fillRect/>
-          </a:stretch>
-        </p:blipFill>
-        <p:spPr>
-          <a:xfrm>
-            <a:off x="4733925" y="979170"/>
-            <a:ext cx="7412355" cy="4853940"/>
-          </a:xfrm>
-          <a:prstGeom prst="rect">
-            <a:avLst/>
-          </a:prstGeom>
-        </p:spPr>
-      </p:pic>
-    </p:spTree>
-  </p:cSld>
-  <p:clrMapOvr>
-    <a:masterClrMapping/>
-  </p:clrMapOvr>
-</p:sld>
-</file>
-
-<file path=ppt/slides/slide5.xml><?xml version="1.0" encoding="utf-8"?>
-<p:sld xmlns:a="http://schemas.openxmlformats.org/drawingml/2006/main" xmlns:r="http://schemas.openxmlformats.org/officeDocument/2006/relationships" xmlns:p="http://schemas.openxmlformats.org/presentationml/2006/main">
-  <p:cSld>
-    <p:spTree>
-      <p:nvGrpSpPr>
-        <p:cNvPr id="1" name=""/>
-        <p:cNvGrpSpPr/>
-        <p:nvPr/>
-      </p:nvGrpSpPr>
-      <p:grpSpPr/>
-      <p:sp>
-        <p:nvSpPr>
-          <p:cNvPr id="2" name="标题 1"/>
-          <p:cNvSpPr>
-            <a:spLocks noGrp="1"/>
-          </p:cNvSpPr>
-          <p:nvPr>
-            <p:ph type="title"/>
-            <p:custDataLst>
-              <p:tags r:id="rId1"/>
-            </p:custDataLst>
-          </p:nvPr>
-        </p:nvSpPr>
-        <p:spPr>
-          <a:xfrm>
-            <a:off x="608400" y="68650"/>
-            <a:ext cx="10969200" cy="705600"/>
-          </a:xfrm>
-        </p:spPr>
-        <p:txBody>
-          <a:bodyPr/>
-          <a:p>
-            <a:r>
-              <a:rPr lang="en-US" altLang="zh-CN"/>
-              <a:t>backbone</a:t>
-            </a:r>
-            <a:r>
-              <a:rPr lang="zh-CN" altLang="en-US"/>
-              <a:t>：</a:t>
-            </a:r>
-            <a:r>
-              <a:rPr lang="en-US" altLang="zh-CN"/>
-              <a:t>swin</a:t>
-            </a:r>
-            <a:endParaRPr lang="en-US" altLang="zh-CN"/>
-          </a:p>
-        </p:txBody>
-      </p:sp>
-      <p:sp>
-        <p:nvSpPr>
-          <p:cNvPr id="3" name="内容占位符 2"/>
-          <p:cNvSpPr>
-            <a:spLocks noGrp="1"/>
-          </p:cNvSpPr>
-          <p:nvPr>
-            <p:ph idx="1"/>
-            <p:custDataLst>
-              <p:tags r:id="rId2"/>
-            </p:custDataLst>
-          </p:nvPr>
-        </p:nvSpPr>
-        <p:spPr>
-          <a:xfrm>
-            <a:off x="608330" y="4596130"/>
-            <a:ext cx="10968990" cy="1920875"/>
-          </a:xfrm>
-        </p:spPr>
-        <p:txBody>
-          <a:bodyPr>
-            <a:noAutofit/>
-          </a:bodyPr>
-          <a:p>
-            <a:r>
-              <a:rPr lang="zh-CN" altLang="en-US" sz="1000"/>
-              <a:t>将图片输入到</a:t>
-            </a:r>
-            <a:r>
-              <a:rPr lang="en-US" altLang="zh-CN" sz="1000"/>
-              <a:t>Patch Partition</a:t>
-            </a:r>
-            <a:r>
-              <a:rPr lang="zh-CN" altLang="en-US" sz="1000"/>
-              <a:t>模块中进行分块，即每</a:t>
-            </a:r>
-            <a:r>
-              <a:rPr lang="en-US" altLang="zh-CN" sz="1000"/>
-              <a:t>4x4</a:t>
-            </a:r>
-            <a:r>
-              <a:rPr lang="zh-CN" altLang="en-US" sz="1000"/>
-              <a:t>相邻的像素为一个</a:t>
-            </a:r>
-            <a:r>
-              <a:rPr lang="en-US" altLang="zh-CN" sz="1000"/>
-              <a:t>Patch</a:t>
-            </a:r>
-            <a:r>
-              <a:rPr lang="zh-CN" altLang="en-US" sz="1000"/>
-              <a:t>，然后在</a:t>
-            </a:r>
-            <a:r>
-              <a:rPr lang="en-US" altLang="zh-CN" sz="1000"/>
-              <a:t>channel</a:t>
-            </a:r>
-            <a:r>
-              <a:rPr lang="zh-CN" altLang="en-US" sz="1000"/>
-              <a:t>方向展平（</a:t>
-            </a:r>
-            <a:r>
-              <a:rPr lang="en-US" altLang="zh-CN" sz="1000"/>
-              <a:t>flatten</a:t>
-            </a:r>
-            <a:r>
-              <a:rPr lang="zh-CN" altLang="en-US" sz="1000"/>
-              <a:t>）。</a:t>
-            </a:r>
-            <a:endParaRPr lang="zh-CN" altLang="en-US" sz="1000"/>
-          </a:p>
-          <a:p>
-            <a:pPr lvl="1"/>
-            <a:r>
-              <a:rPr lang="zh-CN" altLang="en-US" sz="910">
-                <a:solidFill>
-                  <a:srgbClr val="FF0000"/>
-                </a:solidFill>
-              </a:rPr>
-              <a:t>假设输入的是</a:t>
-            </a:r>
-            <a:r>
-              <a:rPr lang="en-US" altLang="zh-CN" sz="910">
-                <a:solidFill>
-                  <a:srgbClr val="FF0000"/>
-                </a:solidFill>
-              </a:rPr>
-              <a:t>RGB</a:t>
-            </a:r>
-            <a:r>
-              <a:rPr lang="zh-CN" altLang="en-US" sz="910">
-                <a:solidFill>
-                  <a:srgbClr val="FF0000"/>
-                </a:solidFill>
-              </a:rPr>
-              <a:t>三通道图片</a:t>
-            </a:r>
-            <a:r>
-              <a:rPr lang="en-US" altLang="zh-CN" sz="910">
-                <a:solidFill>
-                  <a:srgbClr val="FF0000"/>
-                </a:solidFill>
-              </a:rPr>
-              <a:t>[512, 512, 3]</a:t>
-            </a:r>
-            <a:r>
-              <a:rPr lang="zh-CN" altLang="en-US" sz="910">
-                <a:solidFill>
-                  <a:srgbClr val="FF0000"/>
-                </a:solidFill>
-              </a:rPr>
-              <a:t>，那么每个</a:t>
-            </a:r>
-            <a:r>
-              <a:rPr lang="en-US" altLang="zh-CN" sz="910">
-                <a:solidFill>
-                  <a:srgbClr val="FF0000"/>
-                </a:solidFill>
-              </a:rPr>
-              <a:t>patch</a:t>
-            </a:r>
-            <a:r>
-              <a:rPr lang="zh-CN" altLang="en-US" sz="910">
-                <a:solidFill>
-                  <a:srgbClr val="FF0000"/>
-                </a:solidFill>
-              </a:rPr>
-              <a:t>就有</a:t>
-            </a:r>
-            <a:r>
-              <a:rPr lang="en-US" altLang="zh-CN" sz="910">
-                <a:solidFill>
-                  <a:srgbClr val="FF0000"/>
-                </a:solidFill>
-              </a:rPr>
-              <a:t>4x4=16</a:t>
-            </a:r>
-            <a:r>
-              <a:rPr lang="zh-CN" altLang="en-US" sz="910">
-                <a:solidFill>
-                  <a:srgbClr val="FF0000"/>
-                </a:solidFill>
-              </a:rPr>
-              <a:t>个像素，然后每个像素有</a:t>
-            </a:r>
-            <a:r>
-              <a:rPr lang="en-US" altLang="zh-CN" sz="910">
-                <a:solidFill>
-                  <a:srgbClr val="FF0000"/>
-                </a:solidFill>
-              </a:rPr>
-              <a:t>R</a:t>
-            </a:r>
-            <a:r>
-              <a:rPr lang="zh-CN" altLang="en-US" sz="910">
-                <a:solidFill>
-                  <a:srgbClr val="FF0000"/>
-                </a:solidFill>
-              </a:rPr>
-              <a:t>、</a:t>
-            </a:r>
-            <a:r>
-              <a:rPr lang="en-US" altLang="zh-CN" sz="910">
-                <a:solidFill>
-                  <a:srgbClr val="FF0000"/>
-                </a:solidFill>
-              </a:rPr>
-              <a:t>G</a:t>
-            </a:r>
-            <a:r>
-              <a:rPr lang="zh-CN" altLang="en-US" sz="910">
-                <a:solidFill>
-                  <a:srgbClr val="FF0000"/>
-                </a:solidFill>
-              </a:rPr>
-              <a:t>、</a:t>
-            </a:r>
-            <a:r>
-              <a:rPr lang="en-US" altLang="zh-CN" sz="910">
-                <a:solidFill>
-                  <a:srgbClr val="FF0000"/>
-                </a:solidFill>
-              </a:rPr>
-              <a:t>B</a:t>
-            </a:r>
-            <a:r>
-              <a:rPr lang="zh-CN" altLang="en-US" sz="910">
-                <a:solidFill>
-                  <a:srgbClr val="FF0000"/>
-                </a:solidFill>
-              </a:rPr>
-              <a:t>三个值所以展平后是</a:t>
-            </a:r>
-            <a:r>
-              <a:rPr lang="en-US" altLang="zh-CN" sz="910">
-                <a:solidFill>
-                  <a:srgbClr val="FF0000"/>
-                </a:solidFill>
-              </a:rPr>
-              <a:t>16x3=48</a:t>
-            </a:r>
-            <a:r>
-              <a:rPr lang="zh-CN" altLang="en-US" sz="910">
-                <a:solidFill>
-                  <a:srgbClr val="FF0000"/>
-                </a:solidFill>
-              </a:rPr>
-              <a:t>，所以通过</a:t>
-            </a:r>
-            <a:r>
-              <a:rPr lang="en-US" altLang="zh-CN" sz="910">
-                <a:solidFill>
-                  <a:srgbClr val="FF0000"/>
-                </a:solidFill>
-              </a:rPr>
-              <a:t>Patch Partition</a:t>
-            </a:r>
-            <a:r>
-              <a:rPr lang="zh-CN" altLang="en-US" sz="910">
-                <a:solidFill>
-                  <a:srgbClr val="FF0000"/>
-                </a:solidFill>
-              </a:rPr>
-              <a:t>后图像</a:t>
-            </a:r>
-            <a:r>
-              <a:rPr lang="en-US" altLang="zh-CN" sz="910">
-                <a:solidFill>
-                  <a:srgbClr val="FF0000"/>
-                </a:solidFill>
-              </a:rPr>
-              <a:t>shape</a:t>
-            </a:r>
-            <a:r>
-              <a:rPr lang="zh-CN" altLang="en-US" sz="910">
-                <a:solidFill>
-                  <a:srgbClr val="FF0000"/>
-                </a:solidFill>
-              </a:rPr>
-              <a:t>由</a:t>
-            </a:r>
-            <a:r>
-              <a:rPr lang="en-US" altLang="zh-CN" sz="910">
-                <a:solidFill>
-                  <a:srgbClr val="FF0000"/>
-                </a:solidFill>
-              </a:rPr>
-              <a:t> [H, W, 3]</a:t>
-            </a:r>
-            <a:r>
-              <a:rPr lang="zh-CN" altLang="en-US" sz="910">
-                <a:solidFill>
-                  <a:srgbClr val="FF0000"/>
-                </a:solidFill>
-              </a:rPr>
-              <a:t>变成了</a:t>
-            </a:r>
-            <a:r>
-              <a:rPr lang="en-US" altLang="zh-CN" sz="910">
-                <a:solidFill>
-                  <a:srgbClr val="FF0000"/>
-                </a:solidFill>
-              </a:rPr>
-              <a:t> [H/4, W/4, 48]</a:t>
-            </a:r>
-            <a:r>
-              <a:rPr lang="zh-CN" altLang="en-US" sz="910">
-                <a:solidFill>
-                  <a:srgbClr val="FF0000"/>
-                </a:solidFill>
-              </a:rPr>
-              <a:t>。</a:t>
-            </a:r>
-            <a:endParaRPr lang="zh-CN" altLang="en-US" sz="910">
-              <a:solidFill>
-                <a:srgbClr val="FF0000"/>
-              </a:solidFill>
-            </a:endParaRPr>
-          </a:p>
-          <a:p>
-            <a:r>
-              <a:rPr lang="zh-CN" altLang="en-US" sz="1000"/>
-              <a:t>通过</a:t>
-            </a:r>
-            <a:r>
-              <a:rPr lang="en-US" altLang="zh-CN" sz="1000"/>
-              <a:t>Linear Embeding</a:t>
-            </a:r>
-            <a:r>
-              <a:rPr lang="zh-CN" altLang="en-US" sz="1000"/>
-              <a:t>层对每个像素的</a:t>
-            </a:r>
-            <a:r>
-              <a:rPr lang="en-US" altLang="zh-CN" sz="1000"/>
-              <a:t>channel</a:t>
-            </a:r>
-            <a:r>
-              <a:rPr lang="zh-CN" altLang="en-US" sz="1000"/>
-              <a:t>数据做线性变换，由</a:t>
-            </a:r>
-            <a:r>
-              <a:rPr lang="en-US" altLang="zh-CN" sz="1000"/>
-              <a:t>48</a:t>
-            </a:r>
-            <a:r>
-              <a:rPr lang="zh-CN" altLang="en-US" sz="1000"/>
-              <a:t>变成</a:t>
-            </a:r>
-            <a:r>
-              <a:rPr lang="en-US" altLang="zh-CN" sz="1000"/>
-              <a:t>C</a:t>
-            </a:r>
-            <a:r>
-              <a:rPr lang="zh-CN" altLang="en-US" sz="1000"/>
-              <a:t>（</a:t>
-            </a:r>
-            <a:r>
-              <a:rPr lang="en-US" altLang="zh-CN" sz="1000">
-                <a:solidFill>
-                  <a:srgbClr val="FF0000"/>
-                </a:solidFill>
-              </a:rPr>
-              <a:t>96</a:t>
-            </a:r>
-            <a:r>
-              <a:rPr lang="zh-CN" altLang="en-US" sz="1000"/>
-              <a:t>），即图像</a:t>
-            </a:r>
-            <a:r>
-              <a:rPr lang="en-US" altLang="zh-CN" sz="1000"/>
-              <a:t>shape</a:t>
-            </a:r>
-            <a:r>
-              <a:rPr lang="zh-CN" altLang="en-US" sz="1000"/>
-              <a:t>再由</a:t>
-            </a:r>
-            <a:r>
-              <a:rPr lang="en-US" altLang="zh-CN" sz="1000"/>
-              <a:t> [H/4, W/4, 48]</a:t>
-            </a:r>
-            <a:r>
-              <a:rPr lang="zh-CN" altLang="en-US" sz="1000"/>
-              <a:t>变成了</a:t>
-            </a:r>
-            <a:r>
-              <a:rPr lang="en-US" altLang="zh-CN" sz="1000"/>
-              <a:t> [H/4, W/4, C]</a:t>
-            </a:r>
-            <a:r>
-              <a:rPr lang="zh-CN" altLang="en-US" sz="1000"/>
-              <a:t>（</a:t>
-            </a:r>
-            <a:r>
-              <a:rPr lang="en-US" altLang="zh-CN" sz="1000">
-                <a:solidFill>
-                  <a:srgbClr val="FF0000"/>
-                </a:solidFill>
-              </a:rPr>
-              <a:t>[128, 128, 96]</a:t>
-            </a:r>
-            <a:r>
-              <a:rPr lang="zh-CN" altLang="en-US" sz="1000"/>
-              <a:t>）。</a:t>
-            </a:r>
-            <a:r>
-              <a:rPr lang="zh-CN" altLang="en-US" sz="1000">
-                <a:solidFill>
-                  <a:srgbClr val="FF0000"/>
-                </a:solidFill>
-              </a:rPr>
-              <a:t>在</a:t>
-            </a:r>
-            <a:r>
-              <a:rPr lang="en-US" altLang="zh-CN" sz="1000">
-                <a:solidFill>
-                  <a:srgbClr val="FF0000"/>
-                </a:solidFill>
-              </a:rPr>
-              <a:t>lineformer</a:t>
-            </a:r>
-            <a:r>
-              <a:rPr lang="zh-CN" altLang="en-US" sz="1000">
-                <a:solidFill>
-                  <a:srgbClr val="FF0000"/>
-                </a:solidFill>
-              </a:rPr>
-              <a:t>中</a:t>
-            </a:r>
-            <a:r>
-              <a:rPr lang="en-US" altLang="zh-CN" sz="1000">
-                <a:solidFill>
-                  <a:srgbClr val="FF0000"/>
-                </a:solidFill>
-              </a:rPr>
-              <a:t>Patch Partition</a:t>
-            </a:r>
-            <a:r>
-              <a:rPr lang="zh-CN" altLang="en-US" sz="1000">
-                <a:solidFill>
-                  <a:srgbClr val="FF0000"/>
-                </a:solidFill>
-              </a:rPr>
-              <a:t>和</a:t>
-            </a:r>
-            <a:r>
-              <a:rPr lang="en-US" altLang="zh-CN" sz="1000">
-                <a:solidFill>
-                  <a:srgbClr val="FF0000"/>
-                </a:solidFill>
-              </a:rPr>
-              <a:t>Linear Embeding</a:t>
-            </a:r>
-            <a:r>
-              <a:rPr lang="zh-CN" altLang="en-US" sz="1000">
-                <a:solidFill>
-                  <a:srgbClr val="FF0000"/>
-                </a:solidFill>
-              </a:rPr>
-              <a:t>直接通过一个卷积层实现的。</a:t>
-            </a:r>
-            <a:endParaRPr lang="en-US" altLang="zh-CN" sz="1000"/>
-          </a:p>
-          <a:p>
-            <a:r>
-              <a:rPr lang="zh-CN" altLang="en-US" sz="1000"/>
-              <a:t>通过四个</a:t>
-            </a:r>
-            <a:r>
-              <a:rPr lang="en-US" altLang="zh-CN" sz="1000"/>
-              <a:t>Stage</a:t>
-            </a:r>
-            <a:r>
-              <a:rPr lang="zh-CN" altLang="en-US" sz="1000"/>
-              <a:t>构建不同大小的特征图，除了</a:t>
-            </a:r>
-            <a:r>
-              <a:rPr lang="en-US" altLang="zh-CN" sz="1000"/>
-              <a:t>Stage1</a:t>
-            </a:r>
-            <a:r>
-              <a:rPr lang="zh-CN" altLang="en-US" sz="1000"/>
-              <a:t>中先通过一个</a:t>
-            </a:r>
-            <a:r>
-              <a:rPr lang="en-US" altLang="zh-CN" sz="1000"/>
-              <a:t>Linear Embeding</a:t>
-            </a:r>
-            <a:r>
-              <a:rPr lang="zh-CN" altLang="en-US" sz="1000"/>
-              <a:t>层外，剩下三个</a:t>
-            </a:r>
-            <a:r>
-              <a:rPr lang="en-US" altLang="zh-CN" sz="1000"/>
-              <a:t>stage</a:t>
-            </a:r>
-            <a:r>
-              <a:rPr lang="zh-CN" altLang="en-US" sz="1000"/>
-              <a:t>都是先通过一个</a:t>
-            </a:r>
-            <a:r>
-              <a:rPr lang="en-US" altLang="zh-CN" sz="1000"/>
-              <a:t>Patch Merging</a:t>
-            </a:r>
-            <a:r>
-              <a:rPr lang="zh-CN" altLang="en-US" sz="1000"/>
-              <a:t>层进行下采样，像</a:t>
-            </a:r>
-            <a:r>
-              <a:rPr lang="en-US" altLang="zh-CN" sz="1000"/>
-              <a:t>CNN</a:t>
-            </a:r>
-            <a:r>
-              <a:rPr lang="zh-CN" altLang="en-US" sz="1000"/>
-              <a:t>一样逐层扩大感受野，以便获取到全局的信息。为产生一个层次化表示</a:t>
-            </a:r>
-            <a:r>
-              <a:rPr lang="en-US" altLang="zh-CN" sz="1000"/>
-              <a:t> (Hierarchical Representation)</a:t>
-            </a:r>
-            <a:r>
-              <a:rPr lang="zh-CN" altLang="en-US" sz="1000"/>
-              <a:t>，随着网络的加深，</a:t>
-            </a:r>
-            <a:r>
-              <a:rPr lang="en-US" altLang="zh-CN" sz="1000"/>
-              <a:t>tokens</a:t>
-            </a:r>
-            <a:r>
-              <a:rPr lang="zh-CN" altLang="en-US" sz="1000"/>
-              <a:t>数逐渐通过</a:t>
-            </a:r>
-            <a:r>
-              <a:rPr lang="en-US" altLang="zh-CN" sz="1000"/>
-              <a:t>Patch Meraging</a:t>
-            </a:r>
-            <a:r>
-              <a:rPr lang="zh-CN" altLang="en-US" sz="1000"/>
-              <a:t>被减少，其维度扩大。每个</a:t>
-            </a:r>
-            <a:r>
-              <a:rPr lang="en-US" altLang="zh-CN" sz="1000"/>
-              <a:t>Stage</a:t>
-            </a:r>
-            <a:r>
-              <a:rPr lang="zh-CN" altLang="en-US" sz="1000"/>
-              <a:t>都会改变张量的维度，从而形成一种层次化的表征。</a:t>
-            </a:r>
-            <a:endParaRPr lang="zh-CN" altLang="en-US" sz="1000"/>
-          </a:p>
-        </p:txBody>
-      </p:sp>
-      <p:pic>
-        <p:nvPicPr>
-          <p:cNvPr id="4" name="图片 3"/>
-          <p:cNvPicPr/>
-          <p:nvPr/>
-        </p:nvPicPr>
-        <p:blipFill>
-          <a:blip r:embed="rId3"/>
-          <a:stretch>
-            <a:fillRect/>
-          </a:stretch>
-        </p:blipFill>
-        <p:spPr>
-          <a:xfrm>
-            <a:off x="-317" y="585470"/>
-            <a:ext cx="11820525" cy="3943350"/>
-          </a:xfrm>
-          <a:prstGeom prst="rect">
-            <a:avLst/>
-          </a:prstGeom>
-        </p:spPr>
-      </p:pic>
-    </p:spTree>
-  </p:cSld>
-  <p:clrMapOvr>
-    <a:masterClrMapping/>
-  </p:clrMapOvr>
-</p:sld>
-</file>
-
-<file path=ppt/slides/slide6.xml><?xml version="1.0" encoding="utf-8"?>
-<p:sld xmlns:a="http://schemas.openxmlformats.org/drawingml/2006/main" xmlns:r="http://schemas.openxmlformats.org/officeDocument/2006/relationships" xmlns:p="http://schemas.openxmlformats.org/presentationml/2006/main">
-  <p:cSld>
-    <p:spTree>
-      <p:nvGrpSpPr>
-        <p:cNvPr id="1" name=""/>
-        <p:cNvGrpSpPr/>
-        <p:nvPr/>
-      </p:nvGrpSpPr>
-      <p:grpSpPr/>
-      <p:sp>
-        <p:nvSpPr>
-          <p:cNvPr id="2" name="标题 1"/>
-          <p:cNvSpPr>
-            <a:spLocks noGrp="1"/>
-          </p:cNvSpPr>
-          <p:nvPr>
-            <p:ph type="title"/>
-            <p:custDataLst>
-              <p:tags r:id="rId1"/>
-            </p:custDataLst>
-          </p:nvPr>
-        </p:nvSpPr>
-        <p:spPr>
-          <a:xfrm>
-            <a:off x="608330" y="68580"/>
-            <a:ext cx="10968990" cy="864235"/>
-          </a:xfrm>
-        </p:spPr>
-        <p:txBody>
-          <a:bodyPr/>
-          <a:p>
-            <a:r>
-              <a:rPr lang="en-US" altLang="zh-CN"/>
-              <a:t>pixel decoder</a:t>
-            </a:r>
-            <a:endParaRPr lang="en-US" altLang="zh-CN"/>
-          </a:p>
-        </p:txBody>
-      </p:sp>
-      <p:sp>
-        <p:nvSpPr>
-          <p:cNvPr id="3" name="内容占位符 2"/>
-          <p:cNvSpPr>
-            <a:spLocks noGrp="1"/>
-          </p:cNvSpPr>
-          <p:nvPr>
-            <p:ph idx="1"/>
-            <p:custDataLst>
-              <p:tags r:id="rId2"/>
-            </p:custDataLst>
-          </p:nvPr>
-        </p:nvSpPr>
-        <p:spPr>
-          <a:xfrm>
-            <a:off x="437515" y="825500"/>
-            <a:ext cx="11389995" cy="5691505"/>
-          </a:xfrm>
-        </p:spPr>
-        <p:txBody>
-          <a:bodyPr>
-            <a:noAutofit/>
-          </a:bodyPr>
-          <a:p>
-            <a:r>
-              <a:rPr lang="en-US" altLang="zh-CN" sz="1200"/>
-              <a:t>Pixel Decoder </a:t>
-            </a:r>
-            <a:r>
-              <a:rPr lang="zh-CN" altLang="en-US" sz="1200"/>
-              <a:t>接收来自</a:t>
-            </a:r>
-            <a:r>
-              <a:rPr lang="en-US" altLang="zh-CN" sz="1200"/>
-              <a:t> Swin Transformer </a:t>
-            </a:r>
-            <a:r>
-              <a:rPr lang="zh-CN" altLang="en-US" sz="1200"/>
-              <a:t>不同阶段的输出（即</a:t>
-            </a:r>
-            <a:r>
-              <a:rPr lang="en-US" altLang="zh-CN" sz="1200"/>
-              <a:t>swin</a:t>
-            </a:r>
-            <a:r>
-              <a:rPr lang="zh-CN" altLang="en-US" sz="1200"/>
-              <a:t>输出的的</a:t>
-            </a:r>
-            <a:r>
-              <a:rPr lang="en-US" altLang="zh-CN" sz="1200"/>
-              <a:t> Stage1</a:t>
-            </a:r>
-            <a:r>
-              <a:rPr lang="zh-CN" altLang="en-US" sz="1200"/>
-              <a:t>到</a:t>
-            </a:r>
-            <a:r>
-              <a:rPr lang="en-US" altLang="zh-CN" sz="1200"/>
-              <a:t>Stage4</a:t>
-            </a:r>
-            <a:r>
-              <a:rPr lang="zh-CN" altLang="en-US" sz="1200"/>
-              <a:t>）。</a:t>
-            </a:r>
-            <a:endParaRPr lang="zh-CN" altLang="en-US" sz="1200"/>
-          </a:p>
-          <a:p>
-            <a:r>
-              <a:rPr lang="zh-CN" altLang="en-US" sz="1200"/>
-              <a:t>低层（</a:t>
-            </a:r>
-            <a:r>
-              <a:rPr lang="en-US" altLang="zh-CN" sz="1200"/>
-              <a:t>Stage 1/2</a:t>
-            </a:r>
-            <a:r>
-              <a:rPr lang="zh-CN" altLang="en-US" sz="1200"/>
-              <a:t>）：分辨率高（</a:t>
-            </a:r>
-            <a:r>
-              <a:rPr lang="en-US" altLang="zh-CN" sz="1200"/>
-              <a:t>H/4, W/4</a:t>
-            </a:r>
-            <a:r>
-              <a:rPr lang="zh-CN" altLang="en-US" sz="1200"/>
-              <a:t>），充满了边缘、纹理等物理细节，但它不知道哪条线属于哪个实例。</a:t>
-            </a:r>
-            <a:r>
-              <a:rPr lang="en-US" altLang="zh-CN" sz="1200">
-                <a:solidFill>
-                  <a:srgbClr val="FF0000"/>
-                </a:solidFill>
-                <a:sym typeface="+mn-ea"/>
-              </a:rPr>
-              <a:t>[128, 128, 96], [64,64,182]</a:t>
-            </a:r>
-            <a:endParaRPr lang="zh-CN" altLang="en-US" sz="1200"/>
-          </a:p>
-          <a:p>
-            <a:r>
-              <a:rPr lang="zh-CN" altLang="en-US" sz="1200"/>
-              <a:t>高层（</a:t>
-            </a:r>
-            <a:r>
-              <a:rPr lang="en-US" altLang="zh-CN" sz="1200"/>
-              <a:t>Stage 3/4</a:t>
-            </a:r>
-            <a:r>
-              <a:rPr lang="zh-CN" altLang="en-US" sz="1200"/>
-              <a:t>）：分辨率低（</a:t>
-            </a:r>
-            <a:r>
-              <a:rPr lang="en-US" altLang="zh-CN" sz="1200"/>
-              <a:t>H/32, W/32</a:t>
-            </a:r>
-            <a:r>
-              <a:rPr lang="zh-CN" altLang="en-US" sz="1200"/>
-              <a:t>），语义极强，知道图表的整体结构。</a:t>
-            </a:r>
-            <a:r>
-              <a:rPr lang="en-US" altLang="zh-CN" sz="1200">
-                <a:solidFill>
-                  <a:srgbClr val="FF0000"/>
-                </a:solidFill>
-                <a:sym typeface="+mn-ea"/>
-              </a:rPr>
-              <a:t>[32, 32, 384], [16,16,768]</a:t>
-            </a:r>
-            <a:endParaRPr lang="zh-CN" altLang="en-US" sz="1200"/>
-          </a:p>
-          <a:p>
-            <a:endParaRPr lang="zh-CN" altLang="en-US" sz="1200"/>
-          </a:p>
-          <a:p>
-            <a:r>
-              <a:rPr lang="en-US" altLang="zh-CN" sz="1200"/>
-              <a:t>A. </a:t>
-            </a:r>
-            <a:r>
-              <a:rPr lang="zh-CN" altLang="en-US" sz="1200"/>
-              <a:t>维度对齐</a:t>
-            </a:r>
-            <a:r>
-              <a:rPr lang="en-US" altLang="zh-CN" sz="1200"/>
-              <a:t> (Lateral Connections)</a:t>
-            </a:r>
-            <a:endParaRPr lang="en-US" altLang="zh-CN" sz="1200"/>
-          </a:p>
-          <a:p>
-            <a:pPr marL="0" indent="457200">
-              <a:buNone/>
-            </a:pPr>
-            <a:r>
-              <a:rPr lang="en-US" altLang="zh-CN" sz="1200"/>
-              <a:t>Swin</a:t>
-            </a:r>
-            <a:r>
-              <a:rPr lang="zh-CN" altLang="en-US" sz="1200"/>
-              <a:t>输出的各层通道数是不统一的。</a:t>
-            </a:r>
-            <a:r>
-              <a:rPr lang="en-US" altLang="zh-CN" sz="1200"/>
-              <a:t>Pixel Decoder</a:t>
-            </a:r>
-            <a:r>
-              <a:rPr lang="zh-CN" altLang="en-US" sz="1200"/>
-              <a:t>首先用</a:t>
-            </a:r>
-            <a:r>
-              <a:rPr lang="en-US" altLang="zh-CN" sz="1200"/>
-              <a:t> 1*1</a:t>
-            </a:r>
-            <a:r>
-              <a:rPr lang="zh-CN" altLang="en-US" sz="1200"/>
-              <a:t>卷积将所有层级的通道数统一（例如统一到</a:t>
-            </a:r>
-            <a:r>
-              <a:rPr lang="en-US" altLang="zh-CN" sz="1200"/>
-              <a:t> 256</a:t>
-            </a:r>
-            <a:r>
-              <a:rPr lang="zh-CN" altLang="en-US" sz="1200"/>
-              <a:t>）。这就像是把不同粗细的电线，通过转接头（卷积）变成统一规格。</a:t>
-            </a:r>
-            <a:endParaRPr lang="zh-CN" altLang="en-US" sz="1200"/>
-          </a:p>
-          <a:p>
-            <a:endParaRPr lang="zh-CN" altLang="en-US" sz="1200"/>
-          </a:p>
-          <a:p>
-            <a:r>
-              <a:rPr lang="en-US" altLang="zh-CN" sz="1200"/>
-              <a:t>B. </a:t>
-            </a:r>
-            <a:r>
-              <a:rPr lang="zh-CN" altLang="en-US" sz="1200"/>
-              <a:t>自上而下的上采样</a:t>
-            </a:r>
-            <a:r>
-              <a:rPr lang="en-US" altLang="zh-CN" sz="1200"/>
-              <a:t> (Top-down Refinement)</a:t>
-            </a:r>
-            <a:endParaRPr lang="en-US" altLang="zh-CN" sz="1200"/>
-          </a:p>
-          <a:p>
-            <a:pPr lvl="1"/>
-            <a:r>
-              <a:rPr lang="zh-CN" altLang="en-US" sz="990"/>
-              <a:t>这是得到</a:t>
-            </a:r>
-            <a:r>
-              <a:rPr lang="en-US" altLang="zh-CN" sz="990"/>
-              <a:t>“</a:t>
-            </a:r>
-            <a:r>
-              <a:rPr lang="zh-CN" altLang="en-US" sz="990"/>
-              <a:t>高清</a:t>
-            </a:r>
-            <a:r>
-              <a:rPr lang="en-US" altLang="zh-CN" sz="990"/>
-              <a:t>”</a:t>
-            </a:r>
-            <a:r>
-              <a:rPr lang="zh-CN" altLang="en-US" sz="990"/>
-              <a:t>特征的核心逻辑：</a:t>
-            </a:r>
-            <a:endParaRPr lang="zh-CN" altLang="en-US" sz="990"/>
-          </a:p>
-          <a:p>
-            <a:pPr lvl="1"/>
-            <a:r>
-              <a:rPr lang="zh-CN" altLang="en-US" sz="990"/>
-              <a:t>起始点：从最深、最模糊的特征图（</a:t>
-            </a:r>
-            <a:r>
-              <a:rPr lang="en-US" altLang="zh-CN" sz="990"/>
-              <a:t>1/32</a:t>
-            </a:r>
-            <a:r>
-              <a:rPr lang="zh-CN" altLang="en-US" sz="990"/>
-              <a:t>）开始</a:t>
-            </a:r>
-            <a:endParaRPr lang="zh-CN" altLang="en-US" sz="990"/>
-          </a:p>
-          <a:p>
-            <a:pPr lvl="1"/>
-            <a:r>
-              <a:rPr lang="zh-CN" altLang="en-US" sz="990"/>
-              <a:t>操作：对该层进行</a:t>
-            </a:r>
-            <a:r>
-              <a:rPr lang="en-US" altLang="zh-CN" sz="990"/>
-              <a:t>2</a:t>
-            </a:r>
-            <a:r>
-              <a:rPr lang="zh-CN" altLang="en-US" sz="990"/>
-              <a:t>倍上采样（通常使用双线性插值或转置卷积），使其分辨率对齐上一层（</a:t>
-            </a:r>
-            <a:r>
-              <a:rPr lang="en-US" altLang="zh-CN" sz="990"/>
-              <a:t>1/16</a:t>
-            </a:r>
-            <a:r>
-              <a:rPr lang="zh-CN" altLang="en-US" sz="990"/>
-              <a:t>）。</a:t>
-            </a:r>
-            <a:endParaRPr lang="zh-CN" altLang="en-US" sz="990"/>
-          </a:p>
-          <a:p>
-            <a:pPr lvl="1"/>
-            <a:r>
-              <a:rPr lang="zh-CN" altLang="en-US" sz="990"/>
-              <a:t>融合：</a:t>
-            </a:r>
-            <a:r>
-              <a:rPr lang="en-US" altLang="zh-CN" sz="990"/>
-              <a:t> </a:t>
-            </a:r>
-            <a:r>
-              <a:rPr lang="zh-CN" altLang="en-US" sz="990"/>
-              <a:t>将上采样后的特征与上一层经过侧边连接的特征进行</a:t>
-            </a:r>
-            <a:r>
-              <a:rPr lang="en-US" altLang="zh-CN" sz="990"/>
-              <a:t>Element-wise Sum</a:t>
-            </a:r>
-            <a:r>
-              <a:rPr lang="zh-CN" altLang="en-US" sz="990"/>
-              <a:t>（按元素相加）。</a:t>
-            </a:r>
-            <a:endParaRPr lang="zh-CN" altLang="en-US" sz="990"/>
-          </a:p>
-          <a:p>
-            <a:pPr lvl="1"/>
-            <a:r>
-              <a:rPr lang="zh-CN" altLang="en-US" sz="990"/>
-              <a:t>循环：</a:t>
-            </a:r>
-            <a:r>
-              <a:rPr lang="en-US" altLang="zh-CN" sz="990"/>
-              <a:t> </a:t>
-            </a:r>
-            <a:r>
-              <a:rPr lang="zh-CN" altLang="en-US" sz="990"/>
-              <a:t>这个过程一直持续到最底层的</a:t>
-            </a:r>
-            <a:r>
-              <a:rPr lang="en-US" altLang="zh-CN" sz="990"/>
-              <a:t> 1/4 </a:t>
-            </a:r>
-            <a:r>
-              <a:rPr lang="zh-CN" altLang="en-US" sz="990"/>
-              <a:t>分辨率。</a:t>
-            </a:r>
-            <a:endParaRPr lang="zh-CN" altLang="en-US" sz="990"/>
-          </a:p>
-          <a:p>
-            <a:pPr lvl="0"/>
-            <a:r>
-              <a:rPr lang="zh-CN" altLang="en-US" sz="1200"/>
-              <a:t>输出：</a:t>
-            </a:r>
-            <a:r>
-              <a:rPr lang="en-US" altLang="zh-CN" sz="1200">
-                <a:solidFill>
-                  <a:srgbClr val="FF0000"/>
-                </a:solidFill>
-              </a:rPr>
-              <a:t> [256, 128, 128]</a:t>
-            </a:r>
-            <a:endParaRPr lang="en-US" altLang="zh-CN" sz="1200"/>
-          </a:p>
-          <a:p>
-            <a:endParaRPr lang="zh-CN" altLang="en-US" sz="1200"/>
-          </a:p>
-          <a:p>
-            <a:r>
-              <a:rPr lang="en-US" altLang="zh-CN" sz="1200"/>
-              <a:t>C. </a:t>
-            </a:r>
-            <a:r>
-              <a:rPr lang="zh-CN" altLang="en-US" sz="1200"/>
-              <a:t>特征平滑</a:t>
-            </a:r>
-            <a:r>
-              <a:rPr lang="en-US" altLang="zh-CN" sz="1200"/>
-              <a:t> (Post-convolution)</a:t>
-            </a:r>
-            <a:r>
-              <a:rPr lang="zh-CN" altLang="en-US" sz="1200"/>
-              <a:t>在每一层融合后，通常会跟一个</a:t>
-            </a:r>
-            <a:r>
-              <a:rPr lang="en-US" altLang="zh-CN" sz="1200"/>
-              <a:t> 3*3 </a:t>
-            </a:r>
-            <a:r>
-              <a:rPr lang="zh-CN" altLang="en-US" sz="1200"/>
-              <a:t>的卷积。</a:t>
-            </a:r>
-            <a:endParaRPr lang="zh-CN" altLang="en-US" sz="1200"/>
-          </a:p>
-          <a:p>
-            <a:r>
-              <a:rPr lang="zh-CN" altLang="en-US" sz="1200"/>
-              <a:t>作用：</a:t>
-            </a:r>
-            <a:r>
-              <a:rPr lang="en-US" altLang="zh-CN" sz="1200"/>
-              <a:t> </a:t>
-            </a:r>
-            <a:r>
-              <a:rPr lang="zh-CN" altLang="en-US" sz="1200"/>
-              <a:t>消除上采样产生的</a:t>
-            </a:r>
-            <a:r>
-              <a:rPr lang="en-US" altLang="zh-CN" sz="1200"/>
-              <a:t>“</a:t>
-            </a:r>
-            <a:r>
-              <a:rPr lang="zh-CN" altLang="en-US" sz="1200"/>
-              <a:t>棋盘效应</a:t>
-            </a:r>
-            <a:r>
-              <a:rPr lang="en-US" altLang="zh-CN" sz="1200"/>
-              <a:t>”</a:t>
-            </a:r>
-            <a:r>
-              <a:rPr lang="zh-CN" altLang="en-US" sz="1200"/>
-              <a:t>或对齐误差，让线条的特征在空间上更加平滑、连续。</a:t>
-            </a:r>
-            <a:endParaRPr lang="zh-CN" altLang="en-US" sz="1200"/>
-          </a:p>
-        </p:txBody>
-      </p:sp>
-      <p:pic>
-        <p:nvPicPr>
-          <p:cNvPr id="5" name="图片 4"/>
-          <p:cNvPicPr>
-            <a:picLocks noChangeAspect="1"/>
-          </p:cNvPicPr>
-          <p:nvPr/>
-        </p:nvPicPr>
-        <p:blipFill>
-          <a:blip r:embed="rId3"/>
-          <a:srcRect l="30262" t="1029" r="30761" b="53294"/>
-          <a:stretch>
-            <a:fillRect/>
-          </a:stretch>
-        </p:blipFill>
-        <p:spPr>
-          <a:xfrm>
-            <a:off x="7718425" y="3662045"/>
-            <a:ext cx="4109085" cy="2802890"/>
-          </a:xfrm>
-          <a:prstGeom prst="rect">
-            <a:avLst/>
-          </a:prstGeom>
-        </p:spPr>
-      </p:pic>
-    </p:spTree>
-  </p:cSld>
-  <p:clrMapOvr>
-    <a:masterClrMapping/>
-  </p:clrMapOvr>
-</p:sld>
-</file>
-
-<file path=ppt/slides/slide7.xml><?xml version="1.0" encoding="utf-8"?>
-<p:sld xmlns:a="http://schemas.openxmlformats.org/drawingml/2006/main" xmlns:r="http://schemas.openxmlformats.org/officeDocument/2006/relationships" xmlns:p="http://schemas.openxmlformats.org/presentationml/2006/main">
-  <p:cSld>
-    <p:spTree>
-      <p:nvGrpSpPr>
-        <p:cNvPr id="1" name=""/>
-        <p:cNvGrpSpPr/>
-        <p:nvPr/>
-      </p:nvGrpSpPr>
-      <p:grpSpPr/>
-      <p:sp>
-        <p:nvSpPr>
-          <p:cNvPr id="2" name="标题 1"/>
-          <p:cNvSpPr>
-            <a:spLocks noGrp="1"/>
-          </p:cNvSpPr>
-          <p:nvPr>
-            <p:ph type="title"/>
-            <p:custDataLst>
-              <p:tags r:id="rId1"/>
-            </p:custDataLst>
-          </p:nvPr>
-        </p:nvSpPr>
-        <p:spPr>
-          <a:xfrm>
-            <a:off x="608330" y="68580"/>
-            <a:ext cx="10968990" cy="864235"/>
-          </a:xfrm>
-        </p:spPr>
-        <p:txBody>
-          <a:bodyPr/>
-          <a:p>
-            <a:r>
-              <a:rPr lang="en-US" altLang="zh-CN"/>
-              <a:t>transformer decoder</a:t>
-            </a:r>
-            <a:endParaRPr lang="en-US" altLang="zh-CN"/>
-          </a:p>
-        </p:txBody>
-      </p:sp>
-      <p:sp>
-        <p:nvSpPr>
-          <p:cNvPr id="3" name="内容占位符 2"/>
-          <p:cNvSpPr>
-            <a:spLocks noGrp="1"/>
-          </p:cNvSpPr>
-          <p:nvPr>
-            <p:ph idx="1"/>
-            <p:custDataLst>
-              <p:tags r:id="rId2"/>
-            </p:custDataLst>
-          </p:nvPr>
-        </p:nvSpPr>
-        <p:spPr>
-          <a:xfrm>
-            <a:off x="608330" y="932815"/>
-            <a:ext cx="10968990" cy="5584190"/>
-          </a:xfrm>
-        </p:spPr>
-        <p:txBody>
-          <a:bodyPr>
-            <a:noAutofit/>
-          </a:bodyPr>
-          <a:p>
-            <a:r>
-              <a:rPr lang="en-US" altLang="zh-CN" sz="1200"/>
-              <a:t>1. </a:t>
-            </a:r>
-            <a:r>
-              <a:rPr lang="zh-CN" altLang="en-US" sz="1200"/>
-              <a:t>输入：</a:t>
-            </a:r>
-            <a:endParaRPr lang="zh-CN" altLang="en-US" sz="1200"/>
-          </a:p>
-          <a:p>
-            <a:pPr lvl="1"/>
-            <a:r>
-              <a:rPr lang="zh-CN" altLang="en-US" sz="1000"/>
-              <a:t>特征（</a:t>
-            </a:r>
-            <a:r>
-              <a:rPr lang="en-US" altLang="zh-CN" sz="1000"/>
-              <a:t>Memory</a:t>
-            </a:r>
-            <a:r>
-              <a:rPr lang="zh-CN" altLang="en-US" sz="1000"/>
-              <a:t>）：来自</a:t>
-            </a:r>
-            <a:r>
-              <a:rPr lang="en-US" altLang="zh-CN" sz="1000"/>
-              <a:t>Pixel Decoder</a:t>
-            </a:r>
-            <a:r>
-              <a:rPr lang="zh-CN" altLang="en-US" sz="1000"/>
-              <a:t>的多尺度输出。</a:t>
-            </a:r>
-            <a:endParaRPr lang="zh-CN" altLang="en-US" sz="1000"/>
-          </a:p>
-          <a:p>
-            <a:pPr lvl="1"/>
-            <a:r>
-              <a:rPr lang="zh-CN" altLang="en-US" sz="1000">
-                <a:solidFill>
-                  <a:srgbClr val="FF0000"/>
-                </a:solidFill>
-              </a:rPr>
-              <a:t>注意：</a:t>
-            </a:r>
-            <a:r>
-              <a:rPr lang="en-US" altLang="zh-CN" sz="1000">
-                <a:solidFill>
-                  <a:srgbClr val="FF0000"/>
-                </a:solidFill>
-              </a:rPr>
-              <a:t>Decoder</a:t>
-            </a:r>
-            <a:r>
-              <a:rPr lang="zh-CN" altLang="en-US" sz="1000">
-                <a:solidFill>
-                  <a:srgbClr val="FF0000"/>
-                </a:solidFill>
-              </a:rPr>
-              <a:t>为了思考得快，通常不直接用</a:t>
-            </a:r>
-            <a:r>
-              <a:rPr lang="en-US" altLang="zh-CN" sz="1000">
-                <a:solidFill>
-                  <a:srgbClr val="FF0000"/>
-                </a:solidFill>
-              </a:rPr>
-              <a:t>128</a:t>
-            </a:r>
-            <a:r>
-              <a:rPr lang="zh-CN" altLang="en-US" sz="1000">
-                <a:solidFill>
-                  <a:srgbClr val="FF0000"/>
-                </a:solidFill>
-              </a:rPr>
-              <a:t>的图，而是用更小的图来定位。</a:t>
-            </a:r>
-            <a:endParaRPr lang="zh-CN" altLang="en-US" sz="1000">
-              <a:solidFill>
-                <a:srgbClr val="FF0000"/>
-              </a:solidFill>
-            </a:endParaRPr>
-          </a:p>
-          <a:p>
-            <a:pPr lvl="1"/>
-            <a:r>
-              <a:rPr lang="zh-CN" altLang="en-US" sz="1000"/>
-              <a:t>查询向量（</a:t>
-            </a:r>
-            <a:r>
-              <a:rPr lang="en-US" altLang="zh-CN" sz="1000"/>
-              <a:t>Object Queries</a:t>
-            </a:r>
-            <a:r>
-              <a:rPr lang="zh-CN" altLang="en-US" sz="1000"/>
-              <a:t>）：</a:t>
-            </a:r>
-            <a:r>
-              <a:rPr lang="en-US" altLang="zh-CN" sz="1000"/>
-              <a:t>N</a:t>
-            </a:r>
-            <a:r>
-              <a:rPr lang="zh-CN" altLang="en-US" sz="1000"/>
-              <a:t>个（</a:t>
-            </a:r>
-            <a:r>
-              <a:rPr lang="en-US" altLang="zh-CN" sz="1000"/>
-              <a:t>100</a:t>
-            </a:r>
-            <a:r>
-              <a:rPr lang="zh-CN" altLang="en-US" sz="1000"/>
-              <a:t>个）</a:t>
-            </a:r>
-            <a:r>
-              <a:rPr lang="en-US" altLang="zh-CN" sz="1000"/>
-              <a:t>[256]</a:t>
-            </a:r>
-            <a:r>
-              <a:rPr lang="zh-CN" altLang="en-US" sz="1000"/>
-              <a:t>维的随机向量。</a:t>
-            </a:r>
-            <a:endParaRPr lang="zh-CN" altLang="en-US" sz="1000"/>
-          </a:p>
-          <a:p>
-            <a:pPr lvl="1"/>
-            <a:r>
-              <a:rPr lang="zh-CN" altLang="en-US" sz="1000"/>
-              <a:t>位置编码：特征图上的像素点分别在什么位置</a:t>
-            </a:r>
-            <a:endParaRPr lang="zh-CN" altLang="en-US" sz="1000"/>
-          </a:p>
-          <a:p>
-            <a:r>
-              <a:rPr lang="en-US" altLang="zh-CN" sz="1200"/>
-              <a:t>2. </a:t>
-            </a:r>
-            <a:r>
-              <a:rPr lang="zh-CN" altLang="en-US" sz="1200"/>
-              <a:t>交互阶段：</a:t>
-            </a:r>
-            <a:endParaRPr lang="zh-CN" altLang="en-US" sz="1200"/>
-          </a:p>
-          <a:p>
-            <a:r>
-              <a:rPr lang="en-US" altLang="zh-CN" sz="1200"/>
-              <a:t>LineFormer </a:t>
-            </a:r>
-            <a:r>
-              <a:rPr lang="zh-CN" altLang="en-US" sz="1200"/>
-              <a:t>的</a:t>
-            </a:r>
-            <a:r>
-              <a:rPr lang="en-US" altLang="zh-CN" sz="1200"/>
-              <a:t> Decoder </a:t>
-            </a:r>
-            <a:r>
-              <a:rPr lang="zh-CN" altLang="en-US" sz="1200"/>
-              <a:t>通常包含</a:t>
-            </a:r>
-            <a:r>
-              <a:rPr lang="en-US" altLang="zh-CN" sz="1200"/>
-              <a:t> 6 </a:t>
-            </a:r>
-            <a:r>
-              <a:rPr lang="zh-CN" altLang="en-US" sz="1200"/>
-              <a:t>到</a:t>
-            </a:r>
-            <a:r>
-              <a:rPr lang="en-US" altLang="zh-CN" sz="1200"/>
-              <a:t> 9 </a:t>
-            </a:r>
-            <a:r>
-              <a:rPr lang="zh-CN" altLang="en-US" sz="1200"/>
-              <a:t>层（</a:t>
-            </a:r>
-            <a:r>
-              <a:rPr lang="en-US" altLang="zh-CN" sz="1200"/>
-              <a:t>Layer</a:t>
-            </a:r>
-            <a:r>
-              <a:rPr lang="zh-CN" altLang="en-US" sz="1200"/>
-              <a:t>）。每一层都在做同一件事：让</a:t>
-            </a:r>
-            <a:r>
-              <a:rPr lang="en-US" altLang="zh-CN" sz="1200"/>
-              <a:t> Query</a:t>
-            </a:r>
-            <a:r>
-              <a:rPr lang="zh-CN" altLang="en-US" sz="1200"/>
-              <a:t>变得更懂它要找的那条线</a:t>
-            </a:r>
-            <a:endParaRPr lang="zh-CN" altLang="en-US" sz="1200"/>
-          </a:p>
-          <a:p>
-            <a:pPr lvl="1"/>
-            <a:r>
-              <a:rPr lang="zh-CN" altLang="en-US" sz="990"/>
-              <a:t>第一步：</a:t>
-            </a:r>
-            <a:r>
-              <a:rPr lang="en-US" altLang="zh-CN" sz="990"/>
-              <a:t>Cross-Attention</a:t>
-            </a:r>
-            <a:endParaRPr lang="en-US" altLang="zh-CN" sz="990"/>
-          </a:p>
-          <a:p>
-            <a:pPr lvl="2"/>
-            <a:r>
-              <a:rPr lang="zh-CN" altLang="en-US" sz="990"/>
-              <a:t>通过</a:t>
-            </a:r>
-            <a:r>
-              <a:rPr lang="en-US" altLang="zh-CN" sz="990"/>
-              <a:t> Masked Attention</a:t>
-            </a:r>
-            <a:r>
-              <a:rPr lang="zh-CN" altLang="en-US" sz="990"/>
-              <a:t>（掩码注意力），</a:t>
-            </a:r>
-            <a:r>
-              <a:rPr lang="en-US" altLang="zh-CN" sz="990"/>
-              <a:t>Query</a:t>
-            </a:r>
-            <a:r>
-              <a:rPr lang="zh-CN" altLang="en-US" sz="990"/>
-              <a:t>只看上一轮自己认为有线的地方。</a:t>
-            </a:r>
-            <a:endParaRPr lang="zh-CN" altLang="en-US" sz="990"/>
-          </a:p>
-          <a:p>
-            <a:pPr lvl="2"/>
-            <a:r>
-              <a:rPr lang="zh-CN" altLang="en-US" sz="990"/>
-              <a:t>例子：</a:t>
-            </a:r>
-            <a:r>
-              <a:rPr lang="en-US" altLang="zh-CN" sz="990"/>
-              <a:t>Query 0 </a:t>
-            </a:r>
-            <a:r>
-              <a:rPr lang="zh-CN" altLang="en-US" sz="990"/>
-              <a:t>觉得</a:t>
-            </a:r>
-            <a:r>
-              <a:rPr lang="en-US" altLang="zh-CN" sz="990"/>
-              <a:t> (30, 40) </a:t>
-            </a:r>
-            <a:r>
-              <a:rPr lang="zh-CN" altLang="en-US" sz="990"/>
-              <a:t>这个坐标附近有一条上升的线，那它在这一层就会盯着</a:t>
-            </a:r>
-            <a:r>
-              <a:rPr lang="en-US" altLang="zh-CN" sz="990"/>
-              <a:t>(30, 40)</a:t>
-            </a:r>
-            <a:r>
-              <a:rPr lang="zh-CN" altLang="en-US" sz="990"/>
-              <a:t>周围的像素看，提取出这部分线条的颜色、粗细、连贯性特征。</a:t>
-            </a:r>
-            <a:endParaRPr lang="zh-CN" altLang="en-US" sz="990"/>
-          </a:p>
-          <a:p>
-            <a:pPr lvl="1"/>
-            <a:r>
-              <a:rPr lang="zh-CN" altLang="en-US" sz="990"/>
-              <a:t>第二步：</a:t>
-            </a:r>
-            <a:r>
-              <a:rPr lang="en-US" altLang="zh-CN" sz="990"/>
-              <a:t>Self-Attention</a:t>
-            </a:r>
-            <a:endParaRPr lang="en-US" altLang="zh-CN" sz="990"/>
-          </a:p>
-          <a:p>
-            <a:pPr lvl="2"/>
-            <a:r>
-              <a:rPr lang="zh-CN" altLang="en-US" sz="990"/>
-              <a:t>动作：</a:t>
-            </a:r>
-            <a:r>
-              <a:rPr lang="en-US" altLang="zh-CN" sz="990"/>
-              <a:t>100 </a:t>
-            </a:r>
-            <a:r>
-              <a:rPr lang="zh-CN" altLang="en-US" sz="990"/>
-              <a:t>个</a:t>
-            </a:r>
-            <a:r>
-              <a:rPr lang="en-US" altLang="zh-CN" sz="990"/>
-              <a:t> Query </a:t>
-            </a:r>
-            <a:r>
-              <a:rPr lang="zh-CN" altLang="en-US" sz="990"/>
-              <a:t>互相通信，确保</a:t>
-            </a:r>
-            <a:r>
-              <a:rPr lang="en-US" altLang="zh-CN" sz="990"/>
-              <a:t> 100 </a:t>
-            </a:r>
-            <a:r>
-              <a:rPr lang="zh-CN" altLang="en-US" sz="990"/>
-              <a:t>个</a:t>
-            </a:r>
-            <a:r>
-              <a:rPr lang="en-US" altLang="zh-CN" sz="990"/>
-              <a:t> Query </a:t>
-            </a:r>
-            <a:r>
-              <a:rPr lang="zh-CN" altLang="en-US" sz="990"/>
-              <a:t>最终各司其职，不会大家都去预测同一条线。</a:t>
-            </a:r>
-            <a:endParaRPr lang="zh-CN" altLang="en-US" sz="990"/>
-          </a:p>
-          <a:p>
-            <a:pPr lvl="1"/>
-            <a:r>
-              <a:rPr lang="zh-CN" altLang="en-US" sz="990"/>
-              <a:t>第三步：</a:t>
-            </a:r>
-            <a:r>
-              <a:rPr lang="en-US" altLang="zh-CN" sz="990"/>
-              <a:t>FFN</a:t>
-            </a:r>
-            <a:r>
-              <a:rPr lang="zh-CN" altLang="en-US" sz="990"/>
-              <a:t>：经过</a:t>
-            </a:r>
-            <a:r>
-              <a:rPr lang="en-US" altLang="zh-CN" sz="990"/>
-              <a:t> MLP </a:t>
-            </a:r>
-            <a:r>
-              <a:rPr lang="zh-CN" altLang="en-US" sz="990"/>
-              <a:t>网络，</a:t>
-            </a:r>
-            <a:r>
-              <a:rPr lang="en-US" altLang="zh-CN" sz="990"/>
-              <a:t>Query</a:t>
-            </a:r>
-            <a:r>
-              <a:rPr lang="zh-CN" altLang="en-US" sz="990"/>
-              <a:t>最终成了具有高度语义的</a:t>
-            </a:r>
-            <a:r>
-              <a:rPr lang="en-US" altLang="zh-CN" sz="990"/>
-              <a:t>“</a:t>
-            </a:r>
-            <a:r>
-              <a:rPr lang="zh-CN" altLang="en-US" sz="990"/>
-              <a:t>实例特征</a:t>
-            </a:r>
-            <a:r>
-              <a:rPr lang="en-US" altLang="zh-CN" sz="990"/>
-              <a:t>”</a:t>
-            </a:r>
-            <a:r>
-              <a:rPr lang="zh-CN" altLang="en-US" sz="990"/>
-              <a:t>。</a:t>
-            </a:r>
-            <a:endParaRPr lang="zh-CN" altLang="en-US" sz="1200"/>
-          </a:p>
-          <a:p>
-            <a:r>
-              <a:rPr lang="en-US" altLang="zh-CN" sz="1200"/>
-              <a:t>3. </a:t>
-            </a:r>
-            <a:r>
-              <a:rPr lang="zh-CN" altLang="en-US" sz="1200"/>
-              <a:t>输出阶段：</a:t>
-            </a:r>
-            <a:r>
-              <a:rPr lang="en-US" altLang="zh-CN" sz="1200"/>
-              <a:t>Decoder </a:t>
-            </a:r>
-            <a:r>
-              <a:rPr lang="zh-CN" altLang="en-US" sz="1200"/>
-              <a:t>输出</a:t>
-            </a:r>
-            <a:r>
-              <a:rPr lang="en-US" altLang="zh-CN" sz="1200"/>
-              <a:t>100</a:t>
-            </a:r>
-            <a:r>
-              <a:rPr lang="zh-CN" altLang="en-US" sz="1200"/>
-              <a:t>个</a:t>
-            </a:r>
-            <a:r>
-              <a:rPr lang="en-US" altLang="zh-CN" sz="1200"/>
-              <a:t>[256]</a:t>
-            </a:r>
-            <a:r>
-              <a:rPr lang="zh-CN" altLang="en-US" sz="1200"/>
-              <a:t>维的最终向量。</a:t>
-            </a:r>
-            <a:endParaRPr lang="zh-CN" altLang="en-US" sz="1200"/>
-          </a:p>
-          <a:p>
-            <a:pPr lvl="1"/>
-            <a:r>
-              <a:rPr lang="zh-CN" altLang="en-US" sz="990"/>
-              <a:t>分支一：</a:t>
-            </a:r>
-            <a:r>
-              <a:rPr lang="en-US" altLang="zh-CN" sz="990"/>
-              <a:t>Classification</a:t>
-            </a:r>
-            <a:r>
-              <a:rPr lang="zh-CN" altLang="en-US" sz="990"/>
-              <a:t>：每个</a:t>
-            </a:r>
-            <a:r>
-              <a:rPr lang="en-US" altLang="zh-CN" sz="990"/>
-              <a:t> Query </a:t>
-            </a:r>
-            <a:r>
-              <a:rPr lang="zh-CN" altLang="en-US" sz="990"/>
-              <a:t>向量进入一个线性层。结果：</a:t>
-            </a:r>
-            <a:r>
-              <a:rPr lang="en-US" altLang="zh-CN" sz="990"/>
-              <a:t>Query 0</a:t>
-            </a:r>
-            <a:r>
-              <a:rPr lang="zh-CN" altLang="en-US" sz="990"/>
-              <a:t>可能得到</a:t>
-            </a:r>
-            <a:r>
-              <a:rPr lang="en-US" altLang="zh-CN" sz="990"/>
-              <a:t> [0.98, 0.02]</a:t>
-            </a:r>
-            <a:r>
-              <a:rPr lang="zh-CN" altLang="en-US" sz="990"/>
-              <a:t>，意思是它有</a:t>
-            </a:r>
-            <a:r>
-              <a:rPr lang="en-US" altLang="zh-CN" sz="990"/>
-              <a:t>98%</a:t>
-            </a:r>
-            <a:r>
-              <a:rPr lang="zh-CN" altLang="en-US" sz="990"/>
-              <a:t>的把握抓到了一条线。</a:t>
-            </a:r>
-            <a:endParaRPr lang="zh-CN" altLang="en-US" sz="990"/>
-          </a:p>
-          <a:p>
-            <a:pPr lvl="1"/>
-            <a:r>
-              <a:rPr lang="zh-CN" altLang="en-US" sz="990"/>
-              <a:t>分支二：</a:t>
-            </a:r>
-            <a:r>
-              <a:rPr lang="en-US" altLang="zh-CN" sz="990"/>
-              <a:t>Mask Embedding</a:t>
-            </a:r>
-            <a:r>
-              <a:rPr lang="zh-CN" altLang="en-US" sz="990"/>
-              <a:t>：每个</a:t>
-            </a:r>
-            <a:r>
-              <a:rPr lang="en-US" altLang="zh-CN" sz="990"/>
-              <a:t> Query </a:t>
-            </a:r>
-            <a:r>
-              <a:rPr lang="zh-CN" altLang="en-US" sz="990"/>
-              <a:t>向量还会变成一个</a:t>
-            </a:r>
-            <a:r>
-              <a:rPr lang="en-US" altLang="zh-CN" sz="990"/>
-              <a:t>Mask</a:t>
-            </a:r>
-            <a:r>
-              <a:rPr lang="zh-CN" altLang="en-US" sz="990"/>
-              <a:t>特征向量（也是</a:t>
-            </a:r>
-            <a:r>
-              <a:rPr lang="en-US" altLang="zh-CN" sz="990"/>
-              <a:t> 256 </a:t>
-            </a:r>
-            <a:r>
-              <a:rPr lang="zh-CN" altLang="en-US" sz="990"/>
-              <a:t>维）。</a:t>
-            </a:r>
-            <a:endParaRPr lang="zh-CN" altLang="en-US" sz="1200"/>
-          </a:p>
-          <a:p>
-            <a:r>
-              <a:rPr lang="en-US" altLang="zh-CN" sz="1200"/>
-              <a:t>4. </a:t>
-            </a:r>
-            <a:r>
-              <a:rPr lang="zh-CN" altLang="en-US" sz="1200"/>
-              <a:t>点积：逐像素对比：</a:t>
-            </a:r>
-            <a:r>
-              <a:rPr lang="en-US" altLang="zh-CN" sz="1200"/>
-              <a:t>Query 0</a:t>
-            </a:r>
-            <a:r>
-              <a:rPr lang="zh-CN" altLang="en-US" sz="1200"/>
-              <a:t>的</a:t>
-            </a:r>
-            <a:r>
-              <a:rPr lang="en-US" altLang="zh-CN" sz="1200"/>
-              <a:t> [256] </a:t>
-            </a:r>
-            <a:r>
-              <a:rPr lang="zh-CN" altLang="en-US" sz="1200"/>
-              <a:t>向量，去跟特征图上</a:t>
-            </a:r>
-            <a:r>
-              <a:rPr lang="en-US" altLang="zh-CN" sz="1200">
-                <a:solidFill>
-                  <a:srgbClr val="FF0000"/>
-                </a:solidFill>
-                <a:sym typeface="+mn-ea"/>
-              </a:rPr>
-              <a:t> [256, 128, 128]</a:t>
-            </a:r>
-            <a:r>
-              <a:rPr lang="en-US" altLang="zh-CN" sz="1200"/>
-              <a:t>128*128 = 16384</a:t>
-            </a:r>
-            <a:r>
-              <a:rPr lang="zh-CN" altLang="en-US" sz="1200"/>
-              <a:t>个点逐一做乘法。</a:t>
-            </a:r>
-            <a:endParaRPr lang="zh-CN" altLang="en-US" sz="1200"/>
-          </a:p>
-          <a:p>
-            <a:pPr lvl="1"/>
-            <a:r>
-              <a:rPr lang="zh-CN" altLang="en-US" sz="990"/>
-              <a:t>逻辑：如果某个像素点的</a:t>
-            </a:r>
-            <a:r>
-              <a:rPr lang="en-US" altLang="zh-CN" sz="990"/>
-              <a:t> [256] </a:t>
-            </a:r>
-            <a:r>
-              <a:rPr lang="zh-CN" altLang="en-US" sz="990"/>
-              <a:t>维特征跟</a:t>
-            </a:r>
-            <a:r>
-              <a:rPr lang="en-US" altLang="zh-CN" sz="990"/>
-              <a:t> Query 0 </a:t>
-            </a:r>
-            <a:r>
-              <a:rPr lang="zh-CN" altLang="en-US" sz="990"/>
-              <a:t>匹配（比如都表现出</a:t>
-            </a:r>
-            <a:r>
-              <a:rPr lang="en-US" altLang="zh-CN" sz="990"/>
-              <a:t>“</a:t>
-            </a:r>
-            <a:r>
-              <a:rPr lang="zh-CN" altLang="en-US" sz="990"/>
-              <a:t>红色</a:t>
-            </a:r>
-            <a:r>
-              <a:rPr lang="en-US" altLang="zh-CN" sz="990"/>
-              <a:t>”</a:t>
-            </a:r>
-            <a:r>
-              <a:rPr lang="zh-CN" altLang="en-US" sz="990"/>
-              <a:t>、</a:t>
-            </a:r>
-            <a:r>
-              <a:rPr lang="en-US" altLang="zh-CN" sz="990"/>
-              <a:t>“</a:t>
-            </a:r>
-            <a:r>
-              <a:rPr lang="zh-CN" altLang="en-US" sz="990"/>
-              <a:t>虚线</a:t>
-            </a:r>
-            <a:r>
-              <a:rPr lang="en-US" altLang="zh-CN" sz="990"/>
-              <a:t>”</a:t>
-            </a:r>
-            <a:r>
-              <a:rPr lang="zh-CN" altLang="en-US" sz="990"/>
-              <a:t>、</a:t>
-            </a:r>
-            <a:r>
-              <a:rPr lang="en-US" altLang="zh-CN" sz="990"/>
-              <a:t>“45</a:t>
-            </a:r>
-            <a:r>
-              <a:rPr lang="zh-CN" altLang="en-US" sz="990"/>
-              <a:t>度角</a:t>
-            </a:r>
-            <a:r>
-              <a:rPr lang="en-US" altLang="zh-CN" sz="990"/>
-              <a:t>”</a:t>
-            </a:r>
-            <a:r>
-              <a:rPr lang="zh-CN" altLang="en-US" sz="990"/>
-              <a:t>），乘积就很大。</a:t>
-            </a:r>
-            <a:endParaRPr lang="zh-CN" altLang="en-US" sz="990"/>
-          </a:p>
-          <a:p>
-            <a:pPr lvl="1"/>
-            <a:r>
-              <a:rPr lang="zh-CN" altLang="en-US" sz="990"/>
-              <a:t>生成结果：最后得到一张</a:t>
-            </a:r>
-            <a:r>
-              <a:rPr lang="en-US" altLang="zh-CN" sz="990"/>
-              <a:t> [128, 128] </a:t>
-            </a:r>
-            <a:r>
-              <a:rPr lang="zh-CN" altLang="en-US" sz="990"/>
-              <a:t>的黑白图（</a:t>
-            </a:r>
-            <a:r>
-              <a:rPr lang="en-US" altLang="zh-CN" sz="990"/>
-              <a:t>Logit</a:t>
-            </a:r>
-            <a:r>
-              <a:rPr lang="zh-CN" altLang="en-US" sz="990"/>
-              <a:t>值经过</a:t>
-            </a:r>
-            <a:r>
-              <a:rPr lang="en-US" altLang="zh-CN" sz="990"/>
-              <a:t>Sigmoid</a:t>
-            </a:r>
-            <a:r>
-              <a:rPr lang="zh-CN" altLang="en-US" sz="990"/>
-              <a:t>函数后变成</a:t>
-            </a:r>
-            <a:r>
-              <a:rPr lang="en-US" altLang="zh-CN" sz="990"/>
-              <a:t>0</a:t>
-            </a:r>
-            <a:r>
-              <a:rPr lang="zh-CN" altLang="en-US" sz="990"/>
-              <a:t>到</a:t>
-            </a:r>
-            <a:r>
-              <a:rPr lang="en-US" altLang="zh-CN" sz="990"/>
-              <a:t>1</a:t>
-            </a:r>
-            <a:r>
-              <a:rPr lang="zh-CN" altLang="en-US" sz="990"/>
-              <a:t>之间的概率）。在</a:t>
-            </a:r>
-            <a:r>
-              <a:rPr lang="en-US" altLang="zh-CN" sz="990"/>
-              <a:t>512</a:t>
-            </a:r>
-            <a:r>
-              <a:rPr lang="zh-CN" altLang="en-US" sz="990"/>
-              <a:t>原图上：这相当于每</a:t>
-            </a:r>
-            <a:r>
-              <a:rPr lang="en-US" altLang="zh-CN" sz="990"/>
-              <a:t>4</a:t>
-            </a:r>
-            <a:r>
-              <a:rPr lang="zh-CN" altLang="en-US" sz="990"/>
-              <a:t>个原始像素对应这个掩码里的</a:t>
-            </a:r>
-            <a:r>
-              <a:rPr lang="en-US" altLang="zh-CN" sz="990"/>
-              <a:t> 1 </a:t>
-            </a:r>
-            <a:r>
-              <a:rPr lang="zh-CN" altLang="en-US" sz="990"/>
-              <a:t>个点。最后可以进行上采样还原至</a:t>
-            </a:r>
-            <a:r>
-              <a:rPr lang="en-US" altLang="zh-CN" sz="990"/>
-              <a:t>512</a:t>
-            </a:r>
-            <a:r>
-              <a:rPr lang="zh-CN" altLang="en-US" sz="990"/>
-              <a:t>。</a:t>
-            </a:r>
-            <a:endParaRPr lang="zh-CN" altLang="en-US" sz="990"/>
-          </a:p>
-        </p:txBody>
-      </p:sp>
-      <p:pic>
-        <p:nvPicPr>
-          <p:cNvPr id="4" name="图片 3"/>
-          <p:cNvPicPr>
-            <a:picLocks noChangeAspect="1"/>
-          </p:cNvPicPr>
-          <p:nvPr/>
-        </p:nvPicPr>
-        <p:blipFill>
-          <a:blip r:embed="rId3"/>
-          <a:srcRect l="27026" r="9806" b="53414"/>
-          <a:stretch>
-            <a:fillRect/>
-          </a:stretch>
-        </p:blipFill>
-        <p:spPr>
-          <a:xfrm>
-            <a:off x="6665595" y="116840"/>
-            <a:ext cx="5445760" cy="2338070"/>
-          </a:xfrm>
-          <a:prstGeom prst="rect">
-            <a:avLst/>
-          </a:prstGeom>
-        </p:spPr>
-      </p:pic>
-    </p:spTree>
-  </p:cSld>
-  <p:clrMapOvr>
-    <a:masterClrMapping/>
-  </p:clrMapOvr>
-</p:sld>
-</file>
-
-<file path=ppt/slides/slide8.xml><?xml version="1.0" encoding="utf-8"?>
-<p:sld xmlns:a="http://schemas.openxmlformats.org/drawingml/2006/main" xmlns:r="http://schemas.openxmlformats.org/officeDocument/2006/relationships" xmlns:p="http://schemas.openxmlformats.org/presentationml/2006/main">
-  <p:cSld>
-    <p:spTree>
-      <p:nvGrpSpPr>
-        <p:cNvPr id="1" name=""/>
-        <p:cNvGrpSpPr/>
-        <p:nvPr/>
-      </p:nvGrpSpPr>
-      <p:grpSpPr/>
-      <p:sp>
-        <p:nvSpPr>
-          <p:cNvPr id="2" name="标题 1"/>
-          <p:cNvSpPr>
-            <a:spLocks noGrp="1"/>
-          </p:cNvSpPr>
-          <p:nvPr>
-            <p:ph type="title"/>
-            <p:custDataLst>
-              <p:tags r:id="rId1"/>
-            </p:custDataLst>
-          </p:nvPr>
-        </p:nvSpPr>
-        <p:spPr/>
-        <p:txBody>
-          <a:bodyPr/>
-          <a:p>
-            <a:r>
-              <a:rPr lang="zh-CN" altLang="en-US"/>
-              <a:t>可视化</a:t>
-            </a:r>
-            <a:endParaRPr lang="zh-CN" altLang="en-US"/>
-          </a:p>
-        </p:txBody>
-      </p:sp>
-      <p:sp>
-        <p:nvSpPr>
-          <p:cNvPr id="3" name="内容占位符 2"/>
-          <p:cNvSpPr>
-            <a:spLocks noGrp="1"/>
-          </p:cNvSpPr>
-          <p:nvPr>
-            <p:ph idx="1"/>
-            <p:custDataLst>
-              <p:tags r:id="rId2"/>
-            </p:custDataLst>
-          </p:nvPr>
-        </p:nvSpPr>
-        <p:spPr/>
-        <p:txBody>
-          <a:bodyPr/>
-          <a:p>
-            <a:endParaRPr lang="zh-CN" altLang="en-US"/>
-          </a:p>
-        </p:txBody>
-      </p:sp>
-      <p:pic>
-        <p:nvPicPr>
-          <p:cNvPr id="9" name="图片 8" descr="bound2_infe"/>
-          <p:cNvPicPr>
-            <a:picLocks noChangeAspect="1"/>
-          </p:cNvPicPr>
-          <p:nvPr/>
-        </p:nvPicPr>
-        <p:blipFill>
-          <a:blip r:embed="rId3"/>
-          <a:stretch>
-            <a:fillRect/>
-          </a:stretch>
-        </p:blipFill>
-        <p:spPr>
-          <a:xfrm>
-            <a:off x="5473700" y="1313815"/>
-            <a:ext cx="6757670" cy="4838700"/>
-          </a:xfrm>
-          <a:prstGeom prst="rect">
-            <a:avLst/>
-          </a:prstGeom>
-        </p:spPr>
-      </p:pic>
-      <p:pic>
-        <p:nvPicPr>
-          <p:cNvPr id="11" name="图片 10" descr="bound2"/>
-          <p:cNvPicPr>
-            <a:picLocks noChangeAspect="1"/>
-          </p:cNvPicPr>
-          <p:nvPr/>
-        </p:nvPicPr>
-        <p:blipFill>
-          <a:blip r:embed="rId4"/>
-          <a:stretch>
-            <a:fillRect/>
-          </a:stretch>
-        </p:blipFill>
-        <p:spPr>
-          <a:xfrm>
-            <a:off x="161925" y="2008505"/>
-            <a:ext cx="5405120" cy="3869690"/>
-          </a:xfrm>
-          <a:prstGeom prst="rect">
-            <a:avLst/>
-          </a:prstGeom>
-        </p:spPr>
-      </p:pic>
-    </p:spTree>
-  </p:cSld>
-  <p:clrMapOvr>
-    <a:masterClrMapping/>
-  </p:clrMapOvr>
-</p:sld>
-</file>
-
-<file path=ppt/slides/slide9.xml><?xml version="1.0" encoding="utf-8"?>
-<p:sld xmlns:a="http://schemas.openxmlformats.org/drawingml/2006/main" xmlns:r="http://schemas.openxmlformats.org/officeDocument/2006/relationships" xmlns:p="http://schemas.openxmlformats.org/presentationml/2006/main">
-  <p:cSld>
-    <p:spTree>
-      <p:nvGrpSpPr>
-        <p:cNvPr id="1" name=""/>
-        <p:cNvGrpSpPr/>
-        <p:nvPr/>
-      </p:nvGrpSpPr>
-      <p:grpSpPr/>
-      <p:sp>
-        <p:nvSpPr>
-          <p:cNvPr id="2" name="标题 1"/>
-          <p:cNvSpPr>
-            <a:spLocks noGrp="1"/>
-          </p:cNvSpPr>
-          <p:nvPr>
-            <p:ph type="title"/>
-            <p:custDataLst>
-              <p:tags r:id="rId1"/>
-            </p:custDataLst>
-          </p:nvPr>
-        </p:nvSpPr>
-        <p:spPr/>
-        <p:txBody>
-          <a:bodyPr/>
-          <a:p>
-            <a:r>
-              <a:rPr lang="zh-CN" altLang="en-US"/>
-              <a:t>可视化</a:t>
-            </a:r>
-            <a:endParaRPr lang="zh-CN" altLang="en-US"/>
-          </a:p>
-        </p:txBody>
-      </p:sp>
-      <p:sp>
-        <p:nvSpPr>
-          <p:cNvPr id="3" name="内容占位符 2"/>
-          <p:cNvSpPr>
-            <a:spLocks noGrp="1"/>
-          </p:cNvSpPr>
-          <p:nvPr>
-            <p:ph idx="1"/>
-            <p:custDataLst>
-              <p:tags r:id="rId2"/>
-            </p:custDataLst>
-          </p:nvPr>
-        </p:nvSpPr>
-        <p:spPr/>
-        <p:txBody>
-          <a:bodyPr/>
-          <a:p>
-            <a:endParaRPr lang="zh-CN" altLang="en-US"/>
-          </a:p>
-        </p:txBody>
-      </p:sp>
-      <p:pic>
-        <p:nvPicPr>
-          <p:cNvPr id="5" name="图片 4" descr="chart2_0001"/>
-          <p:cNvPicPr>
-            <a:picLocks noChangeAspect="1"/>
-          </p:cNvPicPr>
-          <p:nvPr/>
-        </p:nvPicPr>
-        <p:blipFill>
-          <a:blip r:embed="rId3"/>
-          <a:stretch>
-            <a:fillRect/>
-          </a:stretch>
-        </p:blipFill>
-        <p:spPr>
-          <a:xfrm>
-            <a:off x="551815" y="1590040"/>
-            <a:ext cx="5198745" cy="4579620"/>
-          </a:xfrm>
-          <a:prstGeom prst="rect">
-            <a:avLst/>
-          </a:prstGeom>
-        </p:spPr>
-      </p:pic>
-      <p:pic>
-        <p:nvPicPr>
-          <p:cNvPr id="6" name="图片 5" descr="chart2_0001_result"/>
-          <p:cNvPicPr>
-            <a:picLocks noChangeAspect="1"/>
-          </p:cNvPicPr>
-          <p:nvPr/>
-        </p:nvPicPr>
-        <p:blipFill>
-          <a:blip r:embed="rId4"/>
-          <a:stretch>
-            <a:fillRect/>
-          </a:stretch>
-        </p:blipFill>
-        <p:spPr>
-          <a:xfrm>
-            <a:off x="5760720" y="870585"/>
-            <a:ext cx="6101080" cy="5374640"/>
-          </a:xfrm>
-          <a:prstGeom prst="rect">
-            <a:avLst/>
-          </a:prstGeom>
-        </p:spPr>
-      </p:pic>
-    </p:spTree>
-  </p:cSld>
-  <p:clrMapOvr>
-    <a:masterClrMapping/>
-  </p:clrMapOvr>
-</p:sld>
-</file>
-
 <file path=ppt/tags/tag1.xml><?xml version="1.0" encoding="utf-8"?>
 <p:tagLst xmlns:p="http://schemas.openxmlformats.org/presentationml/2006/main">
   <p:tag name="KSO_WM_UNIT_HIGHLIGHT" val="0"/>
@@ -8254,20 +8231,11 @@
 
 <file path=ppt/tags/tag63.xml><?xml version="1.0" encoding="utf-8"?>
 <p:tagLst xmlns:p="http://schemas.openxmlformats.org/presentationml/2006/main">
-  <p:tag name="KSO_WM_UNIT_ISCONTENTSTITLE" val="0"/>
-  <p:tag name="KSO_WM_UNIT_ISNUMDGMTITLE" val="0"/>
-  <p:tag name="KSO_WM_UNIT_NOCLEAR" val="0"/>
-  <p:tag name="KSO_WM_UNIT_SHOW_EDIT_AREA_INDICATION" val="1"/>
-  <p:tag name="KSO_WM_UNIT_VALUE" val="28"/>
   <p:tag name="KSO_WM_UNIT_HIGHLIGHT" val="0"/>
   <p:tag name="KSO_WM_UNIT_COMPATIBLE" val="0"/>
   <p:tag name="KSO_WM_UNIT_DIAGRAM_ISNUMVISUAL" val="0"/>
   <p:tag name="KSO_WM_UNIT_DIAGRAM_ISREFERUNIT" val="0"/>
-  <p:tag name="KSO_WM_UNIT_TYPE" val="a"/>
-  <p:tag name="KSO_WM_UNIT_INDEX" val="1"/>
-  <p:tag name="KSO_WM_UNIT_ID" val="custom20205081_1*a*1"/>
-  <p:tag name="KSO_WM_TEMPLATE_CATEGORY" val="custom"/>
-  <p:tag name="KSO_WM_TEMPLATE_INDEX" val="20205081"/>
+  <p:tag name="KSO_WM_UNIT_ID" val="_2**"/>
   <p:tag name="KSO_WM_UNIT_LAYERLEVEL" val="1"/>
   <p:tag name="KSO_WM_TAG_VERSION" val="1.0"/>
   <p:tag name="KSO_WM_BEAUTIFY_FLAG" val="#wm#"/>
@@ -8276,20 +8244,11 @@
 
 <file path=ppt/tags/tag64.xml><?xml version="1.0" encoding="utf-8"?>
 <p:tagLst xmlns:p="http://schemas.openxmlformats.org/presentationml/2006/main">
-  <p:tag name="KSO_WM_UNIT_ISCONTENTSTITLE" val="0"/>
-  <p:tag name="KSO_WM_UNIT_ISNUMDGMTITLE" val="0"/>
-  <p:tag name="KSO_WM_UNIT_NOCLEAR" val="0"/>
-  <p:tag name="KSO_WM_UNIT_SHOW_EDIT_AREA_INDICATION" val="1"/>
-  <p:tag name="KSO_WM_UNIT_VALUE" val="111"/>
   <p:tag name="KSO_WM_UNIT_HIGHLIGHT" val="0"/>
   <p:tag name="KSO_WM_UNIT_COMPATIBLE" val="0"/>
   <p:tag name="KSO_WM_UNIT_DIAGRAM_ISNUMVISUAL" val="0"/>
   <p:tag name="KSO_WM_UNIT_DIAGRAM_ISREFERUNIT" val="0"/>
-  <p:tag name="KSO_WM_UNIT_TYPE" val="b"/>
-  <p:tag name="KSO_WM_UNIT_INDEX" val="1"/>
-  <p:tag name="KSO_WM_UNIT_ID" val="custom20205081_1*b*1"/>
-  <p:tag name="KSO_WM_TEMPLATE_CATEGORY" val="custom"/>
-  <p:tag name="KSO_WM_TEMPLATE_INDEX" val="20205081"/>
+  <p:tag name="KSO_WM_UNIT_ID" val="_2**"/>
   <p:tag name="KSO_WM_UNIT_LAYERLEVEL" val="1"/>
   <p:tag name="KSO_WM_TAG_VERSION" val="1.0"/>
   <p:tag name="KSO_WM_BEAUTIFY_FLAG" val="#wm#"/>
@@ -8298,22 +8257,14 @@
 
 <file path=ppt/tags/tag65.xml><?xml version="1.0" encoding="utf-8"?>
 <p:tagLst xmlns:p="http://schemas.openxmlformats.org/presentationml/2006/main">
-  <p:tag name="KSO_WM_SLIDE_ID" val="custom20205081_1"/>
-  <p:tag name="KSO_WM_TEMPLATE_SUBCATEGORY" val="19"/>
-  <p:tag name="KSO_WM_TEMPLATE_MASTER_TYPE" val="0"/>
-  <p:tag name="KSO_WM_TEMPLATE_COLOR_TYPE" val="1"/>
-  <p:tag name="KSO_WM_SLIDE_TYPE" val="title"/>
-  <p:tag name="KSO_WM_SLIDE_SUBTYPE" val="defaultBlank"/>
-  <p:tag name="KSO_WM_SLIDE_ITEM_CNT" val="0"/>
-  <p:tag name="KSO_WM_SLIDE_INDEX" val="1"/>
+  <p:tag name="KSO_WM_UNIT_HIGHLIGHT" val="0"/>
+  <p:tag name="KSO_WM_UNIT_COMPATIBLE" val="0"/>
+  <p:tag name="KSO_WM_UNIT_DIAGRAM_ISNUMVISUAL" val="0"/>
+  <p:tag name="KSO_WM_UNIT_DIAGRAM_ISREFERUNIT" val="0"/>
+  <p:tag name="KSO_WM_UNIT_ID" val="_2**"/>
+  <p:tag name="KSO_WM_UNIT_LAYERLEVEL" val="1"/>
   <p:tag name="KSO_WM_TAG_VERSION" val="1.0"/>
   <p:tag name="KSO_WM_BEAUTIFY_FLAG" val="#wm#"/>
-  <p:tag name="KSO_WM_TEMPLATE_CATEGORY" val="custom"/>
-  <p:tag name="KSO_WM_TEMPLATE_INDEX" val="20205081"/>
-  <p:tag name="KSO_WM_SLIDE_LAYOUT" val="a_b"/>
-  <p:tag name="KSO_WM_SLIDE_LAYOUT_CNT" val="1_1"/>
-  <p:tag name="KSO_WM_UNIT_SHOW_EDIT_AREA_INDICATION" val="1"/>
-  <p:tag name="KSO_WM_TEMPLATE_THUMBS_INDEX" val="1、4、7、12、13、14、15、16、17、18、20、24、25、28、33、36、40、43、44"/>
 </p:tagLst>
 </file>
 
@@ -8540,14 +8491,8 @@
 
 <file path=ppt/tags/tag81.xml><?xml version="1.0" encoding="utf-8"?>
 <p:tagLst xmlns:p="http://schemas.openxmlformats.org/presentationml/2006/main">
-  <p:tag name="KSO_WM_UNIT_HIGHLIGHT" val="0"/>
-  <p:tag name="KSO_WM_UNIT_COMPATIBLE" val="0"/>
-  <p:tag name="KSO_WM_UNIT_DIAGRAM_ISNUMVISUAL" val="0"/>
-  <p:tag name="KSO_WM_UNIT_DIAGRAM_ISREFERUNIT" val="0"/>
-  <p:tag name="KSO_WM_UNIT_ID" val="_2**"/>
-  <p:tag name="KSO_WM_UNIT_LAYERLEVEL" val="1"/>
-  <p:tag name="KSO_WM_TAG_VERSION" val="1.0"/>
-  <p:tag name="KSO_WM_BEAUTIFY_FLAG" val="#wm#"/>
+  <p:tag name="TABLE_ENDDRAG_ORIGIN_RECT" val="825*134"/>
+  <p:tag name="TABLE_ENDDRAG_RECT" val="63*334*825*134"/>
 </p:tagLst>
 </file>
 
@@ -8565,39 +8510,6 @@
 </file>
 
 <file path=ppt/tags/tag83.xml><?xml version="1.0" encoding="utf-8"?>
-<p:tagLst xmlns:p="http://schemas.openxmlformats.org/presentationml/2006/main">
-  <p:tag name="KSO_WM_UNIT_HIGHLIGHT" val="0"/>
-  <p:tag name="KSO_WM_UNIT_COMPATIBLE" val="0"/>
-  <p:tag name="KSO_WM_UNIT_DIAGRAM_ISNUMVISUAL" val="0"/>
-  <p:tag name="KSO_WM_UNIT_DIAGRAM_ISREFERUNIT" val="0"/>
-  <p:tag name="KSO_WM_UNIT_ID" val="_2**"/>
-  <p:tag name="KSO_WM_UNIT_LAYERLEVEL" val="1"/>
-  <p:tag name="KSO_WM_TAG_VERSION" val="1.0"/>
-  <p:tag name="KSO_WM_BEAUTIFY_FLAG" val="#wm#"/>
-</p:tagLst>
-</file>
-
-<file path=ppt/tags/tag84.xml><?xml version="1.0" encoding="utf-8"?>
-<p:tagLst xmlns:p="http://schemas.openxmlformats.org/presentationml/2006/main">
-  <p:tag name="TABLE_ENDDRAG_ORIGIN_RECT" val="825*134"/>
-  <p:tag name="TABLE_ENDDRAG_RECT" val="63*334*825*134"/>
-</p:tagLst>
-</file>
-
-<file path=ppt/tags/tag85.xml><?xml version="1.0" encoding="utf-8"?>
-<p:tagLst xmlns:p="http://schemas.openxmlformats.org/presentationml/2006/main">
-  <p:tag name="KSO_WM_UNIT_HIGHLIGHT" val="0"/>
-  <p:tag name="KSO_WM_UNIT_COMPATIBLE" val="0"/>
-  <p:tag name="KSO_WM_UNIT_DIAGRAM_ISNUMVISUAL" val="0"/>
-  <p:tag name="KSO_WM_UNIT_DIAGRAM_ISREFERUNIT" val="0"/>
-  <p:tag name="KSO_WM_UNIT_ID" val="_2**"/>
-  <p:tag name="KSO_WM_UNIT_LAYERLEVEL" val="1"/>
-  <p:tag name="KSO_WM_TAG_VERSION" val="1.0"/>
-  <p:tag name="KSO_WM_BEAUTIFY_FLAG" val="#wm#"/>
-</p:tagLst>
-</file>
-
-<file path=ppt/tags/tag86.xml><?xml version="1.0" encoding="utf-8"?>
 <p:tagLst xmlns:p="http://schemas.openxmlformats.org/presentationml/2006/main">
   <p:tag name="KSO_WM_UNIT_HIGHLIGHT" val="0"/>
   <p:tag name="KSO_WM_UNIT_COMPATIBLE" val="0"/>
